--- a/input/images-source/Images.pptx
+++ b/input/images-source/Images.pptx
@@ -3,9 +3,11 @@
 <p:presentation xmlns:a="http://schemas.openxmlformats.org/drawingml/2006/main" xmlns:r="http://schemas.openxmlformats.org/officeDocument/2006/relationships" xmlns:p="http://schemas.openxmlformats.org/presentationml/2006/main" saveSubsetFonts="1">
   <p:sldMasterIdLst>
     <p:sldMasterId id="2147483648" r:id="rId1"/>
+    <p:sldMasterId id="2147483660" r:id="rId2"/>
   </p:sldMasterIdLst>
   <p:sldIdLst>
-    <p:sldId id="256" r:id="rId2"/>
+    <p:sldId id="256" r:id="rId3"/>
+    <p:sldId id="259" r:id="rId4"/>
   </p:sldIdLst>
   <p:sldSz cx="12192000" cy="6858000"/>
   <p:notesSz cx="6858000" cy="9144000"/>
@@ -104,6 +106,11 @@
       </a:defRPr>
     </a:lvl9pPr>
   </p:defaultTextStyle>
+  <p:extLst>
+    <p:ext uri="{EFAFB233-063F-42B5-8137-9DF3F51BA10A}">
+      <p15:sldGuideLst xmlns:p15="http://schemas.microsoft.com/office/powerpoint/2012/main"/>
+    </p:ext>
+  </p:extLst>
 </p:presentation>
 </file>
 
@@ -3456,7 +3463,7 @@
           <a:p>
             <a:fld id="{8D19A3AA-5CC1-4409-A3F5-5174B3C1B3E1}" type="datetimeFigureOut">
               <a:rPr lang="en-CA" smtClean="0"/>
-              <a:t>2019-09-11</a:t>
+              <a:t>2026-07-24</a:t>
             </a:fld>
             <a:endParaRPr lang="en-CA"/>
           </a:p>
@@ -3656,7 +3663,7 @@
           <a:p>
             <a:fld id="{8D19A3AA-5CC1-4409-A3F5-5174B3C1B3E1}" type="datetimeFigureOut">
               <a:rPr lang="en-CA" smtClean="0"/>
-              <a:t>2019-09-11</a:t>
+              <a:t>2026-07-24</a:t>
             </a:fld>
             <a:endParaRPr lang="en-CA"/>
           </a:p>
@@ -3866,7 +3873,7 @@
           <a:p>
             <a:fld id="{8D19A3AA-5CC1-4409-A3F5-5174B3C1B3E1}" type="datetimeFigureOut">
               <a:rPr lang="en-CA" smtClean="0"/>
-              <a:t>2019-09-11</a:t>
+              <a:t>2026-07-24</a:t>
             </a:fld>
             <a:endParaRPr lang="en-CA"/>
           </a:p>
@@ -3930,6 +3937,1941 @@
     <p:extLst>
       <p:ext uri="{BB962C8B-B14F-4D97-AF65-F5344CB8AC3E}">
         <p14:creationId xmlns:p14="http://schemas.microsoft.com/office/powerpoint/2010/main" val="2124046379"/>
+      </p:ext>
+    </p:extLst>
+  </p:cSld>
+  <p:clrMapOvr>
+    <a:masterClrMapping/>
+  </p:clrMapOvr>
+</p:sldLayout>
+</file>
+
+<file path=ppt/slideLayouts/slideLayout12.xml><?xml version="1.0" encoding="utf-8"?>
+<p:sldLayout xmlns:a="http://schemas.openxmlformats.org/drawingml/2006/main" xmlns:r="http://schemas.openxmlformats.org/officeDocument/2006/relationships" xmlns:p="http://schemas.openxmlformats.org/presentationml/2006/main" type="title" preserve="1">
+  <p:cSld name="Title Slide">
+    <p:spTree>
+      <p:nvGrpSpPr>
+        <p:cNvPr id="1" name=""/>
+        <p:cNvGrpSpPr/>
+        <p:nvPr/>
+      </p:nvGrpSpPr>
+      <p:grpSpPr>
+        <a:xfrm>
+          <a:off x="0" y="0"/>
+          <a:ext cx="0" cy="0"/>
+          <a:chOff x="0" y="0"/>
+          <a:chExt cx="0" cy="0"/>
+        </a:xfrm>
+      </p:grpSpPr>
+      <p:sp>
+        <p:nvSpPr>
+          <p:cNvPr id="2" name="Title 1">
+            <a:extLst>
+              <a:ext uri="{FF2B5EF4-FFF2-40B4-BE49-F238E27FC236}">
+                <a16:creationId xmlns:a16="http://schemas.microsoft.com/office/drawing/2014/main" id="{59ED4B41-5C15-5CD5-8341-0CD7FF9D64B3}"/>
+              </a:ext>
+            </a:extLst>
+          </p:cNvPr>
+          <p:cNvSpPr>
+            <a:spLocks noGrp="1"/>
+          </p:cNvSpPr>
+          <p:nvPr>
+            <p:ph type="ctrTitle"/>
+          </p:nvPr>
+        </p:nvSpPr>
+        <p:spPr>
+          <a:xfrm>
+            <a:off x="1524000" y="1122363"/>
+            <a:ext cx="9144000" cy="2387600"/>
+          </a:xfrm>
+        </p:spPr>
+        <p:txBody>
+          <a:bodyPr anchor="b"/>
+          <a:lstStyle>
+            <a:lvl1pPr algn="ctr">
+              <a:defRPr sz="6000"/>
+            </a:lvl1pPr>
+          </a:lstStyle>
+          <a:p>
+            <a:r>
+              <a:rPr lang="en-US"/>
+              <a:t>Click to edit Master title style</a:t>
+            </a:r>
+          </a:p>
+        </p:txBody>
+      </p:sp>
+      <p:sp>
+        <p:nvSpPr>
+          <p:cNvPr id="3" name="Subtitle 2">
+            <a:extLst>
+              <a:ext uri="{FF2B5EF4-FFF2-40B4-BE49-F238E27FC236}">
+                <a16:creationId xmlns:a16="http://schemas.microsoft.com/office/drawing/2014/main" id="{B612DBC5-ED3D-4438-38A2-B062DA55F570}"/>
+              </a:ext>
+            </a:extLst>
+          </p:cNvPr>
+          <p:cNvSpPr>
+            <a:spLocks noGrp="1"/>
+          </p:cNvSpPr>
+          <p:nvPr>
+            <p:ph type="subTitle" idx="1"/>
+          </p:nvPr>
+        </p:nvSpPr>
+        <p:spPr>
+          <a:xfrm>
+            <a:off x="1524000" y="3602038"/>
+            <a:ext cx="9144000" cy="1655762"/>
+          </a:xfrm>
+        </p:spPr>
+        <p:txBody>
+          <a:bodyPr/>
+          <a:lstStyle>
+            <a:lvl1pPr marL="0" indent="0" algn="ctr">
+              <a:buNone/>
+              <a:defRPr sz="2400"/>
+            </a:lvl1pPr>
+            <a:lvl2pPr marL="457200" indent="0" algn="ctr">
+              <a:buNone/>
+              <a:defRPr sz="2000"/>
+            </a:lvl2pPr>
+            <a:lvl3pPr marL="914400" indent="0" algn="ctr">
+              <a:buNone/>
+              <a:defRPr sz="1800"/>
+            </a:lvl3pPr>
+            <a:lvl4pPr marL="1371600" indent="0" algn="ctr">
+              <a:buNone/>
+              <a:defRPr sz="1600"/>
+            </a:lvl4pPr>
+            <a:lvl5pPr marL="1828800" indent="0" algn="ctr">
+              <a:buNone/>
+              <a:defRPr sz="1600"/>
+            </a:lvl5pPr>
+            <a:lvl6pPr marL="2286000" indent="0" algn="ctr">
+              <a:buNone/>
+              <a:defRPr sz="1600"/>
+            </a:lvl6pPr>
+            <a:lvl7pPr marL="2743200" indent="0" algn="ctr">
+              <a:buNone/>
+              <a:defRPr sz="1600"/>
+            </a:lvl7pPr>
+            <a:lvl8pPr marL="3200400" indent="0" algn="ctr">
+              <a:buNone/>
+              <a:defRPr sz="1600"/>
+            </a:lvl8pPr>
+            <a:lvl9pPr marL="3657600" indent="0" algn="ctr">
+              <a:buNone/>
+              <a:defRPr sz="1600"/>
+            </a:lvl9pPr>
+          </a:lstStyle>
+          <a:p>
+            <a:r>
+              <a:rPr lang="en-US"/>
+              <a:t>Click to edit Master subtitle style</a:t>
+            </a:r>
+          </a:p>
+        </p:txBody>
+      </p:sp>
+      <p:sp>
+        <p:nvSpPr>
+          <p:cNvPr id="4" name="Date Placeholder 3">
+            <a:extLst>
+              <a:ext uri="{FF2B5EF4-FFF2-40B4-BE49-F238E27FC236}">
+                <a16:creationId xmlns:a16="http://schemas.microsoft.com/office/drawing/2014/main" id="{37444480-985F-B78B-066F-58C354D59676}"/>
+              </a:ext>
+            </a:extLst>
+          </p:cNvPr>
+          <p:cNvSpPr>
+            <a:spLocks noGrp="1"/>
+          </p:cNvSpPr>
+          <p:nvPr>
+            <p:ph type="dt" sz="half" idx="10"/>
+          </p:nvPr>
+        </p:nvSpPr>
+        <p:spPr/>
+        <p:txBody>
+          <a:bodyPr/>
+          <a:lstStyle/>
+          <a:p>
+            <a:fld id="{DB28C05C-8A5D-4902-A59B-494921F3C1DF}" type="datetimeFigureOut">
+              <a:rPr lang="en-US" smtClean="0"/>
+              <a:t>7/24/2026</a:t>
+            </a:fld>
+            <a:endParaRPr lang="en-US"/>
+          </a:p>
+        </p:txBody>
+      </p:sp>
+      <p:sp>
+        <p:nvSpPr>
+          <p:cNvPr id="5" name="Footer Placeholder 4">
+            <a:extLst>
+              <a:ext uri="{FF2B5EF4-FFF2-40B4-BE49-F238E27FC236}">
+                <a16:creationId xmlns:a16="http://schemas.microsoft.com/office/drawing/2014/main" id="{98E7570C-8D28-9A8B-5E1C-BC7970E0F4E7}"/>
+              </a:ext>
+            </a:extLst>
+          </p:cNvPr>
+          <p:cNvSpPr>
+            <a:spLocks noGrp="1"/>
+          </p:cNvSpPr>
+          <p:nvPr>
+            <p:ph type="ftr" sz="quarter" idx="11"/>
+          </p:nvPr>
+        </p:nvSpPr>
+        <p:spPr/>
+        <p:txBody>
+          <a:bodyPr/>
+          <a:lstStyle/>
+          <a:p>
+            <a:endParaRPr lang="en-US"/>
+          </a:p>
+        </p:txBody>
+      </p:sp>
+      <p:sp>
+        <p:nvSpPr>
+          <p:cNvPr id="6" name="Slide Number Placeholder 5">
+            <a:extLst>
+              <a:ext uri="{FF2B5EF4-FFF2-40B4-BE49-F238E27FC236}">
+                <a16:creationId xmlns:a16="http://schemas.microsoft.com/office/drawing/2014/main" id="{253D11FC-8E59-1674-E861-85B8F151A8F6}"/>
+              </a:ext>
+            </a:extLst>
+          </p:cNvPr>
+          <p:cNvSpPr>
+            <a:spLocks noGrp="1"/>
+          </p:cNvSpPr>
+          <p:nvPr>
+            <p:ph type="sldNum" sz="quarter" idx="12"/>
+          </p:nvPr>
+        </p:nvSpPr>
+        <p:spPr/>
+        <p:txBody>
+          <a:bodyPr/>
+          <a:lstStyle/>
+          <a:p>
+            <a:fld id="{BFA846FA-1D06-4D07-A363-F2A8ECB2D61A}" type="slidenum">
+              <a:rPr lang="en-US" smtClean="0"/>
+              <a:t>‹#›</a:t>
+            </a:fld>
+            <a:endParaRPr lang="en-US"/>
+          </a:p>
+        </p:txBody>
+      </p:sp>
+    </p:spTree>
+    <p:extLst>
+      <p:ext uri="{BB962C8B-B14F-4D97-AF65-F5344CB8AC3E}">
+        <p14:creationId xmlns:p14="http://schemas.microsoft.com/office/powerpoint/2010/main" val="4281784805"/>
+      </p:ext>
+    </p:extLst>
+  </p:cSld>
+  <p:clrMapOvr>
+    <a:masterClrMapping/>
+  </p:clrMapOvr>
+</p:sldLayout>
+</file>
+
+<file path=ppt/slideLayouts/slideLayout13.xml><?xml version="1.0" encoding="utf-8"?>
+<p:sldLayout xmlns:a="http://schemas.openxmlformats.org/drawingml/2006/main" xmlns:r="http://schemas.openxmlformats.org/officeDocument/2006/relationships" xmlns:p="http://schemas.openxmlformats.org/presentationml/2006/main" type="obj" preserve="1">
+  <p:cSld name="Title and Content">
+    <p:spTree>
+      <p:nvGrpSpPr>
+        <p:cNvPr id="1" name=""/>
+        <p:cNvGrpSpPr/>
+        <p:nvPr/>
+      </p:nvGrpSpPr>
+      <p:grpSpPr>
+        <a:xfrm>
+          <a:off x="0" y="0"/>
+          <a:ext cx="0" cy="0"/>
+          <a:chOff x="0" y="0"/>
+          <a:chExt cx="0" cy="0"/>
+        </a:xfrm>
+      </p:grpSpPr>
+      <p:sp>
+        <p:nvSpPr>
+          <p:cNvPr id="2" name="Title 1">
+            <a:extLst>
+              <a:ext uri="{FF2B5EF4-FFF2-40B4-BE49-F238E27FC236}">
+                <a16:creationId xmlns:a16="http://schemas.microsoft.com/office/drawing/2014/main" id="{52E5CB5A-0721-E074-E899-A7C31E74AEF0}"/>
+              </a:ext>
+            </a:extLst>
+          </p:cNvPr>
+          <p:cNvSpPr>
+            <a:spLocks noGrp="1"/>
+          </p:cNvSpPr>
+          <p:nvPr>
+            <p:ph type="title"/>
+          </p:nvPr>
+        </p:nvSpPr>
+        <p:spPr/>
+        <p:txBody>
+          <a:bodyPr/>
+          <a:lstStyle/>
+          <a:p>
+            <a:r>
+              <a:rPr lang="en-US"/>
+              <a:t>Click to edit Master title style</a:t>
+            </a:r>
+          </a:p>
+        </p:txBody>
+      </p:sp>
+      <p:sp>
+        <p:nvSpPr>
+          <p:cNvPr id="3" name="Content Placeholder 2">
+            <a:extLst>
+              <a:ext uri="{FF2B5EF4-FFF2-40B4-BE49-F238E27FC236}">
+                <a16:creationId xmlns:a16="http://schemas.microsoft.com/office/drawing/2014/main" id="{DDDFB01B-6D08-143B-8623-3C4FF4017687}"/>
+              </a:ext>
+            </a:extLst>
+          </p:cNvPr>
+          <p:cNvSpPr>
+            <a:spLocks noGrp="1"/>
+          </p:cNvSpPr>
+          <p:nvPr>
+            <p:ph idx="1"/>
+          </p:nvPr>
+        </p:nvSpPr>
+        <p:spPr/>
+        <p:txBody>
+          <a:bodyPr/>
+          <a:lstStyle/>
+          <a:p>
+            <a:pPr lvl="0"/>
+            <a:r>
+              <a:rPr lang="en-US"/>
+              <a:t>Click to edit Master text styles</a:t>
+            </a:r>
+          </a:p>
+          <a:p>
+            <a:pPr lvl="1"/>
+            <a:r>
+              <a:rPr lang="en-US"/>
+              <a:t>Second level</a:t>
+            </a:r>
+          </a:p>
+          <a:p>
+            <a:pPr lvl="2"/>
+            <a:r>
+              <a:rPr lang="en-US"/>
+              <a:t>Third level</a:t>
+            </a:r>
+          </a:p>
+          <a:p>
+            <a:pPr lvl="3"/>
+            <a:r>
+              <a:rPr lang="en-US"/>
+              <a:t>Fourth level</a:t>
+            </a:r>
+          </a:p>
+          <a:p>
+            <a:pPr lvl="4"/>
+            <a:r>
+              <a:rPr lang="en-US"/>
+              <a:t>Fifth level</a:t>
+            </a:r>
+          </a:p>
+        </p:txBody>
+      </p:sp>
+      <p:sp>
+        <p:nvSpPr>
+          <p:cNvPr id="4" name="Date Placeholder 3">
+            <a:extLst>
+              <a:ext uri="{FF2B5EF4-FFF2-40B4-BE49-F238E27FC236}">
+                <a16:creationId xmlns:a16="http://schemas.microsoft.com/office/drawing/2014/main" id="{1D6A8360-6D8E-5305-B005-B24097C06A03}"/>
+              </a:ext>
+            </a:extLst>
+          </p:cNvPr>
+          <p:cNvSpPr>
+            <a:spLocks noGrp="1"/>
+          </p:cNvSpPr>
+          <p:nvPr>
+            <p:ph type="dt" sz="half" idx="10"/>
+          </p:nvPr>
+        </p:nvSpPr>
+        <p:spPr/>
+        <p:txBody>
+          <a:bodyPr/>
+          <a:lstStyle/>
+          <a:p>
+            <a:fld id="{DB28C05C-8A5D-4902-A59B-494921F3C1DF}" type="datetimeFigureOut">
+              <a:rPr lang="en-US" smtClean="0"/>
+              <a:t>7/24/2026</a:t>
+            </a:fld>
+            <a:endParaRPr lang="en-US"/>
+          </a:p>
+        </p:txBody>
+      </p:sp>
+      <p:sp>
+        <p:nvSpPr>
+          <p:cNvPr id="5" name="Footer Placeholder 4">
+            <a:extLst>
+              <a:ext uri="{FF2B5EF4-FFF2-40B4-BE49-F238E27FC236}">
+                <a16:creationId xmlns:a16="http://schemas.microsoft.com/office/drawing/2014/main" id="{8F1CBBE5-8C1E-FF73-0010-367A0E288DC4}"/>
+              </a:ext>
+            </a:extLst>
+          </p:cNvPr>
+          <p:cNvSpPr>
+            <a:spLocks noGrp="1"/>
+          </p:cNvSpPr>
+          <p:nvPr>
+            <p:ph type="ftr" sz="quarter" idx="11"/>
+          </p:nvPr>
+        </p:nvSpPr>
+        <p:spPr/>
+        <p:txBody>
+          <a:bodyPr/>
+          <a:lstStyle/>
+          <a:p>
+            <a:endParaRPr lang="en-US"/>
+          </a:p>
+        </p:txBody>
+      </p:sp>
+      <p:sp>
+        <p:nvSpPr>
+          <p:cNvPr id="6" name="Slide Number Placeholder 5">
+            <a:extLst>
+              <a:ext uri="{FF2B5EF4-FFF2-40B4-BE49-F238E27FC236}">
+                <a16:creationId xmlns:a16="http://schemas.microsoft.com/office/drawing/2014/main" id="{8338289C-63FB-8035-F4CA-DDEB87B2B09B}"/>
+              </a:ext>
+            </a:extLst>
+          </p:cNvPr>
+          <p:cNvSpPr>
+            <a:spLocks noGrp="1"/>
+          </p:cNvSpPr>
+          <p:nvPr>
+            <p:ph type="sldNum" sz="quarter" idx="12"/>
+          </p:nvPr>
+        </p:nvSpPr>
+        <p:spPr/>
+        <p:txBody>
+          <a:bodyPr/>
+          <a:lstStyle/>
+          <a:p>
+            <a:fld id="{BFA846FA-1D06-4D07-A363-F2A8ECB2D61A}" type="slidenum">
+              <a:rPr lang="en-US" smtClean="0"/>
+              <a:t>‹#›</a:t>
+            </a:fld>
+            <a:endParaRPr lang="en-US"/>
+          </a:p>
+        </p:txBody>
+      </p:sp>
+    </p:spTree>
+    <p:extLst>
+      <p:ext uri="{BB962C8B-B14F-4D97-AF65-F5344CB8AC3E}">
+        <p14:creationId xmlns:p14="http://schemas.microsoft.com/office/powerpoint/2010/main" val="3275335208"/>
+      </p:ext>
+    </p:extLst>
+  </p:cSld>
+  <p:clrMapOvr>
+    <a:masterClrMapping/>
+  </p:clrMapOvr>
+</p:sldLayout>
+</file>
+
+<file path=ppt/slideLayouts/slideLayout14.xml><?xml version="1.0" encoding="utf-8"?>
+<p:sldLayout xmlns:a="http://schemas.openxmlformats.org/drawingml/2006/main" xmlns:r="http://schemas.openxmlformats.org/officeDocument/2006/relationships" xmlns:p="http://schemas.openxmlformats.org/presentationml/2006/main" type="secHead" preserve="1">
+  <p:cSld name="Section Header">
+    <p:spTree>
+      <p:nvGrpSpPr>
+        <p:cNvPr id="1" name=""/>
+        <p:cNvGrpSpPr/>
+        <p:nvPr/>
+      </p:nvGrpSpPr>
+      <p:grpSpPr>
+        <a:xfrm>
+          <a:off x="0" y="0"/>
+          <a:ext cx="0" cy="0"/>
+          <a:chOff x="0" y="0"/>
+          <a:chExt cx="0" cy="0"/>
+        </a:xfrm>
+      </p:grpSpPr>
+      <p:sp>
+        <p:nvSpPr>
+          <p:cNvPr id="2" name="Title 1">
+            <a:extLst>
+              <a:ext uri="{FF2B5EF4-FFF2-40B4-BE49-F238E27FC236}">
+                <a16:creationId xmlns:a16="http://schemas.microsoft.com/office/drawing/2014/main" id="{84CF00F3-47AE-FC93-A042-EFA1DA22B82E}"/>
+              </a:ext>
+            </a:extLst>
+          </p:cNvPr>
+          <p:cNvSpPr>
+            <a:spLocks noGrp="1"/>
+          </p:cNvSpPr>
+          <p:nvPr>
+            <p:ph type="title"/>
+          </p:nvPr>
+        </p:nvSpPr>
+        <p:spPr>
+          <a:xfrm>
+            <a:off x="831850" y="1709738"/>
+            <a:ext cx="10515600" cy="2852737"/>
+          </a:xfrm>
+        </p:spPr>
+        <p:txBody>
+          <a:bodyPr anchor="b"/>
+          <a:lstStyle>
+            <a:lvl1pPr>
+              <a:defRPr sz="6000"/>
+            </a:lvl1pPr>
+          </a:lstStyle>
+          <a:p>
+            <a:r>
+              <a:rPr lang="en-US"/>
+              <a:t>Click to edit Master title style</a:t>
+            </a:r>
+          </a:p>
+        </p:txBody>
+      </p:sp>
+      <p:sp>
+        <p:nvSpPr>
+          <p:cNvPr id="3" name="Text Placeholder 2">
+            <a:extLst>
+              <a:ext uri="{FF2B5EF4-FFF2-40B4-BE49-F238E27FC236}">
+                <a16:creationId xmlns:a16="http://schemas.microsoft.com/office/drawing/2014/main" id="{079E6147-3BD1-7F1E-B2D1-A8A8EA2E045C}"/>
+              </a:ext>
+            </a:extLst>
+          </p:cNvPr>
+          <p:cNvSpPr>
+            <a:spLocks noGrp="1"/>
+          </p:cNvSpPr>
+          <p:nvPr>
+            <p:ph type="body" idx="1"/>
+          </p:nvPr>
+        </p:nvSpPr>
+        <p:spPr>
+          <a:xfrm>
+            <a:off x="831850" y="4589463"/>
+            <a:ext cx="10515600" cy="1500187"/>
+          </a:xfrm>
+        </p:spPr>
+        <p:txBody>
+          <a:bodyPr/>
+          <a:lstStyle>
+            <a:lvl1pPr marL="0" indent="0">
+              <a:buNone/>
+              <a:defRPr sz="2400">
+                <a:solidFill>
+                  <a:schemeClr val="tx1">
+                    <a:tint val="82000"/>
+                  </a:schemeClr>
+                </a:solidFill>
+              </a:defRPr>
+            </a:lvl1pPr>
+            <a:lvl2pPr marL="457200" indent="0">
+              <a:buNone/>
+              <a:defRPr sz="2000">
+                <a:solidFill>
+                  <a:schemeClr val="tx1">
+                    <a:tint val="82000"/>
+                  </a:schemeClr>
+                </a:solidFill>
+              </a:defRPr>
+            </a:lvl2pPr>
+            <a:lvl3pPr marL="914400" indent="0">
+              <a:buNone/>
+              <a:defRPr sz="1800">
+                <a:solidFill>
+                  <a:schemeClr val="tx1">
+                    <a:tint val="82000"/>
+                  </a:schemeClr>
+                </a:solidFill>
+              </a:defRPr>
+            </a:lvl3pPr>
+            <a:lvl4pPr marL="1371600" indent="0">
+              <a:buNone/>
+              <a:defRPr sz="1600">
+                <a:solidFill>
+                  <a:schemeClr val="tx1">
+                    <a:tint val="82000"/>
+                  </a:schemeClr>
+                </a:solidFill>
+              </a:defRPr>
+            </a:lvl4pPr>
+            <a:lvl5pPr marL="1828800" indent="0">
+              <a:buNone/>
+              <a:defRPr sz="1600">
+                <a:solidFill>
+                  <a:schemeClr val="tx1">
+                    <a:tint val="82000"/>
+                  </a:schemeClr>
+                </a:solidFill>
+              </a:defRPr>
+            </a:lvl5pPr>
+            <a:lvl6pPr marL="2286000" indent="0">
+              <a:buNone/>
+              <a:defRPr sz="1600">
+                <a:solidFill>
+                  <a:schemeClr val="tx1">
+                    <a:tint val="82000"/>
+                  </a:schemeClr>
+                </a:solidFill>
+              </a:defRPr>
+            </a:lvl6pPr>
+            <a:lvl7pPr marL="2743200" indent="0">
+              <a:buNone/>
+              <a:defRPr sz="1600">
+                <a:solidFill>
+                  <a:schemeClr val="tx1">
+                    <a:tint val="82000"/>
+                  </a:schemeClr>
+                </a:solidFill>
+              </a:defRPr>
+            </a:lvl7pPr>
+            <a:lvl8pPr marL="3200400" indent="0">
+              <a:buNone/>
+              <a:defRPr sz="1600">
+                <a:solidFill>
+                  <a:schemeClr val="tx1">
+                    <a:tint val="82000"/>
+                  </a:schemeClr>
+                </a:solidFill>
+              </a:defRPr>
+            </a:lvl8pPr>
+            <a:lvl9pPr marL="3657600" indent="0">
+              <a:buNone/>
+              <a:defRPr sz="1600">
+                <a:solidFill>
+                  <a:schemeClr val="tx1">
+                    <a:tint val="82000"/>
+                  </a:schemeClr>
+                </a:solidFill>
+              </a:defRPr>
+            </a:lvl9pPr>
+          </a:lstStyle>
+          <a:p>
+            <a:pPr lvl="0"/>
+            <a:r>
+              <a:rPr lang="en-US"/>
+              <a:t>Click to edit Master text styles</a:t>
+            </a:r>
+          </a:p>
+        </p:txBody>
+      </p:sp>
+      <p:sp>
+        <p:nvSpPr>
+          <p:cNvPr id="4" name="Date Placeholder 3">
+            <a:extLst>
+              <a:ext uri="{FF2B5EF4-FFF2-40B4-BE49-F238E27FC236}">
+                <a16:creationId xmlns:a16="http://schemas.microsoft.com/office/drawing/2014/main" id="{0806B13D-50E0-0A69-E9E8-5B8297F3F58F}"/>
+              </a:ext>
+            </a:extLst>
+          </p:cNvPr>
+          <p:cNvSpPr>
+            <a:spLocks noGrp="1"/>
+          </p:cNvSpPr>
+          <p:nvPr>
+            <p:ph type="dt" sz="half" idx="10"/>
+          </p:nvPr>
+        </p:nvSpPr>
+        <p:spPr/>
+        <p:txBody>
+          <a:bodyPr/>
+          <a:lstStyle/>
+          <a:p>
+            <a:fld id="{DB28C05C-8A5D-4902-A59B-494921F3C1DF}" type="datetimeFigureOut">
+              <a:rPr lang="en-US" smtClean="0"/>
+              <a:t>7/24/2026</a:t>
+            </a:fld>
+            <a:endParaRPr lang="en-US"/>
+          </a:p>
+        </p:txBody>
+      </p:sp>
+      <p:sp>
+        <p:nvSpPr>
+          <p:cNvPr id="5" name="Footer Placeholder 4">
+            <a:extLst>
+              <a:ext uri="{FF2B5EF4-FFF2-40B4-BE49-F238E27FC236}">
+                <a16:creationId xmlns:a16="http://schemas.microsoft.com/office/drawing/2014/main" id="{395B9BFE-AD1D-E5BD-60C9-58342A62914A}"/>
+              </a:ext>
+            </a:extLst>
+          </p:cNvPr>
+          <p:cNvSpPr>
+            <a:spLocks noGrp="1"/>
+          </p:cNvSpPr>
+          <p:nvPr>
+            <p:ph type="ftr" sz="quarter" idx="11"/>
+          </p:nvPr>
+        </p:nvSpPr>
+        <p:spPr/>
+        <p:txBody>
+          <a:bodyPr/>
+          <a:lstStyle/>
+          <a:p>
+            <a:endParaRPr lang="en-US"/>
+          </a:p>
+        </p:txBody>
+      </p:sp>
+      <p:sp>
+        <p:nvSpPr>
+          <p:cNvPr id="6" name="Slide Number Placeholder 5">
+            <a:extLst>
+              <a:ext uri="{FF2B5EF4-FFF2-40B4-BE49-F238E27FC236}">
+                <a16:creationId xmlns:a16="http://schemas.microsoft.com/office/drawing/2014/main" id="{FE0DA25E-C081-AF57-A6A8-D25E2C4A579A}"/>
+              </a:ext>
+            </a:extLst>
+          </p:cNvPr>
+          <p:cNvSpPr>
+            <a:spLocks noGrp="1"/>
+          </p:cNvSpPr>
+          <p:nvPr>
+            <p:ph type="sldNum" sz="quarter" idx="12"/>
+          </p:nvPr>
+        </p:nvSpPr>
+        <p:spPr/>
+        <p:txBody>
+          <a:bodyPr/>
+          <a:lstStyle/>
+          <a:p>
+            <a:fld id="{BFA846FA-1D06-4D07-A363-F2A8ECB2D61A}" type="slidenum">
+              <a:rPr lang="en-US" smtClean="0"/>
+              <a:t>‹#›</a:t>
+            </a:fld>
+            <a:endParaRPr lang="en-US"/>
+          </a:p>
+        </p:txBody>
+      </p:sp>
+    </p:spTree>
+    <p:extLst>
+      <p:ext uri="{BB962C8B-B14F-4D97-AF65-F5344CB8AC3E}">
+        <p14:creationId xmlns:p14="http://schemas.microsoft.com/office/powerpoint/2010/main" val="3439114843"/>
+      </p:ext>
+    </p:extLst>
+  </p:cSld>
+  <p:clrMapOvr>
+    <a:masterClrMapping/>
+  </p:clrMapOvr>
+</p:sldLayout>
+</file>
+
+<file path=ppt/slideLayouts/slideLayout15.xml><?xml version="1.0" encoding="utf-8"?>
+<p:sldLayout xmlns:a="http://schemas.openxmlformats.org/drawingml/2006/main" xmlns:r="http://schemas.openxmlformats.org/officeDocument/2006/relationships" xmlns:p="http://schemas.openxmlformats.org/presentationml/2006/main" type="twoObj" preserve="1">
+  <p:cSld name="Two Content">
+    <p:spTree>
+      <p:nvGrpSpPr>
+        <p:cNvPr id="1" name=""/>
+        <p:cNvGrpSpPr/>
+        <p:nvPr/>
+      </p:nvGrpSpPr>
+      <p:grpSpPr>
+        <a:xfrm>
+          <a:off x="0" y="0"/>
+          <a:ext cx="0" cy="0"/>
+          <a:chOff x="0" y="0"/>
+          <a:chExt cx="0" cy="0"/>
+        </a:xfrm>
+      </p:grpSpPr>
+      <p:sp>
+        <p:nvSpPr>
+          <p:cNvPr id="2" name="Title 1">
+            <a:extLst>
+              <a:ext uri="{FF2B5EF4-FFF2-40B4-BE49-F238E27FC236}">
+                <a16:creationId xmlns:a16="http://schemas.microsoft.com/office/drawing/2014/main" id="{DC68F983-4951-3699-A6ED-EC94F57EC939}"/>
+              </a:ext>
+            </a:extLst>
+          </p:cNvPr>
+          <p:cNvSpPr>
+            <a:spLocks noGrp="1"/>
+          </p:cNvSpPr>
+          <p:nvPr>
+            <p:ph type="title"/>
+          </p:nvPr>
+        </p:nvSpPr>
+        <p:spPr/>
+        <p:txBody>
+          <a:bodyPr/>
+          <a:lstStyle/>
+          <a:p>
+            <a:r>
+              <a:rPr lang="en-US"/>
+              <a:t>Click to edit Master title style</a:t>
+            </a:r>
+          </a:p>
+        </p:txBody>
+      </p:sp>
+      <p:sp>
+        <p:nvSpPr>
+          <p:cNvPr id="3" name="Content Placeholder 2">
+            <a:extLst>
+              <a:ext uri="{FF2B5EF4-FFF2-40B4-BE49-F238E27FC236}">
+                <a16:creationId xmlns:a16="http://schemas.microsoft.com/office/drawing/2014/main" id="{C090B707-AC40-E260-134E-1EFCB598A016}"/>
+              </a:ext>
+            </a:extLst>
+          </p:cNvPr>
+          <p:cNvSpPr>
+            <a:spLocks noGrp="1"/>
+          </p:cNvSpPr>
+          <p:nvPr>
+            <p:ph sz="half" idx="1"/>
+          </p:nvPr>
+        </p:nvSpPr>
+        <p:spPr>
+          <a:xfrm>
+            <a:off x="838200" y="1825625"/>
+            <a:ext cx="5181600" cy="4351338"/>
+          </a:xfrm>
+        </p:spPr>
+        <p:txBody>
+          <a:bodyPr/>
+          <a:lstStyle/>
+          <a:p>
+            <a:pPr lvl="0"/>
+            <a:r>
+              <a:rPr lang="en-US"/>
+              <a:t>Click to edit Master text styles</a:t>
+            </a:r>
+          </a:p>
+          <a:p>
+            <a:pPr lvl="1"/>
+            <a:r>
+              <a:rPr lang="en-US"/>
+              <a:t>Second level</a:t>
+            </a:r>
+          </a:p>
+          <a:p>
+            <a:pPr lvl="2"/>
+            <a:r>
+              <a:rPr lang="en-US"/>
+              <a:t>Third level</a:t>
+            </a:r>
+          </a:p>
+          <a:p>
+            <a:pPr lvl="3"/>
+            <a:r>
+              <a:rPr lang="en-US"/>
+              <a:t>Fourth level</a:t>
+            </a:r>
+          </a:p>
+          <a:p>
+            <a:pPr lvl="4"/>
+            <a:r>
+              <a:rPr lang="en-US"/>
+              <a:t>Fifth level</a:t>
+            </a:r>
+          </a:p>
+        </p:txBody>
+      </p:sp>
+      <p:sp>
+        <p:nvSpPr>
+          <p:cNvPr id="4" name="Content Placeholder 3">
+            <a:extLst>
+              <a:ext uri="{FF2B5EF4-FFF2-40B4-BE49-F238E27FC236}">
+                <a16:creationId xmlns:a16="http://schemas.microsoft.com/office/drawing/2014/main" id="{E77BB661-332B-7456-1C01-846D61BC9108}"/>
+              </a:ext>
+            </a:extLst>
+          </p:cNvPr>
+          <p:cNvSpPr>
+            <a:spLocks noGrp="1"/>
+          </p:cNvSpPr>
+          <p:nvPr>
+            <p:ph sz="half" idx="2"/>
+          </p:nvPr>
+        </p:nvSpPr>
+        <p:spPr>
+          <a:xfrm>
+            <a:off x="6172200" y="1825625"/>
+            <a:ext cx="5181600" cy="4351338"/>
+          </a:xfrm>
+        </p:spPr>
+        <p:txBody>
+          <a:bodyPr/>
+          <a:lstStyle/>
+          <a:p>
+            <a:pPr lvl="0"/>
+            <a:r>
+              <a:rPr lang="en-US"/>
+              <a:t>Click to edit Master text styles</a:t>
+            </a:r>
+          </a:p>
+          <a:p>
+            <a:pPr lvl="1"/>
+            <a:r>
+              <a:rPr lang="en-US"/>
+              <a:t>Second level</a:t>
+            </a:r>
+          </a:p>
+          <a:p>
+            <a:pPr lvl="2"/>
+            <a:r>
+              <a:rPr lang="en-US"/>
+              <a:t>Third level</a:t>
+            </a:r>
+          </a:p>
+          <a:p>
+            <a:pPr lvl="3"/>
+            <a:r>
+              <a:rPr lang="en-US"/>
+              <a:t>Fourth level</a:t>
+            </a:r>
+          </a:p>
+          <a:p>
+            <a:pPr lvl="4"/>
+            <a:r>
+              <a:rPr lang="en-US"/>
+              <a:t>Fifth level</a:t>
+            </a:r>
+          </a:p>
+        </p:txBody>
+      </p:sp>
+      <p:sp>
+        <p:nvSpPr>
+          <p:cNvPr id="5" name="Date Placeholder 4">
+            <a:extLst>
+              <a:ext uri="{FF2B5EF4-FFF2-40B4-BE49-F238E27FC236}">
+                <a16:creationId xmlns:a16="http://schemas.microsoft.com/office/drawing/2014/main" id="{FB90F60F-D606-2167-15A2-3AFD85763D86}"/>
+              </a:ext>
+            </a:extLst>
+          </p:cNvPr>
+          <p:cNvSpPr>
+            <a:spLocks noGrp="1"/>
+          </p:cNvSpPr>
+          <p:nvPr>
+            <p:ph type="dt" sz="half" idx="10"/>
+          </p:nvPr>
+        </p:nvSpPr>
+        <p:spPr/>
+        <p:txBody>
+          <a:bodyPr/>
+          <a:lstStyle/>
+          <a:p>
+            <a:fld id="{DB28C05C-8A5D-4902-A59B-494921F3C1DF}" type="datetimeFigureOut">
+              <a:rPr lang="en-US" smtClean="0"/>
+              <a:t>7/24/2026</a:t>
+            </a:fld>
+            <a:endParaRPr lang="en-US"/>
+          </a:p>
+        </p:txBody>
+      </p:sp>
+      <p:sp>
+        <p:nvSpPr>
+          <p:cNvPr id="6" name="Footer Placeholder 5">
+            <a:extLst>
+              <a:ext uri="{FF2B5EF4-FFF2-40B4-BE49-F238E27FC236}">
+                <a16:creationId xmlns:a16="http://schemas.microsoft.com/office/drawing/2014/main" id="{DA3F78B9-8F91-7F52-5DC4-2C89E086DB06}"/>
+              </a:ext>
+            </a:extLst>
+          </p:cNvPr>
+          <p:cNvSpPr>
+            <a:spLocks noGrp="1"/>
+          </p:cNvSpPr>
+          <p:nvPr>
+            <p:ph type="ftr" sz="quarter" idx="11"/>
+          </p:nvPr>
+        </p:nvSpPr>
+        <p:spPr/>
+        <p:txBody>
+          <a:bodyPr/>
+          <a:lstStyle/>
+          <a:p>
+            <a:endParaRPr lang="en-US"/>
+          </a:p>
+        </p:txBody>
+      </p:sp>
+      <p:sp>
+        <p:nvSpPr>
+          <p:cNvPr id="7" name="Slide Number Placeholder 6">
+            <a:extLst>
+              <a:ext uri="{FF2B5EF4-FFF2-40B4-BE49-F238E27FC236}">
+                <a16:creationId xmlns:a16="http://schemas.microsoft.com/office/drawing/2014/main" id="{790806B3-5767-1B90-9D8F-8A28314D44F6}"/>
+              </a:ext>
+            </a:extLst>
+          </p:cNvPr>
+          <p:cNvSpPr>
+            <a:spLocks noGrp="1"/>
+          </p:cNvSpPr>
+          <p:nvPr>
+            <p:ph type="sldNum" sz="quarter" idx="12"/>
+          </p:nvPr>
+        </p:nvSpPr>
+        <p:spPr/>
+        <p:txBody>
+          <a:bodyPr/>
+          <a:lstStyle/>
+          <a:p>
+            <a:fld id="{BFA846FA-1D06-4D07-A363-F2A8ECB2D61A}" type="slidenum">
+              <a:rPr lang="en-US" smtClean="0"/>
+              <a:t>‹#›</a:t>
+            </a:fld>
+            <a:endParaRPr lang="en-US"/>
+          </a:p>
+        </p:txBody>
+      </p:sp>
+    </p:spTree>
+    <p:extLst>
+      <p:ext uri="{BB962C8B-B14F-4D97-AF65-F5344CB8AC3E}">
+        <p14:creationId xmlns:p14="http://schemas.microsoft.com/office/powerpoint/2010/main" val="1611878308"/>
+      </p:ext>
+    </p:extLst>
+  </p:cSld>
+  <p:clrMapOvr>
+    <a:masterClrMapping/>
+  </p:clrMapOvr>
+</p:sldLayout>
+</file>
+
+<file path=ppt/slideLayouts/slideLayout16.xml><?xml version="1.0" encoding="utf-8"?>
+<p:sldLayout xmlns:a="http://schemas.openxmlformats.org/drawingml/2006/main" xmlns:r="http://schemas.openxmlformats.org/officeDocument/2006/relationships" xmlns:p="http://schemas.openxmlformats.org/presentationml/2006/main" type="twoTxTwoObj" preserve="1">
+  <p:cSld name="Comparison">
+    <p:spTree>
+      <p:nvGrpSpPr>
+        <p:cNvPr id="1" name=""/>
+        <p:cNvGrpSpPr/>
+        <p:nvPr/>
+      </p:nvGrpSpPr>
+      <p:grpSpPr>
+        <a:xfrm>
+          <a:off x="0" y="0"/>
+          <a:ext cx="0" cy="0"/>
+          <a:chOff x="0" y="0"/>
+          <a:chExt cx="0" cy="0"/>
+        </a:xfrm>
+      </p:grpSpPr>
+      <p:sp>
+        <p:nvSpPr>
+          <p:cNvPr id="2" name="Title 1">
+            <a:extLst>
+              <a:ext uri="{FF2B5EF4-FFF2-40B4-BE49-F238E27FC236}">
+                <a16:creationId xmlns:a16="http://schemas.microsoft.com/office/drawing/2014/main" id="{2A1FD761-29B0-5374-C31A-4E100AFA9885}"/>
+              </a:ext>
+            </a:extLst>
+          </p:cNvPr>
+          <p:cNvSpPr>
+            <a:spLocks noGrp="1"/>
+          </p:cNvSpPr>
+          <p:nvPr>
+            <p:ph type="title"/>
+          </p:nvPr>
+        </p:nvSpPr>
+        <p:spPr>
+          <a:xfrm>
+            <a:off x="839788" y="365125"/>
+            <a:ext cx="10515600" cy="1325563"/>
+          </a:xfrm>
+        </p:spPr>
+        <p:txBody>
+          <a:bodyPr/>
+          <a:lstStyle/>
+          <a:p>
+            <a:r>
+              <a:rPr lang="en-US"/>
+              <a:t>Click to edit Master title style</a:t>
+            </a:r>
+          </a:p>
+        </p:txBody>
+      </p:sp>
+      <p:sp>
+        <p:nvSpPr>
+          <p:cNvPr id="3" name="Text Placeholder 2">
+            <a:extLst>
+              <a:ext uri="{FF2B5EF4-FFF2-40B4-BE49-F238E27FC236}">
+                <a16:creationId xmlns:a16="http://schemas.microsoft.com/office/drawing/2014/main" id="{754EAD73-A97D-25EE-3D35-D1A56FADBCAE}"/>
+              </a:ext>
+            </a:extLst>
+          </p:cNvPr>
+          <p:cNvSpPr>
+            <a:spLocks noGrp="1"/>
+          </p:cNvSpPr>
+          <p:nvPr>
+            <p:ph type="body" idx="1"/>
+          </p:nvPr>
+        </p:nvSpPr>
+        <p:spPr>
+          <a:xfrm>
+            <a:off x="839788" y="1681163"/>
+            <a:ext cx="5157787" cy="823912"/>
+          </a:xfrm>
+        </p:spPr>
+        <p:txBody>
+          <a:bodyPr anchor="b"/>
+          <a:lstStyle>
+            <a:lvl1pPr marL="0" indent="0">
+              <a:buNone/>
+              <a:defRPr sz="2400" b="1"/>
+            </a:lvl1pPr>
+            <a:lvl2pPr marL="457200" indent="0">
+              <a:buNone/>
+              <a:defRPr sz="2000" b="1"/>
+            </a:lvl2pPr>
+            <a:lvl3pPr marL="914400" indent="0">
+              <a:buNone/>
+              <a:defRPr sz="1800" b="1"/>
+            </a:lvl3pPr>
+            <a:lvl4pPr marL="1371600" indent="0">
+              <a:buNone/>
+              <a:defRPr sz="1600" b="1"/>
+            </a:lvl4pPr>
+            <a:lvl5pPr marL="1828800" indent="0">
+              <a:buNone/>
+              <a:defRPr sz="1600" b="1"/>
+            </a:lvl5pPr>
+            <a:lvl6pPr marL="2286000" indent="0">
+              <a:buNone/>
+              <a:defRPr sz="1600" b="1"/>
+            </a:lvl6pPr>
+            <a:lvl7pPr marL="2743200" indent="0">
+              <a:buNone/>
+              <a:defRPr sz="1600" b="1"/>
+            </a:lvl7pPr>
+            <a:lvl8pPr marL="3200400" indent="0">
+              <a:buNone/>
+              <a:defRPr sz="1600" b="1"/>
+            </a:lvl8pPr>
+            <a:lvl9pPr marL="3657600" indent="0">
+              <a:buNone/>
+              <a:defRPr sz="1600" b="1"/>
+            </a:lvl9pPr>
+          </a:lstStyle>
+          <a:p>
+            <a:pPr lvl="0"/>
+            <a:r>
+              <a:rPr lang="en-US"/>
+              <a:t>Click to edit Master text styles</a:t>
+            </a:r>
+          </a:p>
+        </p:txBody>
+      </p:sp>
+      <p:sp>
+        <p:nvSpPr>
+          <p:cNvPr id="4" name="Content Placeholder 3">
+            <a:extLst>
+              <a:ext uri="{FF2B5EF4-FFF2-40B4-BE49-F238E27FC236}">
+                <a16:creationId xmlns:a16="http://schemas.microsoft.com/office/drawing/2014/main" id="{EF1D590F-FA3A-0F42-DC6F-B2A845069719}"/>
+              </a:ext>
+            </a:extLst>
+          </p:cNvPr>
+          <p:cNvSpPr>
+            <a:spLocks noGrp="1"/>
+          </p:cNvSpPr>
+          <p:nvPr>
+            <p:ph sz="half" idx="2"/>
+          </p:nvPr>
+        </p:nvSpPr>
+        <p:spPr>
+          <a:xfrm>
+            <a:off x="839788" y="2505075"/>
+            <a:ext cx="5157787" cy="3684588"/>
+          </a:xfrm>
+        </p:spPr>
+        <p:txBody>
+          <a:bodyPr/>
+          <a:lstStyle/>
+          <a:p>
+            <a:pPr lvl="0"/>
+            <a:r>
+              <a:rPr lang="en-US"/>
+              <a:t>Click to edit Master text styles</a:t>
+            </a:r>
+          </a:p>
+          <a:p>
+            <a:pPr lvl="1"/>
+            <a:r>
+              <a:rPr lang="en-US"/>
+              <a:t>Second level</a:t>
+            </a:r>
+          </a:p>
+          <a:p>
+            <a:pPr lvl="2"/>
+            <a:r>
+              <a:rPr lang="en-US"/>
+              <a:t>Third level</a:t>
+            </a:r>
+          </a:p>
+          <a:p>
+            <a:pPr lvl="3"/>
+            <a:r>
+              <a:rPr lang="en-US"/>
+              <a:t>Fourth level</a:t>
+            </a:r>
+          </a:p>
+          <a:p>
+            <a:pPr lvl="4"/>
+            <a:r>
+              <a:rPr lang="en-US"/>
+              <a:t>Fifth level</a:t>
+            </a:r>
+          </a:p>
+        </p:txBody>
+      </p:sp>
+      <p:sp>
+        <p:nvSpPr>
+          <p:cNvPr id="5" name="Text Placeholder 4">
+            <a:extLst>
+              <a:ext uri="{FF2B5EF4-FFF2-40B4-BE49-F238E27FC236}">
+                <a16:creationId xmlns:a16="http://schemas.microsoft.com/office/drawing/2014/main" id="{50895916-6670-229E-E29C-CDA08A166127}"/>
+              </a:ext>
+            </a:extLst>
+          </p:cNvPr>
+          <p:cNvSpPr>
+            <a:spLocks noGrp="1"/>
+          </p:cNvSpPr>
+          <p:nvPr>
+            <p:ph type="body" sz="quarter" idx="3"/>
+          </p:nvPr>
+        </p:nvSpPr>
+        <p:spPr>
+          <a:xfrm>
+            <a:off x="6172200" y="1681163"/>
+            <a:ext cx="5183188" cy="823912"/>
+          </a:xfrm>
+        </p:spPr>
+        <p:txBody>
+          <a:bodyPr anchor="b"/>
+          <a:lstStyle>
+            <a:lvl1pPr marL="0" indent="0">
+              <a:buNone/>
+              <a:defRPr sz="2400" b="1"/>
+            </a:lvl1pPr>
+            <a:lvl2pPr marL="457200" indent="0">
+              <a:buNone/>
+              <a:defRPr sz="2000" b="1"/>
+            </a:lvl2pPr>
+            <a:lvl3pPr marL="914400" indent="0">
+              <a:buNone/>
+              <a:defRPr sz="1800" b="1"/>
+            </a:lvl3pPr>
+            <a:lvl4pPr marL="1371600" indent="0">
+              <a:buNone/>
+              <a:defRPr sz="1600" b="1"/>
+            </a:lvl4pPr>
+            <a:lvl5pPr marL="1828800" indent="0">
+              <a:buNone/>
+              <a:defRPr sz="1600" b="1"/>
+            </a:lvl5pPr>
+            <a:lvl6pPr marL="2286000" indent="0">
+              <a:buNone/>
+              <a:defRPr sz="1600" b="1"/>
+            </a:lvl6pPr>
+            <a:lvl7pPr marL="2743200" indent="0">
+              <a:buNone/>
+              <a:defRPr sz="1600" b="1"/>
+            </a:lvl7pPr>
+            <a:lvl8pPr marL="3200400" indent="0">
+              <a:buNone/>
+              <a:defRPr sz="1600" b="1"/>
+            </a:lvl8pPr>
+            <a:lvl9pPr marL="3657600" indent="0">
+              <a:buNone/>
+              <a:defRPr sz="1600" b="1"/>
+            </a:lvl9pPr>
+          </a:lstStyle>
+          <a:p>
+            <a:pPr lvl="0"/>
+            <a:r>
+              <a:rPr lang="en-US"/>
+              <a:t>Click to edit Master text styles</a:t>
+            </a:r>
+          </a:p>
+        </p:txBody>
+      </p:sp>
+      <p:sp>
+        <p:nvSpPr>
+          <p:cNvPr id="6" name="Content Placeholder 5">
+            <a:extLst>
+              <a:ext uri="{FF2B5EF4-FFF2-40B4-BE49-F238E27FC236}">
+                <a16:creationId xmlns:a16="http://schemas.microsoft.com/office/drawing/2014/main" id="{2D548E18-2C06-165A-E10B-5BD4B6A18E45}"/>
+              </a:ext>
+            </a:extLst>
+          </p:cNvPr>
+          <p:cNvSpPr>
+            <a:spLocks noGrp="1"/>
+          </p:cNvSpPr>
+          <p:nvPr>
+            <p:ph sz="quarter" idx="4"/>
+          </p:nvPr>
+        </p:nvSpPr>
+        <p:spPr>
+          <a:xfrm>
+            <a:off x="6172200" y="2505075"/>
+            <a:ext cx="5183188" cy="3684588"/>
+          </a:xfrm>
+        </p:spPr>
+        <p:txBody>
+          <a:bodyPr/>
+          <a:lstStyle/>
+          <a:p>
+            <a:pPr lvl="0"/>
+            <a:r>
+              <a:rPr lang="en-US"/>
+              <a:t>Click to edit Master text styles</a:t>
+            </a:r>
+          </a:p>
+          <a:p>
+            <a:pPr lvl="1"/>
+            <a:r>
+              <a:rPr lang="en-US"/>
+              <a:t>Second level</a:t>
+            </a:r>
+          </a:p>
+          <a:p>
+            <a:pPr lvl="2"/>
+            <a:r>
+              <a:rPr lang="en-US"/>
+              <a:t>Third level</a:t>
+            </a:r>
+          </a:p>
+          <a:p>
+            <a:pPr lvl="3"/>
+            <a:r>
+              <a:rPr lang="en-US"/>
+              <a:t>Fourth level</a:t>
+            </a:r>
+          </a:p>
+          <a:p>
+            <a:pPr lvl="4"/>
+            <a:r>
+              <a:rPr lang="en-US"/>
+              <a:t>Fifth level</a:t>
+            </a:r>
+          </a:p>
+        </p:txBody>
+      </p:sp>
+      <p:sp>
+        <p:nvSpPr>
+          <p:cNvPr id="7" name="Date Placeholder 6">
+            <a:extLst>
+              <a:ext uri="{FF2B5EF4-FFF2-40B4-BE49-F238E27FC236}">
+                <a16:creationId xmlns:a16="http://schemas.microsoft.com/office/drawing/2014/main" id="{171F7482-E6B9-274A-5D30-AF13ED3D0047}"/>
+              </a:ext>
+            </a:extLst>
+          </p:cNvPr>
+          <p:cNvSpPr>
+            <a:spLocks noGrp="1"/>
+          </p:cNvSpPr>
+          <p:nvPr>
+            <p:ph type="dt" sz="half" idx="10"/>
+          </p:nvPr>
+        </p:nvSpPr>
+        <p:spPr/>
+        <p:txBody>
+          <a:bodyPr/>
+          <a:lstStyle/>
+          <a:p>
+            <a:fld id="{DB28C05C-8A5D-4902-A59B-494921F3C1DF}" type="datetimeFigureOut">
+              <a:rPr lang="en-US" smtClean="0"/>
+              <a:t>7/24/2026</a:t>
+            </a:fld>
+            <a:endParaRPr lang="en-US"/>
+          </a:p>
+        </p:txBody>
+      </p:sp>
+      <p:sp>
+        <p:nvSpPr>
+          <p:cNvPr id="8" name="Footer Placeholder 7">
+            <a:extLst>
+              <a:ext uri="{FF2B5EF4-FFF2-40B4-BE49-F238E27FC236}">
+                <a16:creationId xmlns:a16="http://schemas.microsoft.com/office/drawing/2014/main" id="{480E699F-0609-7826-73A9-50218A19143E}"/>
+              </a:ext>
+            </a:extLst>
+          </p:cNvPr>
+          <p:cNvSpPr>
+            <a:spLocks noGrp="1"/>
+          </p:cNvSpPr>
+          <p:nvPr>
+            <p:ph type="ftr" sz="quarter" idx="11"/>
+          </p:nvPr>
+        </p:nvSpPr>
+        <p:spPr/>
+        <p:txBody>
+          <a:bodyPr/>
+          <a:lstStyle/>
+          <a:p>
+            <a:endParaRPr lang="en-US"/>
+          </a:p>
+        </p:txBody>
+      </p:sp>
+      <p:sp>
+        <p:nvSpPr>
+          <p:cNvPr id="9" name="Slide Number Placeholder 8">
+            <a:extLst>
+              <a:ext uri="{FF2B5EF4-FFF2-40B4-BE49-F238E27FC236}">
+                <a16:creationId xmlns:a16="http://schemas.microsoft.com/office/drawing/2014/main" id="{6836EE01-D55F-9EED-F569-E1F1ECD4DD39}"/>
+              </a:ext>
+            </a:extLst>
+          </p:cNvPr>
+          <p:cNvSpPr>
+            <a:spLocks noGrp="1"/>
+          </p:cNvSpPr>
+          <p:nvPr>
+            <p:ph type="sldNum" sz="quarter" idx="12"/>
+          </p:nvPr>
+        </p:nvSpPr>
+        <p:spPr/>
+        <p:txBody>
+          <a:bodyPr/>
+          <a:lstStyle/>
+          <a:p>
+            <a:fld id="{BFA846FA-1D06-4D07-A363-F2A8ECB2D61A}" type="slidenum">
+              <a:rPr lang="en-US" smtClean="0"/>
+              <a:t>‹#›</a:t>
+            </a:fld>
+            <a:endParaRPr lang="en-US"/>
+          </a:p>
+        </p:txBody>
+      </p:sp>
+    </p:spTree>
+    <p:extLst>
+      <p:ext uri="{BB962C8B-B14F-4D97-AF65-F5344CB8AC3E}">
+        <p14:creationId xmlns:p14="http://schemas.microsoft.com/office/powerpoint/2010/main" val="811195308"/>
+      </p:ext>
+    </p:extLst>
+  </p:cSld>
+  <p:clrMapOvr>
+    <a:masterClrMapping/>
+  </p:clrMapOvr>
+</p:sldLayout>
+</file>
+
+<file path=ppt/slideLayouts/slideLayout17.xml><?xml version="1.0" encoding="utf-8"?>
+<p:sldLayout xmlns:a="http://schemas.openxmlformats.org/drawingml/2006/main" xmlns:r="http://schemas.openxmlformats.org/officeDocument/2006/relationships" xmlns:p="http://schemas.openxmlformats.org/presentationml/2006/main" type="titleOnly" preserve="1">
+  <p:cSld name="Title Only">
+    <p:spTree>
+      <p:nvGrpSpPr>
+        <p:cNvPr id="1" name=""/>
+        <p:cNvGrpSpPr/>
+        <p:nvPr/>
+      </p:nvGrpSpPr>
+      <p:grpSpPr>
+        <a:xfrm>
+          <a:off x="0" y="0"/>
+          <a:ext cx="0" cy="0"/>
+          <a:chOff x="0" y="0"/>
+          <a:chExt cx="0" cy="0"/>
+        </a:xfrm>
+      </p:grpSpPr>
+      <p:sp>
+        <p:nvSpPr>
+          <p:cNvPr id="2" name="Title 1">
+            <a:extLst>
+              <a:ext uri="{FF2B5EF4-FFF2-40B4-BE49-F238E27FC236}">
+                <a16:creationId xmlns:a16="http://schemas.microsoft.com/office/drawing/2014/main" id="{9852ACD1-904F-25BC-C5DA-63A896045289}"/>
+              </a:ext>
+            </a:extLst>
+          </p:cNvPr>
+          <p:cNvSpPr>
+            <a:spLocks noGrp="1"/>
+          </p:cNvSpPr>
+          <p:nvPr>
+            <p:ph type="title"/>
+          </p:nvPr>
+        </p:nvSpPr>
+        <p:spPr/>
+        <p:txBody>
+          <a:bodyPr/>
+          <a:lstStyle/>
+          <a:p>
+            <a:r>
+              <a:rPr lang="en-US"/>
+              <a:t>Click to edit Master title style</a:t>
+            </a:r>
+          </a:p>
+        </p:txBody>
+      </p:sp>
+      <p:sp>
+        <p:nvSpPr>
+          <p:cNvPr id="3" name="Date Placeholder 2">
+            <a:extLst>
+              <a:ext uri="{FF2B5EF4-FFF2-40B4-BE49-F238E27FC236}">
+                <a16:creationId xmlns:a16="http://schemas.microsoft.com/office/drawing/2014/main" id="{D395BA9B-9891-182D-E72A-52C41F4C4200}"/>
+              </a:ext>
+            </a:extLst>
+          </p:cNvPr>
+          <p:cNvSpPr>
+            <a:spLocks noGrp="1"/>
+          </p:cNvSpPr>
+          <p:nvPr>
+            <p:ph type="dt" sz="half" idx="10"/>
+          </p:nvPr>
+        </p:nvSpPr>
+        <p:spPr/>
+        <p:txBody>
+          <a:bodyPr/>
+          <a:lstStyle/>
+          <a:p>
+            <a:fld id="{DB28C05C-8A5D-4902-A59B-494921F3C1DF}" type="datetimeFigureOut">
+              <a:rPr lang="en-US" smtClean="0"/>
+              <a:t>7/24/2026</a:t>
+            </a:fld>
+            <a:endParaRPr lang="en-US"/>
+          </a:p>
+        </p:txBody>
+      </p:sp>
+      <p:sp>
+        <p:nvSpPr>
+          <p:cNvPr id="4" name="Footer Placeholder 3">
+            <a:extLst>
+              <a:ext uri="{FF2B5EF4-FFF2-40B4-BE49-F238E27FC236}">
+                <a16:creationId xmlns:a16="http://schemas.microsoft.com/office/drawing/2014/main" id="{CFA931A7-183B-C9D1-5EBA-EB742082C83D}"/>
+              </a:ext>
+            </a:extLst>
+          </p:cNvPr>
+          <p:cNvSpPr>
+            <a:spLocks noGrp="1"/>
+          </p:cNvSpPr>
+          <p:nvPr>
+            <p:ph type="ftr" sz="quarter" idx="11"/>
+          </p:nvPr>
+        </p:nvSpPr>
+        <p:spPr/>
+        <p:txBody>
+          <a:bodyPr/>
+          <a:lstStyle/>
+          <a:p>
+            <a:endParaRPr lang="en-US"/>
+          </a:p>
+        </p:txBody>
+      </p:sp>
+      <p:sp>
+        <p:nvSpPr>
+          <p:cNvPr id="5" name="Slide Number Placeholder 4">
+            <a:extLst>
+              <a:ext uri="{FF2B5EF4-FFF2-40B4-BE49-F238E27FC236}">
+                <a16:creationId xmlns:a16="http://schemas.microsoft.com/office/drawing/2014/main" id="{E9EA81B9-0726-8EDA-0F5B-49D53072732C}"/>
+              </a:ext>
+            </a:extLst>
+          </p:cNvPr>
+          <p:cNvSpPr>
+            <a:spLocks noGrp="1"/>
+          </p:cNvSpPr>
+          <p:nvPr>
+            <p:ph type="sldNum" sz="quarter" idx="12"/>
+          </p:nvPr>
+        </p:nvSpPr>
+        <p:spPr/>
+        <p:txBody>
+          <a:bodyPr/>
+          <a:lstStyle/>
+          <a:p>
+            <a:fld id="{BFA846FA-1D06-4D07-A363-F2A8ECB2D61A}" type="slidenum">
+              <a:rPr lang="en-US" smtClean="0"/>
+              <a:t>‹#›</a:t>
+            </a:fld>
+            <a:endParaRPr lang="en-US"/>
+          </a:p>
+        </p:txBody>
+      </p:sp>
+    </p:spTree>
+    <p:extLst>
+      <p:ext uri="{BB962C8B-B14F-4D97-AF65-F5344CB8AC3E}">
+        <p14:creationId xmlns:p14="http://schemas.microsoft.com/office/powerpoint/2010/main" val="3745659799"/>
+      </p:ext>
+    </p:extLst>
+  </p:cSld>
+  <p:clrMapOvr>
+    <a:masterClrMapping/>
+  </p:clrMapOvr>
+</p:sldLayout>
+</file>
+
+<file path=ppt/slideLayouts/slideLayout18.xml><?xml version="1.0" encoding="utf-8"?>
+<p:sldLayout xmlns:a="http://schemas.openxmlformats.org/drawingml/2006/main" xmlns:r="http://schemas.openxmlformats.org/officeDocument/2006/relationships" xmlns:p="http://schemas.openxmlformats.org/presentationml/2006/main" type="blank" preserve="1">
+  <p:cSld name="Blank">
+    <p:spTree>
+      <p:nvGrpSpPr>
+        <p:cNvPr id="1" name=""/>
+        <p:cNvGrpSpPr/>
+        <p:nvPr/>
+      </p:nvGrpSpPr>
+      <p:grpSpPr>
+        <a:xfrm>
+          <a:off x="0" y="0"/>
+          <a:ext cx="0" cy="0"/>
+          <a:chOff x="0" y="0"/>
+          <a:chExt cx="0" cy="0"/>
+        </a:xfrm>
+      </p:grpSpPr>
+      <p:sp>
+        <p:nvSpPr>
+          <p:cNvPr id="2" name="Date Placeholder 1">
+            <a:extLst>
+              <a:ext uri="{FF2B5EF4-FFF2-40B4-BE49-F238E27FC236}">
+                <a16:creationId xmlns:a16="http://schemas.microsoft.com/office/drawing/2014/main" id="{0F9FEB4B-E1A4-4EDF-23D2-48492786215A}"/>
+              </a:ext>
+            </a:extLst>
+          </p:cNvPr>
+          <p:cNvSpPr>
+            <a:spLocks noGrp="1"/>
+          </p:cNvSpPr>
+          <p:nvPr>
+            <p:ph type="dt" sz="half" idx="10"/>
+          </p:nvPr>
+        </p:nvSpPr>
+        <p:spPr/>
+        <p:txBody>
+          <a:bodyPr/>
+          <a:lstStyle/>
+          <a:p>
+            <a:fld id="{DB28C05C-8A5D-4902-A59B-494921F3C1DF}" type="datetimeFigureOut">
+              <a:rPr lang="en-US" smtClean="0"/>
+              <a:t>7/24/2026</a:t>
+            </a:fld>
+            <a:endParaRPr lang="en-US"/>
+          </a:p>
+        </p:txBody>
+      </p:sp>
+      <p:sp>
+        <p:nvSpPr>
+          <p:cNvPr id="3" name="Footer Placeholder 2">
+            <a:extLst>
+              <a:ext uri="{FF2B5EF4-FFF2-40B4-BE49-F238E27FC236}">
+                <a16:creationId xmlns:a16="http://schemas.microsoft.com/office/drawing/2014/main" id="{3E87003A-7D64-37B4-978D-82FB6D4828C5}"/>
+              </a:ext>
+            </a:extLst>
+          </p:cNvPr>
+          <p:cNvSpPr>
+            <a:spLocks noGrp="1"/>
+          </p:cNvSpPr>
+          <p:nvPr>
+            <p:ph type="ftr" sz="quarter" idx="11"/>
+          </p:nvPr>
+        </p:nvSpPr>
+        <p:spPr/>
+        <p:txBody>
+          <a:bodyPr/>
+          <a:lstStyle/>
+          <a:p>
+            <a:endParaRPr lang="en-US"/>
+          </a:p>
+        </p:txBody>
+      </p:sp>
+      <p:sp>
+        <p:nvSpPr>
+          <p:cNvPr id="4" name="Slide Number Placeholder 3">
+            <a:extLst>
+              <a:ext uri="{FF2B5EF4-FFF2-40B4-BE49-F238E27FC236}">
+                <a16:creationId xmlns:a16="http://schemas.microsoft.com/office/drawing/2014/main" id="{B09FB897-9103-C8BC-C6E2-D79CE1F5E10F}"/>
+              </a:ext>
+            </a:extLst>
+          </p:cNvPr>
+          <p:cNvSpPr>
+            <a:spLocks noGrp="1"/>
+          </p:cNvSpPr>
+          <p:nvPr>
+            <p:ph type="sldNum" sz="quarter" idx="12"/>
+          </p:nvPr>
+        </p:nvSpPr>
+        <p:spPr/>
+        <p:txBody>
+          <a:bodyPr/>
+          <a:lstStyle/>
+          <a:p>
+            <a:fld id="{BFA846FA-1D06-4D07-A363-F2A8ECB2D61A}" type="slidenum">
+              <a:rPr lang="en-US" smtClean="0"/>
+              <a:t>‹#›</a:t>
+            </a:fld>
+            <a:endParaRPr lang="en-US"/>
+          </a:p>
+        </p:txBody>
+      </p:sp>
+    </p:spTree>
+    <p:extLst>
+      <p:ext uri="{BB962C8B-B14F-4D97-AF65-F5344CB8AC3E}">
+        <p14:creationId xmlns:p14="http://schemas.microsoft.com/office/powerpoint/2010/main" val="2841985190"/>
+      </p:ext>
+    </p:extLst>
+  </p:cSld>
+  <p:clrMapOvr>
+    <a:masterClrMapping/>
+  </p:clrMapOvr>
+</p:sldLayout>
+</file>
+
+<file path=ppt/slideLayouts/slideLayout19.xml><?xml version="1.0" encoding="utf-8"?>
+<p:sldLayout xmlns:a="http://schemas.openxmlformats.org/drawingml/2006/main" xmlns:r="http://schemas.openxmlformats.org/officeDocument/2006/relationships" xmlns:p="http://schemas.openxmlformats.org/presentationml/2006/main" type="objTx" preserve="1">
+  <p:cSld name="Content with Caption">
+    <p:spTree>
+      <p:nvGrpSpPr>
+        <p:cNvPr id="1" name=""/>
+        <p:cNvGrpSpPr/>
+        <p:nvPr/>
+      </p:nvGrpSpPr>
+      <p:grpSpPr>
+        <a:xfrm>
+          <a:off x="0" y="0"/>
+          <a:ext cx="0" cy="0"/>
+          <a:chOff x="0" y="0"/>
+          <a:chExt cx="0" cy="0"/>
+        </a:xfrm>
+      </p:grpSpPr>
+      <p:sp>
+        <p:nvSpPr>
+          <p:cNvPr id="2" name="Title 1">
+            <a:extLst>
+              <a:ext uri="{FF2B5EF4-FFF2-40B4-BE49-F238E27FC236}">
+                <a16:creationId xmlns:a16="http://schemas.microsoft.com/office/drawing/2014/main" id="{E3A1E92C-34BA-0EF9-33AA-E9EB478DEFF3}"/>
+              </a:ext>
+            </a:extLst>
+          </p:cNvPr>
+          <p:cNvSpPr>
+            <a:spLocks noGrp="1"/>
+          </p:cNvSpPr>
+          <p:nvPr>
+            <p:ph type="title"/>
+          </p:nvPr>
+        </p:nvSpPr>
+        <p:spPr>
+          <a:xfrm>
+            <a:off x="839788" y="457200"/>
+            <a:ext cx="3932237" cy="1600200"/>
+          </a:xfrm>
+        </p:spPr>
+        <p:txBody>
+          <a:bodyPr anchor="b"/>
+          <a:lstStyle>
+            <a:lvl1pPr>
+              <a:defRPr sz="3200"/>
+            </a:lvl1pPr>
+          </a:lstStyle>
+          <a:p>
+            <a:r>
+              <a:rPr lang="en-US"/>
+              <a:t>Click to edit Master title style</a:t>
+            </a:r>
+          </a:p>
+        </p:txBody>
+      </p:sp>
+      <p:sp>
+        <p:nvSpPr>
+          <p:cNvPr id="3" name="Content Placeholder 2">
+            <a:extLst>
+              <a:ext uri="{FF2B5EF4-FFF2-40B4-BE49-F238E27FC236}">
+                <a16:creationId xmlns:a16="http://schemas.microsoft.com/office/drawing/2014/main" id="{F2CB8963-5BEF-FAA5-8D56-AACD694E1073}"/>
+              </a:ext>
+            </a:extLst>
+          </p:cNvPr>
+          <p:cNvSpPr>
+            <a:spLocks noGrp="1"/>
+          </p:cNvSpPr>
+          <p:nvPr>
+            <p:ph idx="1"/>
+          </p:nvPr>
+        </p:nvSpPr>
+        <p:spPr>
+          <a:xfrm>
+            <a:off x="5183188" y="987425"/>
+            <a:ext cx="6172200" cy="4873625"/>
+          </a:xfrm>
+        </p:spPr>
+        <p:txBody>
+          <a:bodyPr/>
+          <a:lstStyle>
+            <a:lvl1pPr>
+              <a:defRPr sz="3200"/>
+            </a:lvl1pPr>
+            <a:lvl2pPr>
+              <a:defRPr sz="2800"/>
+            </a:lvl2pPr>
+            <a:lvl3pPr>
+              <a:defRPr sz="2400"/>
+            </a:lvl3pPr>
+            <a:lvl4pPr>
+              <a:defRPr sz="2000"/>
+            </a:lvl4pPr>
+            <a:lvl5pPr>
+              <a:defRPr sz="2000"/>
+            </a:lvl5pPr>
+            <a:lvl6pPr>
+              <a:defRPr sz="2000"/>
+            </a:lvl6pPr>
+            <a:lvl7pPr>
+              <a:defRPr sz="2000"/>
+            </a:lvl7pPr>
+            <a:lvl8pPr>
+              <a:defRPr sz="2000"/>
+            </a:lvl8pPr>
+            <a:lvl9pPr>
+              <a:defRPr sz="2000"/>
+            </a:lvl9pPr>
+          </a:lstStyle>
+          <a:p>
+            <a:pPr lvl="0"/>
+            <a:r>
+              <a:rPr lang="en-US"/>
+              <a:t>Click to edit Master text styles</a:t>
+            </a:r>
+          </a:p>
+          <a:p>
+            <a:pPr lvl="1"/>
+            <a:r>
+              <a:rPr lang="en-US"/>
+              <a:t>Second level</a:t>
+            </a:r>
+          </a:p>
+          <a:p>
+            <a:pPr lvl="2"/>
+            <a:r>
+              <a:rPr lang="en-US"/>
+              <a:t>Third level</a:t>
+            </a:r>
+          </a:p>
+          <a:p>
+            <a:pPr lvl="3"/>
+            <a:r>
+              <a:rPr lang="en-US"/>
+              <a:t>Fourth level</a:t>
+            </a:r>
+          </a:p>
+          <a:p>
+            <a:pPr lvl="4"/>
+            <a:r>
+              <a:rPr lang="en-US"/>
+              <a:t>Fifth level</a:t>
+            </a:r>
+          </a:p>
+        </p:txBody>
+      </p:sp>
+      <p:sp>
+        <p:nvSpPr>
+          <p:cNvPr id="4" name="Text Placeholder 3">
+            <a:extLst>
+              <a:ext uri="{FF2B5EF4-FFF2-40B4-BE49-F238E27FC236}">
+                <a16:creationId xmlns:a16="http://schemas.microsoft.com/office/drawing/2014/main" id="{450D1C7E-8141-6EAC-6B06-AD47FE3BAC41}"/>
+              </a:ext>
+            </a:extLst>
+          </p:cNvPr>
+          <p:cNvSpPr>
+            <a:spLocks noGrp="1"/>
+          </p:cNvSpPr>
+          <p:nvPr>
+            <p:ph type="body" sz="half" idx="2"/>
+          </p:nvPr>
+        </p:nvSpPr>
+        <p:spPr>
+          <a:xfrm>
+            <a:off x="839788" y="2057400"/>
+            <a:ext cx="3932237" cy="3811588"/>
+          </a:xfrm>
+        </p:spPr>
+        <p:txBody>
+          <a:bodyPr/>
+          <a:lstStyle>
+            <a:lvl1pPr marL="0" indent="0">
+              <a:buNone/>
+              <a:defRPr sz="1600"/>
+            </a:lvl1pPr>
+            <a:lvl2pPr marL="457200" indent="0">
+              <a:buNone/>
+              <a:defRPr sz="1400"/>
+            </a:lvl2pPr>
+            <a:lvl3pPr marL="914400" indent="0">
+              <a:buNone/>
+              <a:defRPr sz="1200"/>
+            </a:lvl3pPr>
+            <a:lvl4pPr marL="1371600" indent="0">
+              <a:buNone/>
+              <a:defRPr sz="1000"/>
+            </a:lvl4pPr>
+            <a:lvl5pPr marL="1828800" indent="0">
+              <a:buNone/>
+              <a:defRPr sz="1000"/>
+            </a:lvl5pPr>
+            <a:lvl6pPr marL="2286000" indent="0">
+              <a:buNone/>
+              <a:defRPr sz="1000"/>
+            </a:lvl6pPr>
+            <a:lvl7pPr marL="2743200" indent="0">
+              <a:buNone/>
+              <a:defRPr sz="1000"/>
+            </a:lvl7pPr>
+            <a:lvl8pPr marL="3200400" indent="0">
+              <a:buNone/>
+              <a:defRPr sz="1000"/>
+            </a:lvl8pPr>
+            <a:lvl9pPr marL="3657600" indent="0">
+              <a:buNone/>
+              <a:defRPr sz="1000"/>
+            </a:lvl9pPr>
+          </a:lstStyle>
+          <a:p>
+            <a:pPr lvl="0"/>
+            <a:r>
+              <a:rPr lang="en-US"/>
+              <a:t>Click to edit Master text styles</a:t>
+            </a:r>
+          </a:p>
+        </p:txBody>
+      </p:sp>
+      <p:sp>
+        <p:nvSpPr>
+          <p:cNvPr id="5" name="Date Placeholder 4">
+            <a:extLst>
+              <a:ext uri="{FF2B5EF4-FFF2-40B4-BE49-F238E27FC236}">
+                <a16:creationId xmlns:a16="http://schemas.microsoft.com/office/drawing/2014/main" id="{440AE6B6-83AF-3336-DEC1-F73A5FC756E8}"/>
+              </a:ext>
+            </a:extLst>
+          </p:cNvPr>
+          <p:cNvSpPr>
+            <a:spLocks noGrp="1"/>
+          </p:cNvSpPr>
+          <p:nvPr>
+            <p:ph type="dt" sz="half" idx="10"/>
+          </p:nvPr>
+        </p:nvSpPr>
+        <p:spPr/>
+        <p:txBody>
+          <a:bodyPr/>
+          <a:lstStyle/>
+          <a:p>
+            <a:fld id="{DB28C05C-8A5D-4902-A59B-494921F3C1DF}" type="datetimeFigureOut">
+              <a:rPr lang="en-US" smtClean="0"/>
+              <a:t>7/24/2026</a:t>
+            </a:fld>
+            <a:endParaRPr lang="en-US"/>
+          </a:p>
+        </p:txBody>
+      </p:sp>
+      <p:sp>
+        <p:nvSpPr>
+          <p:cNvPr id="6" name="Footer Placeholder 5">
+            <a:extLst>
+              <a:ext uri="{FF2B5EF4-FFF2-40B4-BE49-F238E27FC236}">
+                <a16:creationId xmlns:a16="http://schemas.microsoft.com/office/drawing/2014/main" id="{406C1504-4179-0C8D-4A72-4BF33E68AD06}"/>
+              </a:ext>
+            </a:extLst>
+          </p:cNvPr>
+          <p:cNvSpPr>
+            <a:spLocks noGrp="1"/>
+          </p:cNvSpPr>
+          <p:nvPr>
+            <p:ph type="ftr" sz="quarter" idx="11"/>
+          </p:nvPr>
+        </p:nvSpPr>
+        <p:spPr/>
+        <p:txBody>
+          <a:bodyPr/>
+          <a:lstStyle/>
+          <a:p>
+            <a:endParaRPr lang="en-US"/>
+          </a:p>
+        </p:txBody>
+      </p:sp>
+      <p:sp>
+        <p:nvSpPr>
+          <p:cNvPr id="7" name="Slide Number Placeholder 6">
+            <a:extLst>
+              <a:ext uri="{FF2B5EF4-FFF2-40B4-BE49-F238E27FC236}">
+                <a16:creationId xmlns:a16="http://schemas.microsoft.com/office/drawing/2014/main" id="{43795489-A958-5EC7-9FE5-CB5DFFF144C7}"/>
+              </a:ext>
+            </a:extLst>
+          </p:cNvPr>
+          <p:cNvSpPr>
+            <a:spLocks noGrp="1"/>
+          </p:cNvSpPr>
+          <p:nvPr>
+            <p:ph type="sldNum" sz="quarter" idx="12"/>
+          </p:nvPr>
+        </p:nvSpPr>
+        <p:spPr/>
+        <p:txBody>
+          <a:bodyPr/>
+          <a:lstStyle/>
+          <a:p>
+            <a:fld id="{BFA846FA-1D06-4D07-A363-F2A8ECB2D61A}" type="slidenum">
+              <a:rPr lang="en-US" smtClean="0"/>
+              <a:t>‹#›</a:t>
+            </a:fld>
+            <a:endParaRPr lang="en-US"/>
+          </a:p>
+        </p:txBody>
+      </p:sp>
+    </p:spTree>
+    <p:extLst>
+      <p:ext uri="{BB962C8B-B14F-4D97-AF65-F5344CB8AC3E}">
+        <p14:creationId xmlns:p14="http://schemas.microsoft.com/office/powerpoint/2010/main" val="1550880143"/>
       </p:ext>
     </p:extLst>
   </p:cSld>
@@ -4066,7 +6008,7 @@
           <a:p>
             <a:fld id="{8D19A3AA-5CC1-4409-A3F5-5174B3C1B3E1}" type="datetimeFigureOut">
               <a:rPr lang="en-CA" smtClean="0"/>
-              <a:t>2019-09-11</a:t>
+              <a:t>2026-07-24</a:t>
             </a:fld>
             <a:endParaRPr lang="en-CA"/>
           </a:p>
@@ -4130,6 +6072,700 @@
     <p:extLst>
       <p:ext uri="{BB962C8B-B14F-4D97-AF65-F5344CB8AC3E}">
         <p14:creationId xmlns:p14="http://schemas.microsoft.com/office/powerpoint/2010/main" val="417791828"/>
+      </p:ext>
+    </p:extLst>
+  </p:cSld>
+  <p:clrMapOvr>
+    <a:masterClrMapping/>
+  </p:clrMapOvr>
+</p:sldLayout>
+</file>
+
+<file path=ppt/slideLayouts/slideLayout20.xml><?xml version="1.0" encoding="utf-8"?>
+<p:sldLayout xmlns:a="http://schemas.openxmlformats.org/drawingml/2006/main" xmlns:r="http://schemas.openxmlformats.org/officeDocument/2006/relationships" xmlns:p="http://schemas.openxmlformats.org/presentationml/2006/main" type="picTx" preserve="1">
+  <p:cSld name="Picture with Caption">
+    <p:spTree>
+      <p:nvGrpSpPr>
+        <p:cNvPr id="1" name=""/>
+        <p:cNvGrpSpPr/>
+        <p:nvPr/>
+      </p:nvGrpSpPr>
+      <p:grpSpPr>
+        <a:xfrm>
+          <a:off x="0" y="0"/>
+          <a:ext cx="0" cy="0"/>
+          <a:chOff x="0" y="0"/>
+          <a:chExt cx="0" cy="0"/>
+        </a:xfrm>
+      </p:grpSpPr>
+      <p:sp>
+        <p:nvSpPr>
+          <p:cNvPr id="2" name="Title 1">
+            <a:extLst>
+              <a:ext uri="{FF2B5EF4-FFF2-40B4-BE49-F238E27FC236}">
+                <a16:creationId xmlns:a16="http://schemas.microsoft.com/office/drawing/2014/main" id="{A01107D3-1D1D-E14D-F119-D4ED0D6E715A}"/>
+              </a:ext>
+            </a:extLst>
+          </p:cNvPr>
+          <p:cNvSpPr>
+            <a:spLocks noGrp="1"/>
+          </p:cNvSpPr>
+          <p:nvPr>
+            <p:ph type="title"/>
+          </p:nvPr>
+        </p:nvSpPr>
+        <p:spPr>
+          <a:xfrm>
+            <a:off x="839788" y="457200"/>
+            <a:ext cx="3932237" cy="1600200"/>
+          </a:xfrm>
+        </p:spPr>
+        <p:txBody>
+          <a:bodyPr anchor="b"/>
+          <a:lstStyle>
+            <a:lvl1pPr>
+              <a:defRPr sz="3200"/>
+            </a:lvl1pPr>
+          </a:lstStyle>
+          <a:p>
+            <a:r>
+              <a:rPr lang="en-US"/>
+              <a:t>Click to edit Master title style</a:t>
+            </a:r>
+          </a:p>
+        </p:txBody>
+      </p:sp>
+      <p:sp>
+        <p:nvSpPr>
+          <p:cNvPr id="3" name="Picture Placeholder 2">
+            <a:extLst>
+              <a:ext uri="{FF2B5EF4-FFF2-40B4-BE49-F238E27FC236}">
+                <a16:creationId xmlns:a16="http://schemas.microsoft.com/office/drawing/2014/main" id="{4F89C8DE-2007-8F32-53CA-6C2BE6C3232C}"/>
+              </a:ext>
+            </a:extLst>
+          </p:cNvPr>
+          <p:cNvSpPr>
+            <a:spLocks noGrp="1"/>
+          </p:cNvSpPr>
+          <p:nvPr>
+            <p:ph type="pic" idx="1"/>
+          </p:nvPr>
+        </p:nvSpPr>
+        <p:spPr>
+          <a:xfrm>
+            <a:off x="5183188" y="987425"/>
+            <a:ext cx="6172200" cy="4873625"/>
+          </a:xfrm>
+        </p:spPr>
+        <p:txBody>
+          <a:bodyPr/>
+          <a:lstStyle>
+            <a:lvl1pPr marL="0" indent="0">
+              <a:buNone/>
+              <a:defRPr sz="3200"/>
+            </a:lvl1pPr>
+            <a:lvl2pPr marL="457200" indent="0">
+              <a:buNone/>
+              <a:defRPr sz="2800"/>
+            </a:lvl2pPr>
+            <a:lvl3pPr marL="914400" indent="0">
+              <a:buNone/>
+              <a:defRPr sz="2400"/>
+            </a:lvl3pPr>
+            <a:lvl4pPr marL="1371600" indent="0">
+              <a:buNone/>
+              <a:defRPr sz="2000"/>
+            </a:lvl4pPr>
+            <a:lvl5pPr marL="1828800" indent="0">
+              <a:buNone/>
+              <a:defRPr sz="2000"/>
+            </a:lvl5pPr>
+            <a:lvl6pPr marL="2286000" indent="0">
+              <a:buNone/>
+              <a:defRPr sz="2000"/>
+            </a:lvl6pPr>
+            <a:lvl7pPr marL="2743200" indent="0">
+              <a:buNone/>
+              <a:defRPr sz="2000"/>
+            </a:lvl7pPr>
+            <a:lvl8pPr marL="3200400" indent="0">
+              <a:buNone/>
+              <a:defRPr sz="2000"/>
+            </a:lvl8pPr>
+            <a:lvl9pPr marL="3657600" indent="0">
+              <a:buNone/>
+              <a:defRPr sz="2000"/>
+            </a:lvl9pPr>
+          </a:lstStyle>
+          <a:p>
+            <a:endParaRPr lang="en-US"/>
+          </a:p>
+        </p:txBody>
+      </p:sp>
+      <p:sp>
+        <p:nvSpPr>
+          <p:cNvPr id="4" name="Text Placeholder 3">
+            <a:extLst>
+              <a:ext uri="{FF2B5EF4-FFF2-40B4-BE49-F238E27FC236}">
+                <a16:creationId xmlns:a16="http://schemas.microsoft.com/office/drawing/2014/main" id="{A3269AA0-9FE1-8557-D714-EB91B86CBD2C}"/>
+              </a:ext>
+            </a:extLst>
+          </p:cNvPr>
+          <p:cNvSpPr>
+            <a:spLocks noGrp="1"/>
+          </p:cNvSpPr>
+          <p:nvPr>
+            <p:ph type="body" sz="half" idx="2"/>
+          </p:nvPr>
+        </p:nvSpPr>
+        <p:spPr>
+          <a:xfrm>
+            <a:off x="839788" y="2057400"/>
+            <a:ext cx="3932237" cy="3811588"/>
+          </a:xfrm>
+        </p:spPr>
+        <p:txBody>
+          <a:bodyPr/>
+          <a:lstStyle>
+            <a:lvl1pPr marL="0" indent="0">
+              <a:buNone/>
+              <a:defRPr sz="1600"/>
+            </a:lvl1pPr>
+            <a:lvl2pPr marL="457200" indent="0">
+              <a:buNone/>
+              <a:defRPr sz="1400"/>
+            </a:lvl2pPr>
+            <a:lvl3pPr marL="914400" indent="0">
+              <a:buNone/>
+              <a:defRPr sz="1200"/>
+            </a:lvl3pPr>
+            <a:lvl4pPr marL="1371600" indent="0">
+              <a:buNone/>
+              <a:defRPr sz="1000"/>
+            </a:lvl4pPr>
+            <a:lvl5pPr marL="1828800" indent="0">
+              <a:buNone/>
+              <a:defRPr sz="1000"/>
+            </a:lvl5pPr>
+            <a:lvl6pPr marL="2286000" indent="0">
+              <a:buNone/>
+              <a:defRPr sz="1000"/>
+            </a:lvl6pPr>
+            <a:lvl7pPr marL="2743200" indent="0">
+              <a:buNone/>
+              <a:defRPr sz="1000"/>
+            </a:lvl7pPr>
+            <a:lvl8pPr marL="3200400" indent="0">
+              <a:buNone/>
+              <a:defRPr sz="1000"/>
+            </a:lvl8pPr>
+            <a:lvl9pPr marL="3657600" indent="0">
+              <a:buNone/>
+              <a:defRPr sz="1000"/>
+            </a:lvl9pPr>
+          </a:lstStyle>
+          <a:p>
+            <a:pPr lvl="0"/>
+            <a:r>
+              <a:rPr lang="en-US"/>
+              <a:t>Click to edit Master text styles</a:t>
+            </a:r>
+          </a:p>
+        </p:txBody>
+      </p:sp>
+      <p:sp>
+        <p:nvSpPr>
+          <p:cNvPr id="5" name="Date Placeholder 4">
+            <a:extLst>
+              <a:ext uri="{FF2B5EF4-FFF2-40B4-BE49-F238E27FC236}">
+                <a16:creationId xmlns:a16="http://schemas.microsoft.com/office/drawing/2014/main" id="{8809904E-FCF5-67DC-8B60-58B1DB4A91EF}"/>
+              </a:ext>
+            </a:extLst>
+          </p:cNvPr>
+          <p:cNvSpPr>
+            <a:spLocks noGrp="1"/>
+          </p:cNvSpPr>
+          <p:nvPr>
+            <p:ph type="dt" sz="half" idx="10"/>
+          </p:nvPr>
+        </p:nvSpPr>
+        <p:spPr/>
+        <p:txBody>
+          <a:bodyPr/>
+          <a:lstStyle/>
+          <a:p>
+            <a:fld id="{DB28C05C-8A5D-4902-A59B-494921F3C1DF}" type="datetimeFigureOut">
+              <a:rPr lang="en-US" smtClean="0"/>
+              <a:t>7/24/2026</a:t>
+            </a:fld>
+            <a:endParaRPr lang="en-US"/>
+          </a:p>
+        </p:txBody>
+      </p:sp>
+      <p:sp>
+        <p:nvSpPr>
+          <p:cNvPr id="6" name="Footer Placeholder 5">
+            <a:extLst>
+              <a:ext uri="{FF2B5EF4-FFF2-40B4-BE49-F238E27FC236}">
+                <a16:creationId xmlns:a16="http://schemas.microsoft.com/office/drawing/2014/main" id="{45DF31BA-A304-97B8-3F2D-3FF44E6F9208}"/>
+              </a:ext>
+            </a:extLst>
+          </p:cNvPr>
+          <p:cNvSpPr>
+            <a:spLocks noGrp="1"/>
+          </p:cNvSpPr>
+          <p:nvPr>
+            <p:ph type="ftr" sz="quarter" idx="11"/>
+          </p:nvPr>
+        </p:nvSpPr>
+        <p:spPr/>
+        <p:txBody>
+          <a:bodyPr/>
+          <a:lstStyle/>
+          <a:p>
+            <a:endParaRPr lang="en-US"/>
+          </a:p>
+        </p:txBody>
+      </p:sp>
+      <p:sp>
+        <p:nvSpPr>
+          <p:cNvPr id="7" name="Slide Number Placeholder 6">
+            <a:extLst>
+              <a:ext uri="{FF2B5EF4-FFF2-40B4-BE49-F238E27FC236}">
+                <a16:creationId xmlns:a16="http://schemas.microsoft.com/office/drawing/2014/main" id="{022C26B0-8CF4-3C9A-2BFF-7F75F55C6F4D}"/>
+              </a:ext>
+            </a:extLst>
+          </p:cNvPr>
+          <p:cNvSpPr>
+            <a:spLocks noGrp="1"/>
+          </p:cNvSpPr>
+          <p:nvPr>
+            <p:ph type="sldNum" sz="quarter" idx="12"/>
+          </p:nvPr>
+        </p:nvSpPr>
+        <p:spPr/>
+        <p:txBody>
+          <a:bodyPr/>
+          <a:lstStyle/>
+          <a:p>
+            <a:fld id="{BFA846FA-1D06-4D07-A363-F2A8ECB2D61A}" type="slidenum">
+              <a:rPr lang="en-US" smtClean="0"/>
+              <a:t>‹#›</a:t>
+            </a:fld>
+            <a:endParaRPr lang="en-US"/>
+          </a:p>
+        </p:txBody>
+      </p:sp>
+    </p:spTree>
+    <p:extLst>
+      <p:ext uri="{BB962C8B-B14F-4D97-AF65-F5344CB8AC3E}">
+        <p14:creationId xmlns:p14="http://schemas.microsoft.com/office/powerpoint/2010/main" val="1212179470"/>
+      </p:ext>
+    </p:extLst>
+  </p:cSld>
+  <p:clrMapOvr>
+    <a:masterClrMapping/>
+  </p:clrMapOvr>
+</p:sldLayout>
+</file>
+
+<file path=ppt/slideLayouts/slideLayout21.xml><?xml version="1.0" encoding="utf-8"?>
+<p:sldLayout xmlns:a="http://schemas.openxmlformats.org/drawingml/2006/main" xmlns:r="http://schemas.openxmlformats.org/officeDocument/2006/relationships" xmlns:p="http://schemas.openxmlformats.org/presentationml/2006/main" type="vertTx" preserve="1">
+  <p:cSld name="Title and Vertical Text">
+    <p:spTree>
+      <p:nvGrpSpPr>
+        <p:cNvPr id="1" name=""/>
+        <p:cNvGrpSpPr/>
+        <p:nvPr/>
+      </p:nvGrpSpPr>
+      <p:grpSpPr>
+        <a:xfrm>
+          <a:off x="0" y="0"/>
+          <a:ext cx="0" cy="0"/>
+          <a:chOff x="0" y="0"/>
+          <a:chExt cx="0" cy="0"/>
+        </a:xfrm>
+      </p:grpSpPr>
+      <p:sp>
+        <p:nvSpPr>
+          <p:cNvPr id="2" name="Title 1">
+            <a:extLst>
+              <a:ext uri="{FF2B5EF4-FFF2-40B4-BE49-F238E27FC236}">
+                <a16:creationId xmlns:a16="http://schemas.microsoft.com/office/drawing/2014/main" id="{779189DD-2E9E-3CE6-C74A-14DBCBE4D915}"/>
+              </a:ext>
+            </a:extLst>
+          </p:cNvPr>
+          <p:cNvSpPr>
+            <a:spLocks noGrp="1"/>
+          </p:cNvSpPr>
+          <p:nvPr>
+            <p:ph type="title"/>
+          </p:nvPr>
+        </p:nvSpPr>
+        <p:spPr/>
+        <p:txBody>
+          <a:bodyPr/>
+          <a:lstStyle/>
+          <a:p>
+            <a:r>
+              <a:rPr lang="en-US"/>
+              <a:t>Click to edit Master title style</a:t>
+            </a:r>
+          </a:p>
+        </p:txBody>
+      </p:sp>
+      <p:sp>
+        <p:nvSpPr>
+          <p:cNvPr id="3" name="Vertical Text Placeholder 2">
+            <a:extLst>
+              <a:ext uri="{FF2B5EF4-FFF2-40B4-BE49-F238E27FC236}">
+                <a16:creationId xmlns:a16="http://schemas.microsoft.com/office/drawing/2014/main" id="{AA4879C7-6E59-65CB-191A-52502FB2D076}"/>
+              </a:ext>
+            </a:extLst>
+          </p:cNvPr>
+          <p:cNvSpPr>
+            <a:spLocks noGrp="1"/>
+          </p:cNvSpPr>
+          <p:nvPr>
+            <p:ph type="body" orient="vert" idx="1"/>
+          </p:nvPr>
+        </p:nvSpPr>
+        <p:spPr/>
+        <p:txBody>
+          <a:bodyPr vert="eaVert"/>
+          <a:lstStyle/>
+          <a:p>
+            <a:pPr lvl="0"/>
+            <a:r>
+              <a:rPr lang="en-US"/>
+              <a:t>Click to edit Master text styles</a:t>
+            </a:r>
+          </a:p>
+          <a:p>
+            <a:pPr lvl="1"/>
+            <a:r>
+              <a:rPr lang="en-US"/>
+              <a:t>Second level</a:t>
+            </a:r>
+          </a:p>
+          <a:p>
+            <a:pPr lvl="2"/>
+            <a:r>
+              <a:rPr lang="en-US"/>
+              <a:t>Third level</a:t>
+            </a:r>
+          </a:p>
+          <a:p>
+            <a:pPr lvl="3"/>
+            <a:r>
+              <a:rPr lang="en-US"/>
+              <a:t>Fourth level</a:t>
+            </a:r>
+          </a:p>
+          <a:p>
+            <a:pPr lvl="4"/>
+            <a:r>
+              <a:rPr lang="en-US"/>
+              <a:t>Fifth level</a:t>
+            </a:r>
+          </a:p>
+        </p:txBody>
+      </p:sp>
+      <p:sp>
+        <p:nvSpPr>
+          <p:cNvPr id="4" name="Date Placeholder 3">
+            <a:extLst>
+              <a:ext uri="{FF2B5EF4-FFF2-40B4-BE49-F238E27FC236}">
+                <a16:creationId xmlns:a16="http://schemas.microsoft.com/office/drawing/2014/main" id="{6D711FDB-EC64-9BB1-B69E-B370DC2E09FC}"/>
+              </a:ext>
+            </a:extLst>
+          </p:cNvPr>
+          <p:cNvSpPr>
+            <a:spLocks noGrp="1"/>
+          </p:cNvSpPr>
+          <p:nvPr>
+            <p:ph type="dt" sz="half" idx="10"/>
+          </p:nvPr>
+        </p:nvSpPr>
+        <p:spPr/>
+        <p:txBody>
+          <a:bodyPr/>
+          <a:lstStyle/>
+          <a:p>
+            <a:fld id="{DB28C05C-8A5D-4902-A59B-494921F3C1DF}" type="datetimeFigureOut">
+              <a:rPr lang="en-US" smtClean="0"/>
+              <a:t>7/24/2026</a:t>
+            </a:fld>
+            <a:endParaRPr lang="en-US"/>
+          </a:p>
+        </p:txBody>
+      </p:sp>
+      <p:sp>
+        <p:nvSpPr>
+          <p:cNvPr id="5" name="Footer Placeholder 4">
+            <a:extLst>
+              <a:ext uri="{FF2B5EF4-FFF2-40B4-BE49-F238E27FC236}">
+                <a16:creationId xmlns:a16="http://schemas.microsoft.com/office/drawing/2014/main" id="{6B7BEFFA-745B-B3CF-DC96-CEECCDEAB566}"/>
+              </a:ext>
+            </a:extLst>
+          </p:cNvPr>
+          <p:cNvSpPr>
+            <a:spLocks noGrp="1"/>
+          </p:cNvSpPr>
+          <p:nvPr>
+            <p:ph type="ftr" sz="quarter" idx="11"/>
+          </p:nvPr>
+        </p:nvSpPr>
+        <p:spPr/>
+        <p:txBody>
+          <a:bodyPr/>
+          <a:lstStyle/>
+          <a:p>
+            <a:endParaRPr lang="en-US"/>
+          </a:p>
+        </p:txBody>
+      </p:sp>
+      <p:sp>
+        <p:nvSpPr>
+          <p:cNvPr id="6" name="Slide Number Placeholder 5">
+            <a:extLst>
+              <a:ext uri="{FF2B5EF4-FFF2-40B4-BE49-F238E27FC236}">
+                <a16:creationId xmlns:a16="http://schemas.microsoft.com/office/drawing/2014/main" id="{9C187224-A3A2-6EE5-029E-C6D681F55773}"/>
+              </a:ext>
+            </a:extLst>
+          </p:cNvPr>
+          <p:cNvSpPr>
+            <a:spLocks noGrp="1"/>
+          </p:cNvSpPr>
+          <p:nvPr>
+            <p:ph type="sldNum" sz="quarter" idx="12"/>
+          </p:nvPr>
+        </p:nvSpPr>
+        <p:spPr/>
+        <p:txBody>
+          <a:bodyPr/>
+          <a:lstStyle/>
+          <a:p>
+            <a:fld id="{BFA846FA-1D06-4D07-A363-F2A8ECB2D61A}" type="slidenum">
+              <a:rPr lang="en-US" smtClean="0"/>
+              <a:t>‹#›</a:t>
+            </a:fld>
+            <a:endParaRPr lang="en-US"/>
+          </a:p>
+        </p:txBody>
+      </p:sp>
+    </p:spTree>
+    <p:extLst>
+      <p:ext uri="{BB962C8B-B14F-4D97-AF65-F5344CB8AC3E}">
+        <p14:creationId xmlns:p14="http://schemas.microsoft.com/office/powerpoint/2010/main" val="3592449706"/>
+      </p:ext>
+    </p:extLst>
+  </p:cSld>
+  <p:clrMapOvr>
+    <a:masterClrMapping/>
+  </p:clrMapOvr>
+</p:sldLayout>
+</file>
+
+<file path=ppt/slideLayouts/slideLayout22.xml><?xml version="1.0" encoding="utf-8"?>
+<p:sldLayout xmlns:a="http://schemas.openxmlformats.org/drawingml/2006/main" xmlns:r="http://schemas.openxmlformats.org/officeDocument/2006/relationships" xmlns:p="http://schemas.openxmlformats.org/presentationml/2006/main" type="vertTitleAndTx" preserve="1">
+  <p:cSld name="Vertical Title and Text">
+    <p:spTree>
+      <p:nvGrpSpPr>
+        <p:cNvPr id="1" name=""/>
+        <p:cNvGrpSpPr/>
+        <p:nvPr/>
+      </p:nvGrpSpPr>
+      <p:grpSpPr>
+        <a:xfrm>
+          <a:off x="0" y="0"/>
+          <a:ext cx="0" cy="0"/>
+          <a:chOff x="0" y="0"/>
+          <a:chExt cx="0" cy="0"/>
+        </a:xfrm>
+      </p:grpSpPr>
+      <p:sp>
+        <p:nvSpPr>
+          <p:cNvPr id="2" name="Vertical Title 1">
+            <a:extLst>
+              <a:ext uri="{FF2B5EF4-FFF2-40B4-BE49-F238E27FC236}">
+                <a16:creationId xmlns:a16="http://schemas.microsoft.com/office/drawing/2014/main" id="{3259C6F1-7D53-6596-E497-14C0C60D93D2}"/>
+              </a:ext>
+            </a:extLst>
+          </p:cNvPr>
+          <p:cNvSpPr>
+            <a:spLocks noGrp="1"/>
+          </p:cNvSpPr>
+          <p:nvPr>
+            <p:ph type="title" orient="vert"/>
+          </p:nvPr>
+        </p:nvSpPr>
+        <p:spPr>
+          <a:xfrm>
+            <a:off x="8724900" y="365125"/>
+            <a:ext cx="2628900" cy="5811838"/>
+          </a:xfrm>
+        </p:spPr>
+        <p:txBody>
+          <a:bodyPr vert="eaVert"/>
+          <a:lstStyle/>
+          <a:p>
+            <a:r>
+              <a:rPr lang="en-US"/>
+              <a:t>Click to edit Master title style</a:t>
+            </a:r>
+          </a:p>
+        </p:txBody>
+      </p:sp>
+      <p:sp>
+        <p:nvSpPr>
+          <p:cNvPr id="3" name="Vertical Text Placeholder 2">
+            <a:extLst>
+              <a:ext uri="{FF2B5EF4-FFF2-40B4-BE49-F238E27FC236}">
+                <a16:creationId xmlns:a16="http://schemas.microsoft.com/office/drawing/2014/main" id="{230FC023-90F0-2CD9-E996-DDA9BC68BD48}"/>
+              </a:ext>
+            </a:extLst>
+          </p:cNvPr>
+          <p:cNvSpPr>
+            <a:spLocks noGrp="1"/>
+          </p:cNvSpPr>
+          <p:nvPr>
+            <p:ph type="body" orient="vert" idx="1"/>
+          </p:nvPr>
+        </p:nvSpPr>
+        <p:spPr>
+          <a:xfrm>
+            <a:off x="838200" y="365125"/>
+            <a:ext cx="7734300" cy="5811838"/>
+          </a:xfrm>
+        </p:spPr>
+        <p:txBody>
+          <a:bodyPr vert="eaVert"/>
+          <a:lstStyle/>
+          <a:p>
+            <a:pPr lvl="0"/>
+            <a:r>
+              <a:rPr lang="en-US"/>
+              <a:t>Click to edit Master text styles</a:t>
+            </a:r>
+          </a:p>
+          <a:p>
+            <a:pPr lvl="1"/>
+            <a:r>
+              <a:rPr lang="en-US"/>
+              <a:t>Second level</a:t>
+            </a:r>
+          </a:p>
+          <a:p>
+            <a:pPr lvl="2"/>
+            <a:r>
+              <a:rPr lang="en-US"/>
+              <a:t>Third level</a:t>
+            </a:r>
+          </a:p>
+          <a:p>
+            <a:pPr lvl="3"/>
+            <a:r>
+              <a:rPr lang="en-US"/>
+              <a:t>Fourth level</a:t>
+            </a:r>
+          </a:p>
+          <a:p>
+            <a:pPr lvl="4"/>
+            <a:r>
+              <a:rPr lang="en-US"/>
+              <a:t>Fifth level</a:t>
+            </a:r>
+          </a:p>
+        </p:txBody>
+      </p:sp>
+      <p:sp>
+        <p:nvSpPr>
+          <p:cNvPr id="4" name="Date Placeholder 3">
+            <a:extLst>
+              <a:ext uri="{FF2B5EF4-FFF2-40B4-BE49-F238E27FC236}">
+                <a16:creationId xmlns:a16="http://schemas.microsoft.com/office/drawing/2014/main" id="{7A4146E0-0357-D57B-5564-F05465B4EE7D}"/>
+              </a:ext>
+            </a:extLst>
+          </p:cNvPr>
+          <p:cNvSpPr>
+            <a:spLocks noGrp="1"/>
+          </p:cNvSpPr>
+          <p:nvPr>
+            <p:ph type="dt" sz="half" idx="10"/>
+          </p:nvPr>
+        </p:nvSpPr>
+        <p:spPr/>
+        <p:txBody>
+          <a:bodyPr/>
+          <a:lstStyle/>
+          <a:p>
+            <a:fld id="{DB28C05C-8A5D-4902-A59B-494921F3C1DF}" type="datetimeFigureOut">
+              <a:rPr lang="en-US" smtClean="0"/>
+              <a:t>7/24/2026</a:t>
+            </a:fld>
+            <a:endParaRPr lang="en-US"/>
+          </a:p>
+        </p:txBody>
+      </p:sp>
+      <p:sp>
+        <p:nvSpPr>
+          <p:cNvPr id="5" name="Footer Placeholder 4">
+            <a:extLst>
+              <a:ext uri="{FF2B5EF4-FFF2-40B4-BE49-F238E27FC236}">
+                <a16:creationId xmlns:a16="http://schemas.microsoft.com/office/drawing/2014/main" id="{D9F920C3-0DD3-8363-FEB3-23BBC3416382}"/>
+              </a:ext>
+            </a:extLst>
+          </p:cNvPr>
+          <p:cNvSpPr>
+            <a:spLocks noGrp="1"/>
+          </p:cNvSpPr>
+          <p:nvPr>
+            <p:ph type="ftr" sz="quarter" idx="11"/>
+          </p:nvPr>
+        </p:nvSpPr>
+        <p:spPr/>
+        <p:txBody>
+          <a:bodyPr/>
+          <a:lstStyle/>
+          <a:p>
+            <a:endParaRPr lang="en-US"/>
+          </a:p>
+        </p:txBody>
+      </p:sp>
+      <p:sp>
+        <p:nvSpPr>
+          <p:cNvPr id="6" name="Slide Number Placeholder 5">
+            <a:extLst>
+              <a:ext uri="{FF2B5EF4-FFF2-40B4-BE49-F238E27FC236}">
+                <a16:creationId xmlns:a16="http://schemas.microsoft.com/office/drawing/2014/main" id="{C6AF03E0-E742-F254-F71D-F245B092BBDC}"/>
+              </a:ext>
+            </a:extLst>
+          </p:cNvPr>
+          <p:cNvSpPr>
+            <a:spLocks noGrp="1"/>
+          </p:cNvSpPr>
+          <p:nvPr>
+            <p:ph type="sldNum" sz="quarter" idx="12"/>
+          </p:nvPr>
+        </p:nvSpPr>
+        <p:spPr/>
+        <p:txBody>
+          <a:bodyPr/>
+          <a:lstStyle/>
+          <a:p>
+            <a:fld id="{BFA846FA-1D06-4D07-A363-F2A8ECB2D61A}" type="slidenum">
+              <a:rPr lang="en-US" smtClean="0"/>
+              <a:t>‹#›</a:t>
+            </a:fld>
+            <a:endParaRPr lang="en-US"/>
+          </a:p>
+        </p:txBody>
+      </p:sp>
+    </p:spTree>
+    <p:extLst>
+      <p:ext uri="{BB962C8B-B14F-4D97-AF65-F5344CB8AC3E}">
+        <p14:creationId xmlns:p14="http://schemas.microsoft.com/office/powerpoint/2010/main" val="3750877488"/>
       </p:ext>
     </p:extLst>
   </p:cSld>
@@ -4342,7 +6978,7 @@
           <a:p>
             <a:fld id="{8D19A3AA-5CC1-4409-A3F5-5174B3C1B3E1}" type="datetimeFigureOut">
               <a:rPr lang="en-CA" smtClean="0"/>
-              <a:t>2019-09-11</a:t>
+              <a:t>2026-07-24</a:t>
             </a:fld>
             <a:endParaRPr lang="en-CA"/>
           </a:p>
@@ -4610,7 +7246,7 @@
           <a:p>
             <a:fld id="{8D19A3AA-5CC1-4409-A3F5-5174B3C1B3E1}" type="datetimeFigureOut">
               <a:rPr lang="en-CA" smtClean="0"/>
-              <a:t>2019-09-11</a:t>
+              <a:t>2026-07-24</a:t>
             </a:fld>
             <a:endParaRPr lang="en-CA"/>
           </a:p>
@@ -5025,7 +7661,7 @@
           <a:p>
             <a:fld id="{8D19A3AA-5CC1-4409-A3F5-5174B3C1B3E1}" type="datetimeFigureOut">
               <a:rPr lang="en-CA" smtClean="0"/>
-              <a:t>2019-09-11</a:t>
+              <a:t>2026-07-24</a:t>
             </a:fld>
             <a:endParaRPr lang="en-CA"/>
           </a:p>
@@ -5167,7 +7803,7 @@
           <a:p>
             <a:fld id="{8D19A3AA-5CC1-4409-A3F5-5174B3C1B3E1}" type="datetimeFigureOut">
               <a:rPr lang="en-CA" smtClean="0"/>
-              <a:t>2019-09-11</a:t>
+              <a:t>2026-07-24</a:t>
             </a:fld>
             <a:endParaRPr lang="en-CA"/>
           </a:p>
@@ -5280,7 +7916,7 @@
           <a:p>
             <a:fld id="{8D19A3AA-5CC1-4409-A3F5-5174B3C1B3E1}" type="datetimeFigureOut">
               <a:rPr lang="en-CA" smtClean="0"/>
-              <a:t>2019-09-11</a:t>
+              <a:t>2026-07-24</a:t>
             </a:fld>
             <a:endParaRPr lang="en-CA"/>
           </a:p>
@@ -5593,7 +8229,7 @@
           <a:p>
             <a:fld id="{8D19A3AA-5CC1-4409-A3F5-5174B3C1B3E1}" type="datetimeFigureOut">
               <a:rPr lang="en-CA" smtClean="0"/>
-              <a:t>2019-09-11</a:t>
+              <a:t>2026-07-24</a:t>
             </a:fld>
             <a:endParaRPr lang="en-CA"/>
           </a:p>
@@ -5882,7 +8518,7 @@
           <a:p>
             <a:fld id="{8D19A3AA-5CC1-4409-A3F5-5174B3C1B3E1}" type="datetimeFigureOut">
               <a:rPr lang="en-CA" smtClean="0"/>
-              <a:t>2019-09-11</a:t>
+              <a:t>2026-07-24</a:t>
             </a:fld>
             <a:endParaRPr lang="en-CA"/>
           </a:p>
@@ -6125,7 +8761,7 @@
           <a:p>
             <a:fld id="{8D19A3AA-5CC1-4409-A3F5-5174B3C1B3E1}" type="datetimeFigureOut">
               <a:rPr lang="en-CA" smtClean="0"/>
-              <a:t>2019-09-11</a:t>
+              <a:t>2026-07-24</a:t>
             </a:fld>
             <a:endParaRPr lang="en-CA"/>
           </a:p>
@@ -6525,6 +9161,574 @@
 </p:sldMaster>
 </file>
 
+<file path=ppt/slideMasters/slideMaster2.xml><?xml version="1.0" encoding="utf-8"?>
+<p:sldMaster xmlns:a="http://schemas.openxmlformats.org/drawingml/2006/main" xmlns:r="http://schemas.openxmlformats.org/officeDocument/2006/relationships" xmlns:p="http://schemas.openxmlformats.org/presentationml/2006/main">
+  <p:cSld>
+    <p:bg>
+      <p:bgRef idx="1001">
+        <a:schemeClr val="bg1"/>
+      </p:bgRef>
+    </p:bg>
+    <p:spTree>
+      <p:nvGrpSpPr>
+        <p:cNvPr id="1" name=""/>
+        <p:cNvGrpSpPr/>
+        <p:nvPr/>
+      </p:nvGrpSpPr>
+      <p:grpSpPr>
+        <a:xfrm>
+          <a:off x="0" y="0"/>
+          <a:ext cx="0" cy="0"/>
+          <a:chOff x="0" y="0"/>
+          <a:chExt cx="0" cy="0"/>
+        </a:xfrm>
+      </p:grpSpPr>
+      <p:sp>
+        <p:nvSpPr>
+          <p:cNvPr id="2" name="Title Placeholder 1">
+            <a:extLst>
+              <a:ext uri="{FF2B5EF4-FFF2-40B4-BE49-F238E27FC236}">
+                <a16:creationId xmlns:a16="http://schemas.microsoft.com/office/drawing/2014/main" id="{3899B1C1-6690-3DED-58E5-48AE8D519857}"/>
+              </a:ext>
+            </a:extLst>
+          </p:cNvPr>
+          <p:cNvSpPr>
+            <a:spLocks noGrp="1"/>
+          </p:cNvSpPr>
+          <p:nvPr>
+            <p:ph type="title"/>
+          </p:nvPr>
+        </p:nvSpPr>
+        <p:spPr>
+          <a:xfrm>
+            <a:off x="838200" y="365125"/>
+            <a:ext cx="10515600" cy="1325563"/>
+          </a:xfrm>
+          <a:prstGeom prst="rect">
+            <a:avLst/>
+          </a:prstGeom>
+        </p:spPr>
+        <p:txBody>
+          <a:bodyPr vert="horz" lIns="91440" tIns="45720" rIns="91440" bIns="45720" rtlCol="0" anchor="ctr">
+            <a:normAutofit/>
+          </a:bodyPr>
+          <a:lstStyle/>
+          <a:p>
+            <a:r>
+              <a:rPr lang="en-US"/>
+              <a:t>Click to edit Master title style</a:t>
+            </a:r>
+          </a:p>
+        </p:txBody>
+      </p:sp>
+      <p:sp>
+        <p:nvSpPr>
+          <p:cNvPr id="3" name="Text Placeholder 2">
+            <a:extLst>
+              <a:ext uri="{FF2B5EF4-FFF2-40B4-BE49-F238E27FC236}">
+                <a16:creationId xmlns:a16="http://schemas.microsoft.com/office/drawing/2014/main" id="{F1116159-6330-3BE0-9D90-95402F537153}"/>
+              </a:ext>
+            </a:extLst>
+          </p:cNvPr>
+          <p:cNvSpPr>
+            <a:spLocks noGrp="1"/>
+          </p:cNvSpPr>
+          <p:nvPr>
+            <p:ph type="body" idx="1"/>
+          </p:nvPr>
+        </p:nvSpPr>
+        <p:spPr>
+          <a:xfrm>
+            <a:off x="838200" y="1825625"/>
+            <a:ext cx="10515600" cy="4351338"/>
+          </a:xfrm>
+          <a:prstGeom prst="rect">
+            <a:avLst/>
+          </a:prstGeom>
+        </p:spPr>
+        <p:txBody>
+          <a:bodyPr vert="horz" lIns="91440" tIns="45720" rIns="91440" bIns="45720" rtlCol="0">
+            <a:normAutofit/>
+          </a:bodyPr>
+          <a:lstStyle/>
+          <a:p>
+            <a:pPr lvl="0"/>
+            <a:r>
+              <a:rPr lang="en-US"/>
+              <a:t>Click to edit Master text styles</a:t>
+            </a:r>
+          </a:p>
+          <a:p>
+            <a:pPr lvl="1"/>
+            <a:r>
+              <a:rPr lang="en-US"/>
+              <a:t>Second level</a:t>
+            </a:r>
+          </a:p>
+          <a:p>
+            <a:pPr lvl="2"/>
+            <a:r>
+              <a:rPr lang="en-US"/>
+              <a:t>Third level</a:t>
+            </a:r>
+          </a:p>
+          <a:p>
+            <a:pPr lvl="3"/>
+            <a:r>
+              <a:rPr lang="en-US"/>
+              <a:t>Fourth level</a:t>
+            </a:r>
+          </a:p>
+          <a:p>
+            <a:pPr lvl="4"/>
+            <a:r>
+              <a:rPr lang="en-US"/>
+              <a:t>Fifth level</a:t>
+            </a:r>
+          </a:p>
+        </p:txBody>
+      </p:sp>
+      <p:sp>
+        <p:nvSpPr>
+          <p:cNvPr id="4" name="Date Placeholder 3">
+            <a:extLst>
+              <a:ext uri="{FF2B5EF4-FFF2-40B4-BE49-F238E27FC236}">
+                <a16:creationId xmlns:a16="http://schemas.microsoft.com/office/drawing/2014/main" id="{24B1D7A6-A005-EDA2-B06A-C1CF9C38DD36}"/>
+              </a:ext>
+            </a:extLst>
+          </p:cNvPr>
+          <p:cNvSpPr>
+            <a:spLocks noGrp="1"/>
+          </p:cNvSpPr>
+          <p:nvPr>
+            <p:ph type="dt" sz="half" idx="2"/>
+          </p:nvPr>
+        </p:nvSpPr>
+        <p:spPr>
+          <a:xfrm>
+            <a:off x="838200" y="6356350"/>
+            <a:ext cx="2743200" cy="365125"/>
+          </a:xfrm>
+          <a:prstGeom prst="rect">
+            <a:avLst/>
+          </a:prstGeom>
+        </p:spPr>
+        <p:txBody>
+          <a:bodyPr vert="horz" lIns="91440" tIns="45720" rIns="91440" bIns="45720" rtlCol="0" anchor="ctr"/>
+          <a:lstStyle>
+            <a:lvl1pPr algn="l">
+              <a:defRPr sz="1200">
+                <a:solidFill>
+                  <a:schemeClr val="tx1">
+                    <a:tint val="82000"/>
+                  </a:schemeClr>
+                </a:solidFill>
+              </a:defRPr>
+            </a:lvl1pPr>
+          </a:lstStyle>
+          <a:p>
+            <a:fld id="{DB28C05C-8A5D-4902-A59B-494921F3C1DF}" type="datetimeFigureOut">
+              <a:rPr lang="en-US" smtClean="0"/>
+              <a:t>7/24/2026</a:t>
+            </a:fld>
+            <a:endParaRPr lang="en-US"/>
+          </a:p>
+        </p:txBody>
+      </p:sp>
+      <p:sp>
+        <p:nvSpPr>
+          <p:cNvPr id="5" name="Footer Placeholder 4">
+            <a:extLst>
+              <a:ext uri="{FF2B5EF4-FFF2-40B4-BE49-F238E27FC236}">
+                <a16:creationId xmlns:a16="http://schemas.microsoft.com/office/drawing/2014/main" id="{DDD86067-D497-00FE-A954-E57C3E2904DC}"/>
+              </a:ext>
+            </a:extLst>
+          </p:cNvPr>
+          <p:cNvSpPr>
+            <a:spLocks noGrp="1"/>
+          </p:cNvSpPr>
+          <p:nvPr>
+            <p:ph type="ftr" sz="quarter" idx="3"/>
+          </p:nvPr>
+        </p:nvSpPr>
+        <p:spPr>
+          <a:xfrm>
+            <a:off x="4038600" y="6356350"/>
+            <a:ext cx="4114800" cy="365125"/>
+          </a:xfrm>
+          <a:prstGeom prst="rect">
+            <a:avLst/>
+          </a:prstGeom>
+        </p:spPr>
+        <p:txBody>
+          <a:bodyPr vert="horz" lIns="91440" tIns="45720" rIns="91440" bIns="45720" rtlCol="0" anchor="ctr"/>
+          <a:lstStyle>
+            <a:lvl1pPr algn="ctr">
+              <a:defRPr sz="1200">
+                <a:solidFill>
+                  <a:schemeClr val="tx1">
+                    <a:tint val="82000"/>
+                  </a:schemeClr>
+                </a:solidFill>
+              </a:defRPr>
+            </a:lvl1pPr>
+          </a:lstStyle>
+          <a:p>
+            <a:endParaRPr lang="en-US"/>
+          </a:p>
+        </p:txBody>
+      </p:sp>
+      <p:sp>
+        <p:nvSpPr>
+          <p:cNvPr id="6" name="Slide Number Placeholder 5">
+            <a:extLst>
+              <a:ext uri="{FF2B5EF4-FFF2-40B4-BE49-F238E27FC236}">
+                <a16:creationId xmlns:a16="http://schemas.microsoft.com/office/drawing/2014/main" id="{95EF62C2-1620-5467-4BDC-5BD77F80DBD0}"/>
+              </a:ext>
+            </a:extLst>
+          </p:cNvPr>
+          <p:cNvSpPr>
+            <a:spLocks noGrp="1"/>
+          </p:cNvSpPr>
+          <p:nvPr>
+            <p:ph type="sldNum" sz="quarter" idx="4"/>
+          </p:nvPr>
+        </p:nvSpPr>
+        <p:spPr>
+          <a:xfrm>
+            <a:off x="8610600" y="6356350"/>
+            <a:ext cx="2743200" cy="365125"/>
+          </a:xfrm>
+          <a:prstGeom prst="rect">
+            <a:avLst/>
+          </a:prstGeom>
+        </p:spPr>
+        <p:txBody>
+          <a:bodyPr vert="horz" lIns="91440" tIns="45720" rIns="91440" bIns="45720" rtlCol="0" anchor="ctr"/>
+          <a:lstStyle>
+            <a:lvl1pPr algn="r">
+              <a:defRPr sz="1200">
+                <a:solidFill>
+                  <a:schemeClr val="tx1">
+                    <a:tint val="82000"/>
+                  </a:schemeClr>
+                </a:solidFill>
+              </a:defRPr>
+            </a:lvl1pPr>
+          </a:lstStyle>
+          <a:p>
+            <a:fld id="{BFA846FA-1D06-4D07-A363-F2A8ECB2D61A}" type="slidenum">
+              <a:rPr lang="en-US" smtClean="0"/>
+              <a:t>‹#›</a:t>
+            </a:fld>
+            <a:endParaRPr lang="en-US"/>
+          </a:p>
+        </p:txBody>
+      </p:sp>
+    </p:spTree>
+    <p:extLst>
+      <p:ext uri="{BB962C8B-B14F-4D97-AF65-F5344CB8AC3E}">
+        <p14:creationId xmlns:p14="http://schemas.microsoft.com/office/powerpoint/2010/main" val="617338748"/>
+      </p:ext>
+    </p:extLst>
+  </p:cSld>
+  <p:clrMap bg1="lt1" tx1="dk1" bg2="lt2" tx2="dk2" accent1="accent1" accent2="accent2" accent3="accent3" accent4="accent4" accent5="accent5" accent6="accent6" hlink="hlink" folHlink="folHlink"/>
+  <p:sldLayoutIdLst>
+    <p:sldLayoutId id="2147483661" r:id="rId1"/>
+    <p:sldLayoutId id="2147483662" r:id="rId2"/>
+    <p:sldLayoutId id="2147483663" r:id="rId3"/>
+    <p:sldLayoutId id="2147483664" r:id="rId4"/>
+    <p:sldLayoutId id="2147483665" r:id="rId5"/>
+    <p:sldLayoutId id="2147483666" r:id="rId6"/>
+    <p:sldLayoutId id="2147483667" r:id="rId7"/>
+    <p:sldLayoutId id="2147483668" r:id="rId8"/>
+    <p:sldLayoutId id="2147483669" r:id="rId9"/>
+    <p:sldLayoutId id="2147483670" r:id="rId10"/>
+    <p:sldLayoutId id="2147483671" r:id="rId11"/>
+  </p:sldLayoutIdLst>
+  <p:txStyles>
+    <p:titleStyle>
+      <a:lvl1pPr algn="l" defTabSz="914400" rtl="0" eaLnBrk="1" latinLnBrk="0" hangingPunct="1">
+        <a:lnSpc>
+          <a:spcPct val="90000"/>
+        </a:lnSpc>
+        <a:spcBef>
+          <a:spcPct val="0"/>
+        </a:spcBef>
+        <a:buNone/>
+        <a:defRPr sz="4400" kern="1200">
+          <a:solidFill>
+            <a:schemeClr val="tx1"/>
+          </a:solidFill>
+          <a:latin typeface="+mj-lt"/>
+          <a:ea typeface="+mj-ea"/>
+          <a:cs typeface="+mj-cs"/>
+        </a:defRPr>
+      </a:lvl1pPr>
+    </p:titleStyle>
+    <p:bodyStyle>
+      <a:lvl1pPr marL="228600" indent="-228600" algn="l" defTabSz="914400" rtl="0" eaLnBrk="1" latinLnBrk="0" hangingPunct="1">
+        <a:lnSpc>
+          <a:spcPct val="90000"/>
+        </a:lnSpc>
+        <a:spcBef>
+          <a:spcPts val="1000"/>
+        </a:spcBef>
+        <a:buFont typeface="Arial" panose="020B0604020202020204" pitchFamily="34" charset="0"/>
+        <a:buChar char="•"/>
+        <a:defRPr sz="2800" kern="1200">
+          <a:solidFill>
+            <a:schemeClr val="tx1"/>
+          </a:solidFill>
+          <a:latin typeface="+mn-lt"/>
+          <a:ea typeface="+mn-ea"/>
+          <a:cs typeface="+mn-cs"/>
+        </a:defRPr>
+      </a:lvl1pPr>
+      <a:lvl2pPr marL="685800" indent="-228600" algn="l" defTabSz="914400" rtl="0" eaLnBrk="1" latinLnBrk="0" hangingPunct="1">
+        <a:lnSpc>
+          <a:spcPct val="90000"/>
+        </a:lnSpc>
+        <a:spcBef>
+          <a:spcPts val="500"/>
+        </a:spcBef>
+        <a:buFont typeface="Arial" panose="020B0604020202020204" pitchFamily="34" charset="0"/>
+        <a:buChar char="•"/>
+        <a:defRPr sz="2400" kern="1200">
+          <a:solidFill>
+            <a:schemeClr val="tx1"/>
+          </a:solidFill>
+          <a:latin typeface="+mn-lt"/>
+          <a:ea typeface="+mn-ea"/>
+          <a:cs typeface="+mn-cs"/>
+        </a:defRPr>
+      </a:lvl2pPr>
+      <a:lvl3pPr marL="1143000" indent="-228600" algn="l" defTabSz="914400" rtl="0" eaLnBrk="1" latinLnBrk="0" hangingPunct="1">
+        <a:lnSpc>
+          <a:spcPct val="90000"/>
+        </a:lnSpc>
+        <a:spcBef>
+          <a:spcPts val="500"/>
+        </a:spcBef>
+        <a:buFont typeface="Arial" panose="020B0604020202020204" pitchFamily="34" charset="0"/>
+        <a:buChar char="•"/>
+        <a:defRPr sz="2000" kern="1200">
+          <a:solidFill>
+            <a:schemeClr val="tx1"/>
+          </a:solidFill>
+          <a:latin typeface="+mn-lt"/>
+          <a:ea typeface="+mn-ea"/>
+          <a:cs typeface="+mn-cs"/>
+        </a:defRPr>
+      </a:lvl3pPr>
+      <a:lvl4pPr marL="1600200" indent="-228600" algn="l" defTabSz="914400" rtl="0" eaLnBrk="1" latinLnBrk="0" hangingPunct="1">
+        <a:lnSpc>
+          <a:spcPct val="90000"/>
+        </a:lnSpc>
+        <a:spcBef>
+          <a:spcPts val="500"/>
+        </a:spcBef>
+        <a:buFont typeface="Arial" panose="020B0604020202020204" pitchFamily="34" charset="0"/>
+        <a:buChar char="•"/>
+        <a:defRPr sz="1800" kern="1200">
+          <a:solidFill>
+            <a:schemeClr val="tx1"/>
+          </a:solidFill>
+          <a:latin typeface="+mn-lt"/>
+          <a:ea typeface="+mn-ea"/>
+          <a:cs typeface="+mn-cs"/>
+        </a:defRPr>
+      </a:lvl4pPr>
+      <a:lvl5pPr marL="2057400" indent="-228600" algn="l" defTabSz="914400" rtl="0" eaLnBrk="1" latinLnBrk="0" hangingPunct="1">
+        <a:lnSpc>
+          <a:spcPct val="90000"/>
+        </a:lnSpc>
+        <a:spcBef>
+          <a:spcPts val="500"/>
+        </a:spcBef>
+        <a:buFont typeface="Arial" panose="020B0604020202020204" pitchFamily="34" charset="0"/>
+        <a:buChar char="•"/>
+        <a:defRPr sz="1800" kern="1200">
+          <a:solidFill>
+            <a:schemeClr val="tx1"/>
+          </a:solidFill>
+          <a:latin typeface="+mn-lt"/>
+          <a:ea typeface="+mn-ea"/>
+          <a:cs typeface="+mn-cs"/>
+        </a:defRPr>
+      </a:lvl5pPr>
+      <a:lvl6pPr marL="2514600" indent="-228600" algn="l" defTabSz="914400" rtl="0" eaLnBrk="1" latinLnBrk="0" hangingPunct="1">
+        <a:lnSpc>
+          <a:spcPct val="90000"/>
+        </a:lnSpc>
+        <a:spcBef>
+          <a:spcPts val="500"/>
+        </a:spcBef>
+        <a:buFont typeface="Arial" panose="020B0604020202020204" pitchFamily="34" charset="0"/>
+        <a:buChar char="•"/>
+        <a:defRPr sz="1800" kern="1200">
+          <a:solidFill>
+            <a:schemeClr val="tx1"/>
+          </a:solidFill>
+          <a:latin typeface="+mn-lt"/>
+          <a:ea typeface="+mn-ea"/>
+          <a:cs typeface="+mn-cs"/>
+        </a:defRPr>
+      </a:lvl6pPr>
+      <a:lvl7pPr marL="2971800" indent="-228600" algn="l" defTabSz="914400" rtl="0" eaLnBrk="1" latinLnBrk="0" hangingPunct="1">
+        <a:lnSpc>
+          <a:spcPct val="90000"/>
+        </a:lnSpc>
+        <a:spcBef>
+          <a:spcPts val="500"/>
+        </a:spcBef>
+        <a:buFont typeface="Arial" panose="020B0604020202020204" pitchFamily="34" charset="0"/>
+        <a:buChar char="•"/>
+        <a:defRPr sz="1800" kern="1200">
+          <a:solidFill>
+            <a:schemeClr val="tx1"/>
+          </a:solidFill>
+          <a:latin typeface="+mn-lt"/>
+          <a:ea typeface="+mn-ea"/>
+          <a:cs typeface="+mn-cs"/>
+        </a:defRPr>
+      </a:lvl7pPr>
+      <a:lvl8pPr marL="3429000" indent="-228600" algn="l" defTabSz="914400" rtl="0" eaLnBrk="1" latinLnBrk="0" hangingPunct="1">
+        <a:lnSpc>
+          <a:spcPct val="90000"/>
+        </a:lnSpc>
+        <a:spcBef>
+          <a:spcPts val="500"/>
+        </a:spcBef>
+        <a:buFont typeface="Arial" panose="020B0604020202020204" pitchFamily="34" charset="0"/>
+        <a:buChar char="•"/>
+        <a:defRPr sz="1800" kern="1200">
+          <a:solidFill>
+            <a:schemeClr val="tx1"/>
+          </a:solidFill>
+          <a:latin typeface="+mn-lt"/>
+          <a:ea typeface="+mn-ea"/>
+          <a:cs typeface="+mn-cs"/>
+        </a:defRPr>
+      </a:lvl8pPr>
+      <a:lvl9pPr marL="3886200" indent="-228600" algn="l" defTabSz="914400" rtl="0" eaLnBrk="1" latinLnBrk="0" hangingPunct="1">
+        <a:lnSpc>
+          <a:spcPct val="90000"/>
+        </a:lnSpc>
+        <a:spcBef>
+          <a:spcPts val="500"/>
+        </a:spcBef>
+        <a:buFont typeface="Arial" panose="020B0604020202020204" pitchFamily="34" charset="0"/>
+        <a:buChar char="•"/>
+        <a:defRPr sz="1800" kern="1200">
+          <a:solidFill>
+            <a:schemeClr val="tx1"/>
+          </a:solidFill>
+          <a:latin typeface="+mn-lt"/>
+          <a:ea typeface="+mn-ea"/>
+          <a:cs typeface="+mn-cs"/>
+        </a:defRPr>
+      </a:lvl9pPr>
+    </p:bodyStyle>
+    <p:otherStyle>
+      <a:defPPr>
+        <a:defRPr lang="en-US"/>
+      </a:defPPr>
+      <a:lvl1pPr marL="0" algn="l" defTabSz="914400" rtl="0" eaLnBrk="1" latinLnBrk="0" hangingPunct="1">
+        <a:defRPr sz="1800" kern="1200">
+          <a:solidFill>
+            <a:schemeClr val="tx1"/>
+          </a:solidFill>
+          <a:latin typeface="+mn-lt"/>
+          <a:ea typeface="+mn-ea"/>
+          <a:cs typeface="+mn-cs"/>
+        </a:defRPr>
+      </a:lvl1pPr>
+      <a:lvl2pPr marL="457200" algn="l" defTabSz="914400" rtl="0" eaLnBrk="1" latinLnBrk="0" hangingPunct="1">
+        <a:defRPr sz="1800" kern="1200">
+          <a:solidFill>
+            <a:schemeClr val="tx1"/>
+          </a:solidFill>
+          <a:latin typeface="+mn-lt"/>
+          <a:ea typeface="+mn-ea"/>
+          <a:cs typeface="+mn-cs"/>
+        </a:defRPr>
+      </a:lvl2pPr>
+      <a:lvl3pPr marL="914400" algn="l" defTabSz="914400" rtl="0" eaLnBrk="1" latinLnBrk="0" hangingPunct="1">
+        <a:defRPr sz="1800" kern="1200">
+          <a:solidFill>
+            <a:schemeClr val="tx1"/>
+          </a:solidFill>
+          <a:latin typeface="+mn-lt"/>
+          <a:ea typeface="+mn-ea"/>
+          <a:cs typeface="+mn-cs"/>
+        </a:defRPr>
+      </a:lvl3pPr>
+      <a:lvl4pPr marL="1371600" algn="l" defTabSz="914400" rtl="0" eaLnBrk="1" latinLnBrk="0" hangingPunct="1">
+        <a:defRPr sz="1800" kern="1200">
+          <a:solidFill>
+            <a:schemeClr val="tx1"/>
+          </a:solidFill>
+          <a:latin typeface="+mn-lt"/>
+          <a:ea typeface="+mn-ea"/>
+          <a:cs typeface="+mn-cs"/>
+        </a:defRPr>
+      </a:lvl4pPr>
+      <a:lvl5pPr marL="1828800" algn="l" defTabSz="914400" rtl="0" eaLnBrk="1" latinLnBrk="0" hangingPunct="1">
+        <a:defRPr sz="1800" kern="1200">
+          <a:solidFill>
+            <a:schemeClr val="tx1"/>
+          </a:solidFill>
+          <a:latin typeface="+mn-lt"/>
+          <a:ea typeface="+mn-ea"/>
+          <a:cs typeface="+mn-cs"/>
+        </a:defRPr>
+      </a:lvl5pPr>
+      <a:lvl6pPr marL="2286000" algn="l" defTabSz="914400" rtl="0" eaLnBrk="1" latinLnBrk="0" hangingPunct="1">
+        <a:defRPr sz="1800" kern="1200">
+          <a:solidFill>
+            <a:schemeClr val="tx1"/>
+          </a:solidFill>
+          <a:latin typeface="+mn-lt"/>
+          <a:ea typeface="+mn-ea"/>
+          <a:cs typeface="+mn-cs"/>
+        </a:defRPr>
+      </a:lvl6pPr>
+      <a:lvl7pPr marL="2743200" algn="l" defTabSz="914400" rtl="0" eaLnBrk="1" latinLnBrk="0" hangingPunct="1">
+        <a:defRPr sz="1800" kern="1200">
+          <a:solidFill>
+            <a:schemeClr val="tx1"/>
+          </a:solidFill>
+          <a:latin typeface="+mn-lt"/>
+          <a:ea typeface="+mn-ea"/>
+          <a:cs typeface="+mn-cs"/>
+        </a:defRPr>
+      </a:lvl7pPr>
+      <a:lvl8pPr marL="3200400" algn="l" defTabSz="914400" rtl="0" eaLnBrk="1" latinLnBrk="0" hangingPunct="1">
+        <a:defRPr sz="1800" kern="1200">
+          <a:solidFill>
+            <a:schemeClr val="tx1"/>
+          </a:solidFill>
+          <a:latin typeface="+mn-lt"/>
+          <a:ea typeface="+mn-ea"/>
+          <a:cs typeface="+mn-cs"/>
+        </a:defRPr>
+      </a:lvl8pPr>
+      <a:lvl9pPr marL="3657600" algn="l" defTabSz="914400" rtl="0" eaLnBrk="1" latinLnBrk="0" hangingPunct="1">
+        <a:defRPr sz="1800" kern="1200">
+          <a:solidFill>
+            <a:schemeClr val="tx1"/>
+          </a:solidFill>
+          <a:latin typeface="+mn-lt"/>
+          <a:ea typeface="+mn-ea"/>
+          <a:cs typeface="+mn-cs"/>
+        </a:defRPr>
+      </a:lvl9pPr>
+    </p:otherStyle>
+  </p:txStyles>
+</p:sldMaster>
+</file>
+
 <file path=ppt/slides/slide1.xml><?xml version="1.0" encoding="utf-8"?>
 <p:sld xmlns:a="http://schemas.openxmlformats.org/drawingml/2006/main" xmlns:r="http://schemas.openxmlformats.org/officeDocument/2006/relationships" xmlns:p="http://schemas.openxmlformats.org/presentationml/2006/main">
   <p:cSld>
@@ -6574,6 +9778,4186 @@
     <p:extLst>
       <p:ext uri="{BB962C8B-B14F-4D97-AF65-F5344CB8AC3E}">
         <p14:creationId xmlns:p14="http://schemas.microsoft.com/office/powerpoint/2010/main" val="2448952276"/>
+      </p:ext>
+    </p:extLst>
+  </p:cSld>
+  <p:clrMapOvr>
+    <a:masterClrMapping/>
+  </p:clrMapOvr>
+</p:sld>
+</file>
+
+<file path=ppt/slides/slide2.xml><?xml version="1.0" encoding="utf-8"?>
+<p:sld xmlns:a="http://schemas.openxmlformats.org/drawingml/2006/main" xmlns:r="http://schemas.openxmlformats.org/officeDocument/2006/relationships" xmlns:p="http://schemas.openxmlformats.org/presentationml/2006/main">
+  <p:cSld>
+    <p:spTree>
+      <p:nvGrpSpPr>
+        <p:cNvPr id="1" name=""/>
+        <p:cNvGrpSpPr/>
+        <p:nvPr/>
+      </p:nvGrpSpPr>
+      <p:grpSpPr>
+        <a:xfrm>
+          <a:off x="0" y="0"/>
+          <a:ext cx="0" cy="0"/>
+          <a:chOff x="0" y="0"/>
+          <a:chExt cx="0" cy="0"/>
+        </a:xfrm>
+      </p:grpSpPr>
+      <p:sp>
+        <p:nvSpPr>
+          <p:cNvPr id="48" name="Rectangle 47">
+            <a:extLst>
+              <a:ext uri="{FF2B5EF4-FFF2-40B4-BE49-F238E27FC236}">
+                <a16:creationId xmlns:a16="http://schemas.microsoft.com/office/drawing/2014/main" id="{ABABBF4B-EBA8-6A58-D01E-8DCB949F49F0}"/>
+              </a:ext>
+            </a:extLst>
+          </p:cNvPr>
+          <p:cNvSpPr/>
+          <p:nvPr/>
+        </p:nvSpPr>
+        <p:spPr>
+          <a:xfrm>
+            <a:off x="6675120" y="1706879"/>
+            <a:ext cx="2614445" cy="3474721"/>
+          </a:xfrm>
+          <a:prstGeom prst="rect">
+            <a:avLst/>
+          </a:prstGeom>
+          <a:solidFill>
+            <a:schemeClr val="bg1"/>
+          </a:solidFill>
+          <a:ln>
+            <a:solidFill>
+              <a:schemeClr val="bg1">
+                <a:lumMod val="85000"/>
+              </a:schemeClr>
+            </a:solidFill>
+          </a:ln>
+        </p:spPr>
+        <p:style>
+          <a:lnRef idx="2">
+            <a:schemeClr val="accent1">
+              <a:shade val="15000"/>
+            </a:schemeClr>
+          </a:lnRef>
+          <a:fillRef idx="1">
+            <a:schemeClr val="accent1"/>
+          </a:fillRef>
+          <a:effectRef idx="0">
+            <a:schemeClr val="accent1"/>
+          </a:effectRef>
+          <a:fontRef idx="minor">
+            <a:schemeClr val="lt1"/>
+          </a:fontRef>
+        </p:style>
+        <p:txBody>
+          <a:bodyPr rtlCol="0" anchor="ctr"/>
+          <a:lstStyle/>
+          <a:p>
+            <a:pPr marL="0" marR="0" lvl="0" indent="0" algn="ctr" defTabSz="914400" rtl="0" eaLnBrk="1" fontAlgn="auto" latinLnBrk="0" hangingPunct="1">
+              <a:lnSpc>
+                <a:spcPct val="100000"/>
+              </a:lnSpc>
+              <a:spcBef>
+                <a:spcPts val="0"/>
+              </a:spcBef>
+              <a:spcAft>
+                <a:spcPts val="0"/>
+              </a:spcAft>
+              <a:buClrTx/>
+              <a:buSzTx/>
+              <a:buFontTx/>
+              <a:buNone/>
+              <a:tabLst/>
+              <a:defRPr/>
+            </a:pPr>
+            <a:endParaRPr kumimoji="0" lang="en-US" sz="1800" b="0" i="0" u="none" strike="noStrike" kern="1200" cap="none" spc="0" normalizeH="0" baseline="0" noProof="0">
+              <a:ln>
+                <a:noFill/>
+              </a:ln>
+              <a:solidFill>
+                <a:prstClr val="white"/>
+              </a:solidFill>
+              <a:effectLst/>
+              <a:uLnTx/>
+              <a:uFillTx/>
+              <a:latin typeface="Aptos" panose="02110004020202020204"/>
+              <a:ea typeface="+mn-ea"/>
+              <a:cs typeface="+mn-cs"/>
+            </a:endParaRPr>
+          </a:p>
+        </p:txBody>
+      </p:sp>
+      <p:cxnSp>
+        <p:nvCxnSpPr>
+          <p:cNvPr id="27" name="Straight Arrow Connector 26">
+            <a:extLst>
+              <a:ext uri="{FF2B5EF4-FFF2-40B4-BE49-F238E27FC236}">
+                <a16:creationId xmlns:a16="http://schemas.microsoft.com/office/drawing/2014/main" id="{79C8ECAC-184D-7DA7-3EB9-DA6343E85725}"/>
+              </a:ext>
+            </a:extLst>
+          </p:cNvPr>
+          <p:cNvCxnSpPr>
+            <a:cxnSpLocks/>
+          </p:cNvCxnSpPr>
+          <p:nvPr/>
+        </p:nvCxnSpPr>
+        <p:spPr>
+          <a:xfrm flipV="1">
+            <a:off x="2897616" y="2634103"/>
+            <a:ext cx="4342257" cy="582841"/>
+          </a:xfrm>
+          <a:prstGeom prst="straightConnector1">
+            <a:avLst/>
+          </a:prstGeom>
+          <a:ln w="76200">
+            <a:solidFill>
+              <a:schemeClr val="accent5">
+                <a:lumMod val="20000"/>
+                <a:lumOff val="80000"/>
+              </a:schemeClr>
+            </a:solidFill>
+            <a:tailEnd type="triangle"/>
+          </a:ln>
+        </p:spPr>
+        <p:style>
+          <a:lnRef idx="2">
+            <a:schemeClr val="accent1"/>
+          </a:lnRef>
+          <a:fillRef idx="0">
+            <a:schemeClr val="accent1"/>
+          </a:fillRef>
+          <a:effectRef idx="1">
+            <a:schemeClr val="accent1"/>
+          </a:effectRef>
+          <a:fontRef idx="minor">
+            <a:schemeClr val="tx1"/>
+          </a:fontRef>
+        </p:style>
+      </p:cxnSp>
+      <p:cxnSp>
+        <p:nvCxnSpPr>
+          <p:cNvPr id="21" name="Straight Arrow Connector 20">
+            <a:extLst>
+              <a:ext uri="{FF2B5EF4-FFF2-40B4-BE49-F238E27FC236}">
+                <a16:creationId xmlns:a16="http://schemas.microsoft.com/office/drawing/2014/main" id="{BBD2496A-C05F-ADA7-6704-42BC4B551847}"/>
+              </a:ext>
+            </a:extLst>
+          </p:cNvPr>
+          <p:cNvCxnSpPr>
+            <a:cxnSpLocks/>
+          </p:cNvCxnSpPr>
+          <p:nvPr/>
+        </p:nvCxnSpPr>
+        <p:spPr>
+          <a:xfrm>
+            <a:off x="2897616" y="1428750"/>
+            <a:ext cx="4342258" cy="1015148"/>
+          </a:xfrm>
+          <a:prstGeom prst="straightConnector1">
+            <a:avLst/>
+          </a:prstGeom>
+          <a:ln w="76200">
+            <a:solidFill>
+              <a:schemeClr val="tx2">
+                <a:lumMod val="25000"/>
+                <a:lumOff val="75000"/>
+              </a:schemeClr>
+            </a:solidFill>
+            <a:tailEnd type="triangle"/>
+          </a:ln>
+        </p:spPr>
+        <p:style>
+          <a:lnRef idx="2">
+            <a:schemeClr val="accent1"/>
+          </a:lnRef>
+          <a:fillRef idx="0">
+            <a:schemeClr val="accent1"/>
+          </a:fillRef>
+          <a:effectRef idx="1">
+            <a:schemeClr val="accent1"/>
+          </a:effectRef>
+          <a:fontRef idx="minor">
+            <a:schemeClr val="tx1"/>
+          </a:fontRef>
+        </p:style>
+      </p:cxnSp>
+      <p:sp>
+        <p:nvSpPr>
+          <p:cNvPr id="4" name="Rectangle 3">
+            <a:extLst>
+              <a:ext uri="{FF2B5EF4-FFF2-40B4-BE49-F238E27FC236}">
+                <a16:creationId xmlns:a16="http://schemas.microsoft.com/office/drawing/2014/main" id="{F551DEC1-2598-8711-B06C-6228D61D7D02}"/>
+              </a:ext>
+            </a:extLst>
+          </p:cNvPr>
+          <p:cNvSpPr/>
+          <p:nvPr/>
+        </p:nvSpPr>
+        <p:spPr>
+          <a:xfrm>
+            <a:off x="231960" y="606462"/>
+            <a:ext cx="2763371" cy="2014818"/>
+          </a:xfrm>
+          <a:prstGeom prst="rect">
+            <a:avLst/>
+          </a:prstGeom>
+          <a:solidFill>
+            <a:schemeClr val="tx2">
+              <a:lumMod val="25000"/>
+              <a:lumOff val="75000"/>
+            </a:schemeClr>
+          </a:solidFill>
+          <a:ln>
+            <a:noFill/>
+          </a:ln>
+        </p:spPr>
+        <p:style>
+          <a:lnRef idx="2">
+            <a:schemeClr val="accent1">
+              <a:shade val="15000"/>
+            </a:schemeClr>
+          </a:lnRef>
+          <a:fillRef idx="1">
+            <a:schemeClr val="accent1"/>
+          </a:fillRef>
+          <a:effectRef idx="0">
+            <a:schemeClr val="accent1"/>
+          </a:effectRef>
+          <a:fontRef idx="minor">
+            <a:schemeClr val="lt1"/>
+          </a:fontRef>
+        </p:style>
+        <p:txBody>
+          <a:bodyPr rtlCol="0" anchor="ctr"/>
+          <a:lstStyle/>
+          <a:p>
+            <a:pPr marL="0" marR="0" lvl="0" indent="0" algn="ctr" defTabSz="914400" rtl="0" eaLnBrk="1" fontAlgn="auto" latinLnBrk="0" hangingPunct="1">
+              <a:lnSpc>
+                <a:spcPct val="100000"/>
+              </a:lnSpc>
+              <a:spcBef>
+                <a:spcPts val="0"/>
+              </a:spcBef>
+              <a:spcAft>
+                <a:spcPts val="0"/>
+              </a:spcAft>
+              <a:buClrTx/>
+              <a:buSzTx/>
+              <a:buFontTx/>
+              <a:buNone/>
+              <a:tabLst/>
+              <a:defRPr/>
+            </a:pPr>
+            <a:endParaRPr kumimoji="0" lang="en-US" sz="1800" b="0" i="0" u="none" strike="noStrike" kern="1200" cap="none" spc="0" normalizeH="0" baseline="0" noProof="0">
+              <a:ln>
+                <a:noFill/>
+              </a:ln>
+              <a:solidFill>
+                <a:prstClr val="white"/>
+              </a:solidFill>
+              <a:effectLst/>
+              <a:uLnTx/>
+              <a:uFillTx/>
+              <a:latin typeface="Aptos" panose="02110004020202020204"/>
+              <a:ea typeface="+mn-ea"/>
+              <a:cs typeface="+mn-cs"/>
+            </a:endParaRPr>
+          </a:p>
+        </p:txBody>
+      </p:sp>
+      <p:sp>
+        <p:nvSpPr>
+          <p:cNvPr id="5" name="Rectangle 4">
+            <a:extLst>
+              <a:ext uri="{FF2B5EF4-FFF2-40B4-BE49-F238E27FC236}">
+                <a16:creationId xmlns:a16="http://schemas.microsoft.com/office/drawing/2014/main" id="{9745AD1E-96CF-B75E-DDD9-97A531C3C420}"/>
+              </a:ext>
+            </a:extLst>
+          </p:cNvPr>
+          <p:cNvSpPr/>
+          <p:nvPr/>
+        </p:nvSpPr>
+        <p:spPr>
+          <a:xfrm>
+            <a:off x="231960" y="3166475"/>
+            <a:ext cx="2763371" cy="3097165"/>
+          </a:xfrm>
+          <a:prstGeom prst="rect">
+            <a:avLst/>
+          </a:prstGeom>
+          <a:solidFill>
+            <a:schemeClr val="accent5">
+              <a:lumMod val="20000"/>
+              <a:lumOff val="80000"/>
+            </a:schemeClr>
+          </a:solidFill>
+          <a:ln>
+            <a:noFill/>
+          </a:ln>
+        </p:spPr>
+        <p:style>
+          <a:lnRef idx="2">
+            <a:schemeClr val="accent1">
+              <a:shade val="15000"/>
+            </a:schemeClr>
+          </a:lnRef>
+          <a:fillRef idx="1">
+            <a:schemeClr val="accent1"/>
+          </a:fillRef>
+          <a:effectRef idx="0">
+            <a:schemeClr val="accent1"/>
+          </a:effectRef>
+          <a:fontRef idx="minor">
+            <a:schemeClr val="lt1"/>
+          </a:fontRef>
+        </p:style>
+        <p:txBody>
+          <a:bodyPr rtlCol="0" anchor="ctr"/>
+          <a:lstStyle/>
+          <a:p>
+            <a:pPr marL="0" marR="0" lvl="0" indent="0" algn="ctr" defTabSz="914400" rtl="0" eaLnBrk="1" fontAlgn="auto" latinLnBrk="0" hangingPunct="1">
+              <a:lnSpc>
+                <a:spcPct val="100000"/>
+              </a:lnSpc>
+              <a:spcBef>
+                <a:spcPts val="0"/>
+              </a:spcBef>
+              <a:spcAft>
+                <a:spcPts val="0"/>
+              </a:spcAft>
+              <a:buClrTx/>
+              <a:buSzTx/>
+              <a:buFontTx/>
+              <a:buNone/>
+              <a:tabLst/>
+              <a:defRPr/>
+            </a:pPr>
+            <a:endParaRPr kumimoji="0" lang="en-US" sz="1800" b="0" i="0" u="none" strike="noStrike" kern="1200" cap="none" spc="0" normalizeH="0" baseline="0" noProof="0">
+              <a:ln>
+                <a:noFill/>
+              </a:ln>
+              <a:solidFill>
+                <a:prstClr val="white"/>
+              </a:solidFill>
+              <a:effectLst/>
+              <a:uLnTx/>
+              <a:uFillTx/>
+              <a:latin typeface="Aptos" panose="02110004020202020204"/>
+              <a:ea typeface="+mn-ea"/>
+              <a:cs typeface="+mn-cs"/>
+            </a:endParaRPr>
+          </a:p>
+        </p:txBody>
+      </p:sp>
+      <p:sp>
+        <p:nvSpPr>
+          <p:cNvPr id="6" name="Rectangle 5">
+            <a:extLst>
+              <a:ext uri="{FF2B5EF4-FFF2-40B4-BE49-F238E27FC236}">
+                <a16:creationId xmlns:a16="http://schemas.microsoft.com/office/drawing/2014/main" id="{D4CA2A9C-D37E-F17D-0104-4112819444EE}"/>
+              </a:ext>
+            </a:extLst>
+          </p:cNvPr>
+          <p:cNvSpPr/>
+          <p:nvPr/>
+        </p:nvSpPr>
+        <p:spPr>
+          <a:xfrm>
+            <a:off x="3156695" y="915746"/>
+            <a:ext cx="2763371" cy="2014818"/>
+          </a:xfrm>
+          <a:prstGeom prst="rect">
+            <a:avLst/>
+          </a:prstGeom>
+          <a:solidFill>
+            <a:schemeClr val="tx2">
+              <a:lumMod val="50000"/>
+              <a:lumOff val="50000"/>
+            </a:schemeClr>
+          </a:solidFill>
+          <a:ln>
+            <a:solidFill>
+              <a:schemeClr val="tx2">
+                <a:lumMod val="50000"/>
+                <a:lumOff val="50000"/>
+              </a:schemeClr>
+            </a:solidFill>
+          </a:ln>
+        </p:spPr>
+        <p:style>
+          <a:lnRef idx="2">
+            <a:schemeClr val="accent1">
+              <a:shade val="15000"/>
+            </a:schemeClr>
+          </a:lnRef>
+          <a:fillRef idx="1">
+            <a:schemeClr val="accent1"/>
+          </a:fillRef>
+          <a:effectRef idx="0">
+            <a:schemeClr val="accent1"/>
+          </a:effectRef>
+          <a:fontRef idx="minor">
+            <a:schemeClr val="lt1"/>
+          </a:fontRef>
+        </p:style>
+        <p:txBody>
+          <a:bodyPr rtlCol="0" anchor="ctr"/>
+          <a:lstStyle/>
+          <a:p>
+            <a:pPr marL="0" marR="0" lvl="0" indent="0" algn="ctr" defTabSz="914400" rtl="0" eaLnBrk="1" fontAlgn="auto" latinLnBrk="0" hangingPunct="1">
+              <a:lnSpc>
+                <a:spcPct val="100000"/>
+              </a:lnSpc>
+              <a:spcBef>
+                <a:spcPts val="0"/>
+              </a:spcBef>
+              <a:spcAft>
+                <a:spcPts val="0"/>
+              </a:spcAft>
+              <a:buClrTx/>
+              <a:buSzTx/>
+              <a:buFontTx/>
+              <a:buNone/>
+              <a:tabLst/>
+              <a:defRPr/>
+            </a:pPr>
+            <a:endParaRPr kumimoji="0" lang="en-US" sz="1800" b="0" i="0" u="none" strike="noStrike" kern="1200" cap="none" spc="0" normalizeH="0" baseline="0" noProof="0">
+              <a:ln>
+                <a:noFill/>
+              </a:ln>
+              <a:solidFill>
+                <a:prstClr val="white"/>
+              </a:solidFill>
+              <a:effectLst/>
+              <a:uLnTx/>
+              <a:uFillTx/>
+              <a:latin typeface="Aptos" panose="02110004020202020204"/>
+              <a:ea typeface="+mn-ea"/>
+              <a:cs typeface="+mn-cs"/>
+            </a:endParaRPr>
+          </a:p>
+        </p:txBody>
+      </p:sp>
+      <p:sp>
+        <p:nvSpPr>
+          <p:cNvPr id="8" name="TextBox 7">
+            <a:extLst>
+              <a:ext uri="{FF2B5EF4-FFF2-40B4-BE49-F238E27FC236}">
+                <a16:creationId xmlns:a16="http://schemas.microsoft.com/office/drawing/2014/main" id="{C8EC7A9A-2F35-FE79-51AD-4F1E4C68966E}"/>
+              </a:ext>
+            </a:extLst>
+          </p:cNvPr>
+          <p:cNvSpPr txBox="1"/>
+          <p:nvPr/>
+        </p:nvSpPr>
+        <p:spPr>
+          <a:xfrm>
+            <a:off x="653583" y="213367"/>
+            <a:ext cx="1792222" cy="338554"/>
+          </a:xfrm>
+          <a:prstGeom prst="rect">
+            <a:avLst/>
+          </a:prstGeom>
+          <a:noFill/>
+        </p:spPr>
+        <p:txBody>
+          <a:bodyPr wrap="none" rtlCol="0">
+            <a:spAutoFit/>
+          </a:bodyPr>
+          <a:lstStyle/>
+          <a:p>
+            <a:pPr marL="0" marR="0" lvl="0" indent="0" algn="l" defTabSz="914400" rtl="0" eaLnBrk="1" fontAlgn="auto" latinLnBrk="0" hangingPunct="1">
+              <a:lnSpc>
+                <a:spcPct val="100000"/>
+              </a:lnSpc>
+              <a:spcBef>
+                <a:spcPts val="0"/>
+              </a:spcBef>
+              <a:spcAft>
+                <a:spcPts val="0"/>
+              </a:spcAft>
+              <a:buClrTx/>
+              <a:buSzTx/>
+              <a:buFontTx/>
+              <a:buNone/>
+              <a:tabLst/>
+              <a:defRPr/>
+            </a:pPr>
+            <a:r>
+              <a:rPr kumimoji="0" lang="en-US" sz="1600" b="0" i="0" u="none" strike="noStrike" kern="1200" cap="none" spc="0" normalizeH="0" baseline="0" noProof="0" dirty="0">
+                <a:ln>
+                  <a:noFill/>
+                </a:ln>
+                <a:solidFill>
+                  <a:prstClr val="black"/>
+                </a:solidFill>
+                <a:effectLst/>
+                <a:uLnTx/>
+                <a:uFillTx/>
+                <a:latin typeface="Calibri" panose="020F0502020204030204" pitchFamily="34" charset="0"/>
+                <a:ea typeface="Calibri" panose="020F0502020204030204" pitchFamily="34" charset="0"/>
+                <a:cs typeface="Calibri" panose="020F0502020204030204" pitchFamily="34" charset="0"/>
+              </a:rPr>
+              <a:t>HL7v2 PID (Patient)</a:t>
+            </a:r>
+          </a:p>
+        </p:txBody>
+      </p:sp>
+      <p:sp>
+        <p:nvSpPr>
+          <p:cNvPr id="9" name="TextBox 8">
+            <a:extLst>
+              <a:ext uri="{FF2B5EF4-FFF2-40B4-BE49-F238E27FC236}">
+                <a16:creationId xmlns:a16="http://schemas.microsoft.com/office/drawing/2014/main" id="{16ABE336-0FA8-A6F4-91B8-DAA3F9747057}"/>
+              </a:ext>
+            </a:extLst>
+          </p:cNvPr>
+          <p:cNvSpPr txBox="1"/>
+          <p:nvPr/>
+        </p:nvSpPr>
+        <p:spPr>
+          <a:xfrm>
+            <a:off x="3699400" y="546413"/>
+            <a:ext cx="1571264" cy="338554"/>
+          </a:xfrm>
+          <a:prstGeom prst="rect">
+            <a:avLst/>
+          </a:prstGeom>
+          <a:noFill/>
+        </p:spPr>
+        <p:txBody>
+          <a:bodyPr wrap="none" rtlCol="0">
+            <a:spAutoFit/>
+          </a:bodyPr>
+          <a:lstStyle/>
+          <a:p>
+            <a:pPr marL="0" marR="0" lvl="0" indent="0" algn="l" defTabSz="914400" rtl="0" eaLnBrk="1" fontAlgn="auto" latinLnBrk="0" hangingPunct="1">
+              <a:lnSpc>
+                <a:spcPct val="100000"/>
+              </a:lnSpc>
+              <a:spcBef>
+                <a:spcPts val="0"/>
+              </a:spcBef>
+              <a:spcAft>
+                <a:spcPts val="0"/>
+              </a:spcAft>
+              <a:buClrTx/>
+              <a:buSzTx/>
+              <a:buFontTx/>
+              <a:buNone/>
+              <a:tabLst/>
+              <a:defRPr/>
+            </a:pPr>
+            <a:r>
+              <a:rPr kumimoji="0" lang="en-US" sz="1600" b="0" i="0" u="none" strike="noStrike" kern="1200" cap="none" spc="0" normalizeH="0" baseline="0" noProof="0" dirty="0">
+                <a:ln>
+                  <a:noFill/>
+                </a:ln>
+                <a:solidFill>
+                  <a:prstClr val="black"/>
+                </a:solidFill>
+                <a:effectLst/>
+                <a:uLnTx/>
+                <a:uFillTx/>
+                <a:latin typeface="Calibri" panose="020F0502020204030204" pitchFamily="34" charset="0"/>
+                <a:ea typeface="Calibri" panose="020F0502020204030204" pitchFamily="34" charset="0"/>
+                <a:cs typeface="Calibri" panose="020F0502020204030204" pitchFamily="34" charset="0"/>
+              </a:rPr>
+              <a:t>HL7v2 OBR (Lab)</a:t>
+            </a:r>
+          </a:p>
+        </p:txBody>
+      </p:sp>
+      <p:sp>
+        <p:nvSpPr>
+          <p:cNvPr id="10" name="TextBox 9">
+            <a:extLst>
+              <a:ext uri="{FF2B5EF4-FFF2-40B4-BE49-F238E27FC236}">
+                <a16:creationId xmlns:a16="http://schemas.microsoft.com/office/drawing/2014/main" id="{D91F768C-3231-C424-F8E9-4B9BFF6CDEEC}"/>
+              </a:ext>
+            </a:extLst>
+          </p:cNvPr>
+          <p:cNvSpPr txBox="1"/>
+          <p:nvPr/>
+        </p:nvSpPr>
+        <p:spPr>
+          <a:xfrm>
+            <a:off x="314356" y="2800737"/>
+            <a:ext cx="2385140" cy="338554"/>
+          </a:xfrm>
+          <a:prstGeom prst="rect">
+            <a:avLst/>
+          </a:prstGeom>
+          <a:noFill/>
+        </p:spPr>
+        <p:txBody>
+          <a:bodyPr wrap="none" rtlCol="0">
+            <a:spAutoFit/>
+          </a:bodyPr>
+          <a:lstStyle/>
+          <a:p>
+            <a:pPr marL="0" marR="0" lvl="0" indent="0" algn="l" defTabSz="914400" rtl="0" eaLnBrk="1" fontAlgn="auto" latinLnBrk="0" hangingPunct="1">
+              <a:lnSpc>
+                <a:spcPct val="100000"/>
+              </a:lnSpc>
+              <a:spcBef>
+                <a:spcPts val="0"/>
+              </a:spcBef>
+              <a:spcAft>
+                <a:spcPts val="0"/>
+              </a:spcAft>
+              <a:buClrTx/>
+              <a:buSzTx/>
+              <a:buFontTx/>
+              <a:buNone/>
+              <a:tabLst/>
+              <a:defRPr/>
+            </a:pPr>
+            <a:r>
+              <a:rPr kumimoji="0" lang="en-US" sz="1600" b="0" i="0" u="none" strike="noStrike" kern="1200" cap="none" spc="0" normalizeH="0" baseline="0" noProof="0" dirty="0">
+                <a:ln>
+                  <a:noFill/>
+                </a:ln>
+                <a:solidFill>
+                  <a:prstClr val="black"/>
+                </a:solidFill>
+                <a:effectLst/>
+                <a:uLnTx/>
+                <a:uFillTx/>
+                <a:latin typeface="Calibri" panose="020F0502020204030204" pitchFamily="34" charset="0"/>
+                <a:ea typeface="Calibri" panose="020F0502020204030204" pitchFamily="34" charset="0"/>
+                <a:cs typeface="Calibri" panose="020F0502020204030204" pitchFamily="34" charset="0"/>
+              </a:rPr>
+              <a:t>HL7 FHIR Patient Resource</a:t>
+            </a:r>
+          </a:p>
+        </p:txBody>
+      </p:sp>
+      <p:sp>
+        <p:nvSpPr>
+          <p:cNvPr id="12" name="Rectangle 11">
+            <a:extLst>
+              <a:ext uri="{FF2B5EF4-FFF2-40B4-BE49-F238E27FC236}">
+                <a16:creationId xmlns:a16="http://schemas.microsoft.com/office/drawing/2014/main" id="{91EF27BA-D4A8-8F55-9CDE-97CF299604EC}"/>
+              </a:ext>
+            </a:extLst>
+          </p:cNvPr>
+          <p:cNvSpPr/>
+          <p:nvPr/>
+        </p:nvSpPr>
+        <p:spPr>
+          <a:xfrm>
+            <a:off x="314356" y="715691"/>
+            <a:ext cx="2533619" cy="1786528"/>
+          </a:xfrm>
+          <a:prstGeom prst="rect">
+            <a:avLst/>
+          </a:prstGeom>
+          <a:solidFill>
+            <a:schemeClr val="bg1"/>
+          </a:solidFill>
+          <a:ln>
+            <a:noFill/>
+          </a:ln>
+        </p:spPr>
+        <p:style>
+          <a:lnRef idx="2">
+            <a:schemeClr val="accent1">
+              <a:shade val="15000"/>
+            </a:schemeClr>
+          </a:lnRef>
+          <a:fillRef idx="1">
+            <a:schemeClr val="accent1"/>
+          </a:fillRef>
+          <a:effectRef idx="0">
+            <a:schemeClr val="accent1"/>
+          </a:effectRef>
+          <a:fontRef idx="minor">
+            <a:schemeClr val="lt1"/>
+          </a:fontRef>
+        </p:style>
+        <p:txBody>
+          <a:bodyPr rtlCol="0" anchor="ctr"/>
+          <a:lstStyle/>
+          <a:p>
+            <a:pPr marL="57150" marR="0" lvl="0" indent="-57150" algn="l" defTabSz="914400" rtl="0" eaLnBrk="1" fontAlgn="t" latinLnBrk="0" hangingPunct="1">
+              <a:lnSpc>
+                <a:spcPct val="100000"/>
+              </a:lnSpc>
+              <a:spcBef>
+                <a:spcPts val="0"/>
+              </a:spcBef>
+              <a:spcAft>
+                <a:spcPts val="0"/>
+              </a:spcAft>
+              <a:buClrTx/>
+              <a:buSzTx/>
+              <a:buFontTx/>
+              <a:buNone/>
+              <a:tabLst/>
+              <a:defRPr/>
+            </a:pPr>
+            <a:r>
+              <a:rPr kumimoji="0" lang="en-US" sz="500" b="1" i="0" u="none" strike="noStrike" kern="1200" cap="none" spc="0" normalizeH="0" baseline="0" noProof="0" dirty="0">
+                <a:ln>
+                  <a:noFill/>
+                </a:ln>
+                <a:solidFill>
+                  <a:prstClr val="black">
+                    <a:lumMod val="50000"/>
+                    <a:lumOff val="50000"/>
+                  </a:prstClr>
+                </a:solidFill>
+                <a:effectLst/>
+                <a:uLnTx/>
+                <a:uFillTx/>
+                <a:latin typeface="Consolas" panose="020B0609020204030204" pitchFamily="49" charset="0"/>
+                <a:ea typeface="+mn-ea"/>
+                <a:cs typeface="+mn-cs"/>
+              </a:rPr>
+              <a:t>MSH</a:t>
+            </a:r>
+            <a:r>
+              <a:rPr kumimoji="0" lang="en-US" sz="500" b="0" i="0" u="none" strike="noStrike" kern="1200" cap="none" spc="0" normalizeH="0" baseline="0" noProof="0" dirty="0">
+                <a:ln>
+                  <a:noFill/>
+                </a:ln>
+                <a:solidFill>
+                  <a:prstClr val="black">
+                    <a:lumMod val="50000"/>
+                    <a:lumOff val="50000"/>
+                  </a:prstClr>
+                </a:solidFill>
+                <a:effectLst/>
+                <a:uLnTx/>
+                <a:uFillTx/>
+                <a:latin typeface="Consolas" panose="020B0609020204030204" pitchFamily="49" charset="0"/>
+                <a:ea typeface="+mn-ea"/>
+                <a:cs typeface="+mn-cs"/>
+              </a:rPr>
+              <a:t>|^~\&amp;|EPIC|GENERAL_HOSPITAL|HIE|STATE_HIE|20260722212530||ADT^A01|202607220001|P|2.5.1</a:t>
+            </a:r>
+          </a:p>
+          <a:p>
+            <a:pPr marL="57150" marR="0" lvl="0" indent="-57150" algn="l" defTabSz="914400" rtl="0" eaLnBrk="1" fontAlgn="t" latinLnBrk="0" hangingPunct="1">
+              <a:lnSpc>
+                <a:spcPct val="100000"/>
+              </a:lnSpc>
+              <a:spcBef>
+                <a:spcPts val="0"/>
+              </a:spcBef>
+              <a:spcAft>
+                <a:spcPts val="0"/>
+              </a:spcAft>
+              <a:buClrTx/>
+              <a:buSzTx/>
+              <a:buFontTx/>
+              <a:buNone/>
+              <a:tabLst/>
+              <a:defRPr/>
+            </a:pPr>
+            <a:r>
+              <a:rPr kumimoji="0" lang="en-US" sz="500" b="1" i="0" u="none" strike="noStrike" kern="1200" cap="none" spc="0" normalizeH="0" baseline="0" noProof="0" dirty="0">
+                <a:ln>
+                  <a:noFill/>
+                </a:ln>
+                <a:solidFill>
+                  <a:prstClr val="black">
+                    <a:lumMod val="50000"/>
+                    <a:lumOff val="50000"/>
+                  </a:prstClr>
+                </a:solidFill>
+                <a:effectLst/>
+                <a:uLnTx/>
+                <a:uFillTx/>
+                <a:latin typeface="Consolas" panose="020B0609020204030204" pitchFamily="49" charset="0"/>
+                <a:ea typeface="+mn-ea"/>
+                <a:cs typeface="+mn-cs"/>
+              </a:rPr>
+              <a:t>EVN</a:t>
+            </a:r>
+            <a:r>
+              <a:rPr kumimoji="0" lang="en-US" sz="500" b="0" i="0" u="none" strike="noStrike" kern="1200" cap="none" spc="0" normalizeH="0" baseline="0" noProof="0" dirty="0">
+                <a:ln>
+                  <a:noFill/>
+                </a:ln>
+                <a:solidFill>
+                  <a:prstClr val="black">
+                    <a:lumMod val="50000"/>
+                    <a:lumOff val="50000"/>
+                  </a:prstClr>
+                </a:solidFill>
+                <a:effectLst/>
+                <a:uLnTx/>
+                <a:uFillTx/>
+                <a:latin typeface="Consolas" panose="020B0609020204030204" pitchFamily="49" charset="0"/>
+                <a:ea typeface="+mn-ea"/>
+                <a:cs typeface="+mn-cs"/>
+              </a:rPr>
+              <a:t>|A01|20260722212530|||JSMITH^JOHN</a:t>
+            </a:r>
+          </a:p>
+          <a:p>
+            <a:pPr marL="57150" marR="0" lvl="0" indent="-57150" algn="l" defTabSz="914400" rtl="0" eaLnBrk="1" fontAlgn="t" latinLnBrk="0" hangingPunct="1">
+              <a:lnSpc>
+                <a:spcPct val="100000"/>
+              </a:lnSpc>
+              <a:spcBef>
+                <a:spcPts val="0"/>
+              </a:spcBef>
+              <a:spcAft>
+                <a:spcPts val="0"/>
+              </a:spcAft>
+              <a:buClrTx/>
+              <a:buSzTx/>
+              <a:buFontTx/>
+              <a:buNone/>
+              <a:tabLst/>
+              <a:defRPr/>
+            </a:pPr>
+            <a:r>
+              <a:rPr kumimoji="0" lang="en-US" sz="500" b="1" i="0" u="none" strike="noStrike" kern="1200" cap="none" spc="0" normalizeH="0" baseline="0" noProof="0" dirty="0">
+                <a:ln>
+                  <a:noFill/>
+                </a:ln>
+                <a:solidFill>
+                  <a:prstClr val="black">
+                    <a:lumMod val="50000"/>
+                    <a:lumOff val="50000"/>
+                  </a:prstClr>
+                </a:solidFill>
+                <a:effectLst/>
+                <a:uLnTx/>
+                <a:uFillTx/>
+                <a:latin typeface="Consolas" panose="020B0609020204030204" pitchFamily="49" charset="0"/>
+                <a:ea typeface="+mn-ea"/>
+                <a:cs typeface="+mn-cs"/>
+              </a:rPr>
+              <a:t>PID</a:t>
+            </a:r>
+            <a:r>
+              <a:rPr kumimoji="0" lang="en-US" sz="500" b="0" i="0" u="none" strike="noStrike" kern="1200" cap="none" spc="0" normalizeH="0" baseline="0" noProof="0" dirty="0">
+                <a:ln>
+                  <a:noFill/>
+                </a:ln>
+                <a:solidFill>
+                  <a:prstClr val="black">
+                    <a:lumMod val="50000"/>
+                    <a:lumOff val="50000"/>
+                  </a:prstClr>
+                </a:solidFill>
+                <a:effectLst/>
+                <a:uLnTx/>
+                <a:uFillTx/>
+                <a:latin typeface="Consolas" panose="020B0609020204030204" pitchFamily="49" charset="0"/>
+                <a:ea typeface="+mn-ea"/>
+                <a:cs typeface="+mn-cs"/>
+              </a:rPr>
+              <a:t>|1||12345678^^^GENERAL_HOSPITAL^MR~999887777^^^USSSA^SS||DOE^JOHN^MICHAEL^JR||19800115|M||2106-3|123 MAIN ST^^BOSTON^MA^02108^USA^H~456 OAK AVE^^CAMBRIDGE^MA^02139^USA^P|(617)555-1212^PRN^PH^^1^617^5551212~john.doe@email.com^NET^Internet||ENG|M|CHR|987654321|123456789</a:t>
+            </a:r>
+          </a:p>
+          <a:p>
+            <a:pPr marL="57150" marR="0" lvl="0" indent="-57150" algn="l" defTabSz="914400" rtl="0" eaLnBrk="1" fontAlgn="t" latinLnBrk="0" hangingPunct="1">
+              <a:lnSpc>
+                <a:spcPct val="100000"/>
+              </a:lnSpc>
+              <a:spcBef>
+                <a:spcPts val="0"/>
+              </a:spcBef>
+              <a:spcAft>
+                <a:spcPts val="0"/>
+              </a:spcAft>
+              <a:buClrTx/>
+              <a:buSzTx/>
+              <a:buFontTx/>
+              <a:buNone/>
+              <a:tabLst/>
+              <a:defRPr/>
+            </a:pPr>
+            <a:r>
+              <a:rPr kumimoji="0" lang="en-US" sz="500" b="1" i="0" u="none" strike="noStrike" kern="1200" cap="none" spc="0" normalizeH="0" baseline="0" noProof="0" dirty="0">
+                <a:ln>
+                  <a:noFill/>
+                </a:ln>
+                <a:solidFill>
+                  <a:prstClr val="black">
+                    <a:lumMod val="50000"/>
+                    <a:lumOff val="50000"/>
+                  </a:prstClr>
+                </a:solidFill>
+                <a:effectLst/>
+                <a:uLnTx/>
+                <a:uFillTx/>
+                <a:latin typeface="Consolas" panose="020B0609020204030204" pitchFamily="49" charset="0"/>
+                <a:ea typeface="+mn-ea"/>
+                <a:cs typeface="+mn-cs"/>
+              </a:rPr>
+              <a:t>PD1</a:t>
+            </a:r>
+            <a:r>
+              <a:rPr kumimoji="0" lang="en-US" sz="500" b="0" i="0" u="none" strike="noStrike" kern="1200" cap="none" spc="0" normalizeH="0" baseline="0" noProof="0" dirty="0">
+                <a:ln>
+                  <a:noFill/>
+                </a:ln>
+                <a:solidFill>
+                  <a:prstClr val="black">
+                    <a:lumMod val="50000"/>
+                    <a:lumOff val="50000"/>
+                  </a:prstClr>
+                </a:solidFill>
+                <a:effectLst/>
+                <a:uLnTx/>
+                <a:uFillTx/>
+                <a:latin typeface="Consolas" panose="020B0609020204030204" pitchFamily="49" charset="0"/>
+                <a:ea typeface="+mn-ea"/>
+                <a:cs typeface="+mn-cs"/>
+              </a:rPr>
+              <a:t>|||PRIMARY CARE ASSOCIATES^^^NPI|12345^SMITH^JANE^A^^MD</a:t>
+            </a:r>
+          </a:p>
+          <a:p>
+            <a:pPr marL="57150" marR="0" lvl="0" indent="-57150" algn="l" defTabSz="914400" rtl="0" eaLnBrk="1" fontAlgn="t" latinLnBrk="0" hangingPunct="1">
+              <a:lnSpc>
+                <a:spcPct val="100000"/>
+              </a:lnSpc>
+              <a:spcBef>
+                <a:spcPts val="0"/>
+              </a:spcBef>
+              <a:spcAft>
+                <a:spcPts val="0"/>
+              </a:spcAft>
+              <a:buClrTx/>
+              <a:buSzTx/>
+              <a:buFontTx/>
+              <a:buNone/>
+              <a:tabLst/>
+              <a:defRPr/>
+            </a:pPr>
+            <a:r>
+              <a:rPr kumimoji="0" lang="en-US" sz="500" b="1" i="0" u="none" strike="noStrike" kern="1200" cap="none" spc="0" normalizeH="0" baseline="0" noProof="0" dirty="0">
+                <a:ln>
+                  <a:noFill/>
+                </a:ln>
+                <a:solidFill>
+                  <a:prstClr val="black">
+                    <a:lumMod val="50000"/>
+                    <a:lumOff val="50000"/>
+                  </a:prstClr>
+                </a:solidFill>
+                <a:effectLst/>
+                <a:uLnTx/>
+                <a:uFillTx/>
+                <a:latin typeface="Consolas" panose="020B0609020204030204" pitchFamily="49" charset="0"/>
+                <a:ea typeface="+mn-ea"/>
+                <a:cs typeface="+mn-cs"/>
+              </a:rPr>
+              <a:t>NK1|1</a:t>
+            </a:r>
+            <a:r>
+              <a:rPr kumimoji="0" lang="en-US" sz="500" b="0" i="0" u="none" strike="noStrike" kern="1200" cap="none" spc="0" normalizeH="0" baseline="0" noProof="0" dirty="0">
+                <a:ln>
+                  <a:noFill/>
+                </a:ln>
+                <a:solidFill>
+                  <a:prstClr val="black">
+                    <a:lumMod val="50000"/>
+                    <a:lumOff val="50000"/>
+                  </a:prstClr>
+                </a:solidFill>
+                <a:effectLst/>
+                <a:uLnTx/>
+                <a:uFillTx/>
+                <a:latin typeface="Consolas" panose="020B0609020204030204" pitchFamily="49" charset="0"/>
+                <a:ea typeface="+mn-ea"/>
+                <a:cs typeface="+mn-cs"/>
+              </a:rPr>
+              <a:t>|DOE^JANE|SPO|(617)555-9999^PRN^PH|123 MAIN ST^^BOSTON^MA^02108</a:t>
+            </a:r>
+          </a:p>
+          <a:p>
+            <a:pPr marL="57150" marR="0" lvl="0" indent="-57150" algn="l" defTabSz="914400" rtl="0" eaLnBrk="1" fontAlgn="t" latinLnBrk="0" hangingPunct="1">
+              <a:lnSpc>
+                <a:spcPct val="100000"/>
+              </a:lnSpc>
+              <a:spcBef>
+                <a:spcPts val="0"/>
+              </a:spcBef>
+              <a:spcAft>
+                <a:spcPts val="0"/>
+              </a:spcAft>
+              <a:buClrTx/>
+              <a:buSzTx/>
+              <a:buFontTx/>
+              <a:buNone/>
+              <a:tabLst/>
+              <a:defRPr/>
+            </a:pPr>
+            <a:r>
+              <a:rPr kumimoji="0" lang="en-US" sz="500" b="1" i="0" u="none" strike="noStrike" kern="1200" cap="none" spc="0" normalizeH="0" baseline="0" noProof="0" dirty="0">
+                <a:ln>
+                  <a:noFill/>
+                </a:ln>
+                <a:solidFill>
+                  <a:prstClr val="black">
+                    <a:lumMod val="50000"/>
+                    <a:lumOff val="50000"/>
+                  </a:prstClr>
+                </a:solidFill>
+                <a:effectLst/>
+                <a:uLnTx/>
+                <a:uFillTx/>
+                <a:latin typeface="Consolas" panose="020B0609020204030204" pitchFamily="49" charset="0"/>
+                <a:ea typeface="+mn-ea"/>
+                <a:cs typeface="+mn-cs"/>
+              </a:rPr>
+              <a:t>NK1|2</a:t>
+            </a:r>
+            <a:r>
+              <a:rPr kumimoji="0" lang="en-US" sz="500" b="0" i="0" u="none" strike="noStrike" kern="1200" cap="none" spc="0" normalizeH="0" baseline="0" noProof="0" dirty="0">
+                <a:ln>
+                  <a:noFill/>
+                </a:ln>
+                <a:solidFill>
+                  <a:prstClr val="black">
+                    <a:lumMod val="50000"/>
+                    <a:lumOff val="50000"/>
+                  </a:prstClr>
+                </a:solidFill>
+                <a:effectLst/>
+                <a:uLnTx/>
+                <a:uFillTx/>
+                <a:latin typeface="Consolas" panose="020B0609020204030204" pitchFamily="49" charset="0"/>
+                <a:ea typeface="+mn-ea"/>
+                <a:cs typeface="+mn-cs"/>
+              </a:rPr>
+              <a:t>|DOE^ROBERT|FTH|(617)555-8888^PRN^PH</a:t>
+            </a:r>
+          </a:p>
+          <a:p>
+            <a:pPr marL="57150" marR="0" lvl="0" indent="-57150" algn="l" defTabSz="914400" rtl="0" eaLnBrk="1" fontAlgn="t" latinLnBrk="0" hangingPunct="1">
+              <a:lnSpc>
+                <a:spcPct val="100000"/>
+              </a:lnSpc>
+              <a:spcBef>
+                <a:spcPts val="0"/>
+              </a:spcBef>
+              <a:spcAft>
+                <a:spcPts val="0"/>
+              </a:spcAft>
+              <a:buClrTx/>
+              <a:buSzTx/>
+              <a:buFontTx/>
+              <a:buNone/>
+              <a:tabLst/>
+              <a:defRPr/>
+            </a:pPr>
+            <a:r>
+              <a:rPr kumimoji="0" lang="en-US" sz="500" b="1" i="0" u="none" strike="noStrike" kern="1200" cap="none" spc="0" normalizeH="0" baseline="0" noProof="0" dirty="0">
+                <a:ln>
+                  <a:noFill/>
+                </a:ln>
+                <a:solidFill>
+                  <a:prstClr val="black">
+                    <a:lumMod val="50000"/>
+                    <a:lumOff val="50000"/>
+                  </a:prstClr>
+                </a:solidFill>
+                <a:effectLst/>
+                <a:uLnTx/>
+                <a:uFillTx/>
+                <a:latin typeface="Consolas" panose="020B0609020204030204" pitchFamily="49" charset="0"/>
+                <a:ea typeface="+mn-ea"/>
+                <a:cs typeface="+mn-cs"/>
+              </a:rPr>
+              <a:t>PV1|1</a:t>
+            </a:r>
+            <a:r>
+              <a:rPr kumimoji="0" lang="en-US" sz="500" b="0" i="0" u="none" strike="noStrike" kern="1200" cap="none" spc="0" normalizeH="0" baseline="0" noProof="0" dirty="0">
+                <a:ln>
+                  <a:noFill/>
+                </a:ln>
+                <a:solidFill>
+                  <a:prstClr val="black">
+                    <a:lumMod val="50000"/>
+                    <a:lumOff val="50000"/>
+                  </a:prstClr>
+                </a:solidFill>
+                <a:effectLst/>
+                <a:uLnTx/>
+                <a:uFillTx/>
+                <a:latin typeface="Consolas" panose="020B0609020204030204" pitchFamily="49" charset="0"/>
+                <a:ea typeface="+mn-ea"/>
+                <a:cs typeface="+mn-cs"/>
+              </a:rPr>
+              <a:t>|I|3N^312^1^GENERAL_HOSPITAL^^BED01||||12345^SMITH^JANE^A^^MD|67890^BROWN^SUSAN^^^RN||||||MED||||1234567||||||||||||||||||||GENERAL_HOSPITAL</a:t>
+            </a:r>
+          </a:p>
+          <a:p>
+            <a:pPr marL="57150" marR="0" lvl="0" indent="-57150" algn="l" defTabSz="914400" rtl="0" eaLnBrk="1" fontAlgn="t" latinLnBrk="0" hangingPunct="1">
+              <a:lnSpc>
+                <a:spcPct val="100000"/>
+              </a:lnSpc>
+              <a:spcBef>
+                <a:spcPts val="0"/>
+              </a:spcBef>
+              <a:spcAft>
+                <a:spcPts val="0"/>
+              </a:spcAft>
+              <a:buClrTx/>
+              <a:buSzTx/>
+              <a:buFontTx/>
+              <a:buNone/>
+              <a:tabLst/>
+              <a:defRPr/>
+            </a:pPr>
+            <a:r>
+              <a:rPr kumimoji="0" lang="en-US" sz="500" b="1" i="0" u="none" strike="noStrike" kern="1200" cap="none" spc="0" normalizeH="0" baseline="0" noProof="0" dirty="0">
+                <a:ln>
+                  <a:noFill/>
+                </a:ln>
+                <a:solidFill>
+                  <a:prstClr val="black">
+                    <a:lumMod val="50000"/>
+                    <a:lumOff val="50000"/>
+                  </a:prstClr>
+                </a:solidFill>
+                <a:effectLst/>
+                <a:uLnTx/>
+                <a:uFillTx/>
+                <a:latin typeface="Consolas" panose="020B0609020204030204" pitchFamily="49" charset="0"/>
+                <a:ea typeface="+mn-ea"/>
+                <a:cs typeface="+mn-cs"/>
+              </a:rPr>
+              <a:t>PV2</a:t>
+            </a:r>
+            <a:r>
+              <a:rPr kumimoji="0" lang="en-US" sz="500" b="0" i="0" u="none" strike="noStrike" kern="1200" cap="none" spc="0" normalizeH="0" baseline="0" noProof="0" dirty="0">
+                <a:ln>
+                  <a:noFill/>
+                </a:ln>
+                <a:solidFill>
+                  <a:prstClr val="black">
+                    <a:lumMod val="50000"/>
+                    <a:lumOff val="50000"/>
+                  </a:prstClr>
+                </a:solidFill>
+                <a:effectLst/>
+                <a:uLnTx/>
+                <a:uFillTx/>
+                <a:latin typeface="Consolas" panose="020B0609020204030204" pitchFamily="49" charset="0"/>
+                <a:ea typeface="+mn-ea"/>
+                <a:cs typeface="+mn-cs"/>
+              </a:rPr>
+              <a:t>|||Routine admission||||||||||N</a:t>
+            </a:r>
+          </a:p>
+        </p:txBody>
+      </p:sp>
+      <p:sp>
+        <p:nvSpPr>
+          <p:cNvPr id="13" name="Rectangle 12">
+            <a:extLst>
+              <a:ext uri="{FF2B5EF4-FFF2-40B4-BE49-F238E27FC236}">
+                <a16:creationId xmlns:a16="http://schemas.microsoft.com/office/drawing/2014/main" id="{951F95A3-19D4-A209-561A-57AA3CB43700}"/>
+              </a:ext>
+            </a:extLst>
+          </p:cNvPr>
+          <p:cNvSpPr/>
+          <p:nvPr/>
+        </p:nvSpPr>
+        <p:spPr>
+          <a:xfrm>
+            <a:off x="3271570" y="1015729"/>
+            <a:ext cx="2548205" cy="1786528"/>
+          </a:xfrm>
+          <a:prstGeom prst="rect">
+            <a:avLst/>
+          </a:prstGeom>
+          <a:solidFill>
+            <a:schemeClr val="bg1"/>
+          </a:solidFill>
+          <a:ln>
+            <a:noFill/>
+          </a:ln>
+        </p:spPr>
+        <p:style>
+          <a:lnRef idx="2">
+            <a:schemeClr val="accent1">
+              <a:shade val="15000"/>
+            </a:schemeClr>
+          </a:lnRef>
+          <a:fillRef idx="1">
+            <a:schemeClr val="accent1"/>
+          </a:fillRef>
+          <a:effectRef idx="0">
+            <a:schemeClr val="accent1"/>
+          </a:effectRef>
+          <a:fontRef idx="minor">
+            <a:schemeClr val="lt1"/>
+          </a:fontRef>
+        </p:style>
+        <p:txBody>
+          <a:bodyPr rtlCol="0" anchor="ctr"/>
+          <a:lstStyle/>
+          <a:p>
+            <a:pPr marL="57150" marR="0" lvl="0" indent="-57150" algn="l" defTabSz="914400" rtl="0" eaLnBrk="1" fontAlgn="t" latinLnBrk="0" hangingPunct="1">
+              <a:lnSpc>
+                <a:spcPct val="100000"/>
+              </a:lnSpc>
+              <a:spcBef>
+                <a:spcPts val="0"/>
+              </a:spcBef>
+              <a:spcAft>
+                <a:spcPts val="0"/>
+              </a:spcAft>
+              <a:buClrTx/>
+              <a:buSzTx/>
+              <a:buFontTx/>
+              <a:buNone/>
+              <a:tabLst/>
+              <a:defRPr/>
+            </a:pPr>
+            <a:r>
+              <a:rPr kumimoji="0" lang="en-US" sz="500" b="1" i="0" u="none" strike="noStrike" kern="1200" cap="none" spc="0" normalizeH="0" baseline="0" noProof="0" dirty="0">
+                <a:ln>
+                  <a:noFill/>
+                </a:ln>
+                <a:solidFill>
+                  <a:prstClr val="black">
+                    <a:lumMod val="50000"/>
+                    <a:lumOff val="50000"/>
+                  </a:prstClr>
+                </a:solidFill>
+                <a:effectLst/>
+                <a:uLnTx/>
+                <a:uFillTx/>
+                <a:latin typeface="Consolas" panose="020B0609020204030204" pitchFamily="49" charset="0"/>
+                <a:ea typeface="+mn-ea"/>
+                <a:cs typeface="+mn-cs"/>
+              </a:rPr>
+              <a:t>MSH</a:t>
+            </a:r>
+            <a:r>
+              <a:rPr kumimoji="0" lang="en-US" sz="500" b="0" i="0" u="none" strike="noStrike" kern="1200" cap="none" spc="0" normalizeH="0" baseline="0" noProof="0" dirty="0">
+                <a:ln>
+                  <a:noFill/>
+                </a:ln>
+                <a:solidFill>
+                  <a:prstClr val="black">
+                    <a:lumMod val="50000"/>
+                    <a:lumOff val="50000"/>
+                  </a:prstClr>
+                </a:solidFill>
+                <a:effectLst/>
+                <a:uLnTx/>
+                <a:uFillTx/>
+                <a:latin typeface="Consolas" panose="020B0609020204030204" pitchFamily="49" charset="0"/>
+                <a:ea typeface="+mn-ea"/>
+                <a:cs typeface="+mn-cs"/>
+              </a:rPr>
+              <a:t>|^~\&amp;|LABSYSTEM|GENERAL_HOSPITAL|EHR|GENERAL_HOSPITAL|20260722213500||ORU^R01|MSG00098765|P|2.5.12PID|1||12345678^^^GENERAL_HOSPITAL^MR||SMITH^JOHN^J||19800115|M|||123 MAIN ST^^BOSTON^MA^02108^USA||(617)555-1212|||M</a:t>
+            </a:r>
+          </a:p>
+          <a:p>
+            <a:pPr marL="57150" marR="0" lvl="0" indent="-57150" algn="l" defTabSz="914400" rtl="0" eaLnBrk="1" fontAlgn="t" latinLnBrk="0" hangingPunct="1">
+              <a:lnSpc>
+                <a:spcPct val="100000"/>
+              </a:lnSpc>
+              <a:spcBef>
+                <a:spcPts val="0"/>
+              </a:spcBef>
+              <a:spcAft>
+                <a:spcPts val="0"/>
+              </a:spcAft>
+              <a:buClrTx/>
+              <a:buSzTx/>
+              <a:buFontTx/>
+              <a:buNone/>
+              <a:tabLst/>
+              <a:defRPr/>
+            </a:pPr>
+            <a:r>
+              <a:rPr kumimoji="0" lang="en-US" sz="500" b="1" i="0" u="none" strike="noStrike" kern="1200" cap="none" spc="0" normalizeH="0" baseline="0" noProof="0" dirty="0">
+                <a:ln>
+                  <a:noFill/>
+                </a:ln>
+                <a:solidFill>
+                  <a:prstClr val="black">
+                    <a:lumMod val="50000"/>
+                    <a:lumOff val="50000"/>
+                  </a:prstClr>
+                </a:solidFill>
+                <a:effectLst/>
+                <a:uLnTx/>
+                <a:uFillTx/>
+                <a:latin typeface="Consolas" panose="020B0609020204030204" pitchFamily="49" charset="0"/>
+                <a:ea typeface="+mn-ea"/>
+                <a:cs typeface="+mn-cs"/>
+              </a:rPr>
+              <a:t>ORC</a:t>
+            </a:r>
+            <a:r>
+              <a:rPr kumimoji="0" lang="en-US" sz="500" b="0" i="0" u="none" strike="noStrike" kern="1200" cap="none" spc="0" normalizeH="0" baseline="0" noProof="0" dirty="0">
+                <a:ln>
+                  <a:noFill/>
+                </a:ln>
+                <a:solidFill>
+                  <a:prstClr val="black">
+                    <a:lumMod val="50000"/>
+                    <a:lumOff val="50000"/>
+                  </a:prstClr>
+                </a:solidFill>
+                <a:effectLst/>
+                <a:uLnTx/>
+                <a:uFillTx/>
+                <a:latin typeface="Consolas" panose="020B0609020204030204" pitchFamily="49" charset="0"/>
+                <a:ea typeface="+mn-ea"/>
+                <a:cs typeface="+mn-cs"/>
+              </a:rPr>
+              <a:t>|RE|ORD123456|FILL987654||CM||||20260722213000|||12345^WILSON^SARAH^^^MD</a:t>
+            </a:r>
+          </a:p>
+          <a:p>
+            <a:pPr marL="57150" marR="0" lvl="0" indent="-57150" algn="l" defTabSz="914400" rtl="0" eaLnBrk="1" fontAlgn="t" latinLnBrk="0" hangingPunct="1">
+              <a:lnSpc>
+                <a:spcPct val="100000"/>
+              </a:lnSpc>
+              <a:spcBef>
+                <a:spcPts val="0"/>
+              </a:spcBef>
+              <a:spcAft>
+                <a:spcPts val="0"/>
+              </a:spcAft>
+              <a:buClrTx/>
+              <a:buSzTx/>
+              <a:buFontTx/>
+              <a:buNone/>
+              <a:tabLst/>
+              <a:defRPr/>
+            </a:pPr>
+            <a:r>
+              <a:rPr kumimoji="0" lang="en-US" sz="500" b="1" i="0" u="none" strike="noStrike" kern="1200" cap="none" spc="0" normalizeH="0" baseline="0" noProof="0" dirty="0">
+                <a:ln>
+                  <a:noFill/>
+                </a:ln>
+                <a:solidFill>
+                  <a:prstClr val="black">
+                    <a:lumMod val="50000"/>
+                    <a:lumOff val="50000"/>
+                  </a:prstClr>
+                </a:solidFill>
+                <a:effectLst/>
+                <a:uLnTx/>
+                <a:uFillTx/>
+                <a:latin typeface="Consolas" panose="020B0609020204030204" pitchFamily="49" charset="0"/>
+                <a:ea typeface="+mn-ea"/>
+                <a:cs typeface="+mn-cs"/>
+              </a:rPr>
+              <a:t>OBR|</a:t>
+            </a:r>
+            <a:r>
+              <a:rPr kumimoji="0" lang="en-US" sz="500" b="0" i="0" u="none" strike="noStrike" kern="1200" cap="none" spc="0" normalizeH="0" baseline="0" noProof="0" dirty="0">
+                <a:ln>
+                  <a:noFill/>
+                </a:ln>
+                <a:solidFill>
+                  <a:prstClr val="black">
+                    <a:lumMod val="50000"/>
+                    <a:lumOff val="50000"/>
+                  </a:prstClr>
+                </a:solidFill>
+                <a:effectLst/>
+                <a:uLnTx/>
+                <a:uFillTx/>
+                <a:latin typeface="Consolas" panose="020B0609020204030204" pitchFamily="49" charset="0"/>
+                <a:ea typeface="+mn-ea"/>
+                <a:cs typeface="+mn-cs"/>
+              </a:rPr>
+              <a:t>1|ORD123456|FILL987654|24323-8^Comprehensive Metabolic </a:t>
+            </a:r>
+            <a:r>
+              <a:rPr kumimoji="0" lang="en-US" sz="500" b="0" i="0" u="none" strike="noStrike" kern="1200" cap="none" spc="0" normalizeH="0" baseline="0" noProof="0" dirty="0" err="1">
+                <a:ln>
+                  <a:noFill/>
+                </a:ln>
+                <a:solidFill>
+                  <a:prstClr val="black">
+                    <a:lumMod val="50000"/>
+                    <a:lumOff val="50000"/>
+                  </a:prstClr>
+                </a:solidFill>
+                <a:effectLst/>
+                <a:uLnTx/>
+                <a:uFillTx/>
+                <a:latin typeface="Consolas" panose="020B0609020204030204" pitchFamily="49" charset="0"/>
+                <a:ea typeface="+mn-ea"/>
+                <a:cs typeface="+mn-cs"/>
+              </a:rPr>
+              <a:t>Panel^LN</a:t>
+            </a:r>
+            <a:r>
+              <a:rPr kumimoji="0" lang="en-US" sz="500" b="0" i="0" u="none" strike="noStrike" kern="1200" cap="none" spc="0" normalizeH="0" baseline="0" noProof="0" dirty="0">
+                <a:ln>
+                  <a:noFill/>
+                </a:ln>
+                <a:solidFill>
+                  <a:prstClr val="black">
+                    <a:lumMod val="50000"/>
+                    <a:lumOff val="50000"/>
+                  </a:prstClr>
+                </a:solidFill>
+                <a:effectLst/>
+                <a:uLnTx/>
+                <a:uFillTx/>
+                <a:latin typeface="Consolas" panose="020B0609020204030204" pitchFamily="49" charset="0"/>
+                <a:ea typeface="+mn-ea"/>
+                <a:cs typeface="+mn-cs"/>
+              </a:rPr>
+              <a:t>||20260722210000|20260722211500||||| |||12345^WILSON^SARAH^^^MD||||||F|||20260722213000||CH</a:t>
+            </a:r>
+          </a:p>
+          <a:p>
+            <a:pPr marL="57150" marR="0" lvl="0" indent="-57150" algn="l" defTabSz="914400" rtl="0" eaLnBrk="1" fontAlgn="t" latinLnBrk="0" hangingPunct="1">
+              <a:lnSpc>
+                <a:spcPct val="100000"/>
+              </a:lnSpc>
+              <a:spcBef>
+                <a:spcPts val="0"/>
+              </a:spcBef>
+              <a:spcAft>
+                <a:spcPts val="0"/>
+              </a:spcAft>
+              <a:buClrTx/>
+              <a:buSzTx/>
+              <a:buFontTx/>
+              <a:buNone/>
+              <a:tabLst/>
+              <a:defRPr/>
+            </a:pPr>
+            <a:r>
+              <a:rPr kumimoji="0" lang="en-US" sz="500" b="1" i="0" u="none" strike="noStrike" kern="1200" cap="none" spc="0" normalizeH="0" baseline="0" noProof="0" dirty="0">
+                <a:ln>
+                  <a:noFill/>
+                </a:ln>
+                <a:solidFill>
+                  <a:prstClr val="black">
+                    <a:lumMod val="50000"/>
+                    <a:lumOff val="50000"/>
+                  </a:prstClr>
+                </a:solidFill>
+                <a:effectLst/>
+                <a:uLnTx/>
+                <a:uFillTx/>
+                <a:latin typeface="Consolas" panose="020B0609020204030204" pitchFamily="49" charset="0"/>
+                <a:ea typeface="+mn-ea"/>
+                <a:cs typeface="+mn-cs"/>
+              </a:rPr>
+              <a:t>OBX</a:t>
+            </a:r>
+            <a:r>
+              <a:rPr kumimoji="0" lang="en-US" sz="500" b="0" i="0" u="none" strike="noStrike" kern="1200" cap="none" spc="0" normalizeH="0" baseline="0" noProof="0" dirty="0">
+                <a:ln>
+                  <a:noFill/>
+                </a:ln>
+                <a:solidFill>
+                  <a:prstClr val="black">
+                    <a:lumMod val="50000"/>
+                    <a:lumOff val="50000"/>
+                  </a:prstClr>
+                </a:solidFill>
+                <a:effectLst/>
+                <a:uLnTx/>
+                <a:uFillTx/>
+                <a:latin typeface="Consolas" panose="020B0609020204030204" pitchFamily="49" charset="0"/>
+                <a:ea typeface="+mn-ea"/>
+                <a:cs typeface="+mn-cs"/>
+              </a:rPr>
+              <a:t>|1|NM|2345-7^Glucose^LN||98|mg/dL|70-99|N|||F</a:t>
+            </a:r>
+          </a:p>
+          <a:p>
+            <a:pPr marL="57150" marR="0" lvl="0" indent="-57150" algn="l" defTabSz="914400" rtl="0" eaLnBrk="1" fontAlgn="t" latinLnBrk="0" hangingPunct="1">
+              <a:lnSpc>
+                <a:spcPct val="100000"/>
+              </a:lnSpc>
+              <a:spcBef>
+                <a:spcPts val="0"/>
+              </a:spcBef>
+              <a:spcAft>
+                <a:spcPts val="0"/>
+              </a:spcAft>
+              <a:buClrTx/>
+              <a:buSzTx/>
+              <a:buFontTx/>
+              <a:buNone/>
+              <a:tabLst/>
+              <a:defRPr/>
+            </a:pPr>
+            <a:r>
+              <a:rPr kumimoji="0" lang="en-US" sz="500" b="1" i="0" u="none" strike="noStrike" kern="1200" cap="none" spc="0" normalizeH="0" baseline="0" noProof="0" dirty="0">
+                <a:ln>
+                  <a:noFill/>
+                </a:ln>
+                <a:solidFill>
+                  <a:prstClr val="black">
+                    <a:lumMod val="50000"/>
+                    <a:lumOff val="50000"/>
+                  </a:prstClr>
+                </a:solidFill>
+                <a:effectLst/>
+                <a:uLnTx/>
+                <a:uFillTx/>
+                <a:latin typeface="Consolas" panose="020B0609020204030204" pitchFamily="49" charset="0"/>
+                <a:ea typeface="+mn-ea"/>
+                <a:cs typeface="+mn-cs"/>
+              </a:rPr>
+              <a:t>OBX</a:t>
+            </a:r>
+            <a:r>
+              <a:rPr kumimoji="0" lang="en-US" sz="500" b="0" i="0" u="none" strike="noStrike" kern="1200" cap="none" spc="0" normalizeH="0" baseline="0" noProof="0" dirty="0">
+                <a:ln>
+                  <a:noFill/>
+                </a:ln>
+                <a:solidFill>
+                  <a:prstClr val="black">
+                    <a:lumMod val="50000"/>
+                    <a:lumOff val="50000"/>
+                  </a:prstClr>
+                </a:solidFill>
+                <a:effectLst/>
+                <a:uLnTx/>
+                <a:uFillTx/>
+                <a:latin typeface="Consolas" panose="020B0609020204030204" pitchFamily="49" charset="0"/>
+                <a:ea typeface="+mn-ea"/>
+                <a:cs typeface="+mn-cs"/>
+              </a:rPr>
+              <a:t>|2|NM|3094-0^Urea Nitrogen (BUN)^LN||14|mg/dL|7-20|N|||F</a:t>
+            </a:r>
+          </a:p>
+          <a:p>
+            <a:pPr marL="57150" marR="0" lvl="0" indent="-57150" algn="l" defTabSz="914400" rtl="0" eaLnBrk="1" fontAlgn="t" latinLnBrk="0" hangingPunct="1">
+              <a:lnSpc>
+                <a:spcPct val="100000"/>
+              </a:lnSpc>
+              <a:spcBef>
+                <a:spcPts val="0"/>
+              </a:spcBef>
+              <a:spcAft>
+                <a:spcPts val="0"/>
+              </a:spcAft>
+              <a:buClrTx/>
+              <a:buSzTx/>
+              <a:buFontTx/>
+              <a:buNone/>
+              <a:tabLst/>
+              <a:defRPr/>
+            </a:pPr>
+            <a:r>
+              <a:rPr kumimoji="0" lang="en-US" sz="500" b="1" i="0" u="none" strike="noStrike" kern="1200" cap="none" spc="0" normalizeH="0" baseline="0" noProof="0" dirty="0">
+                <a:ln>
+                  <a:noFill/>
+                </a:ln>
+                <a:solidFill>
+                  <a:prstClr val="black">
+                    <a:lumMod val="50000"/>
+                    <a:lumOff val="50000"/>
+                  </a:prstClr>
+                </a:solidFill>
+                <a:effectLst/>
+                <a:uLnTx/>
+                <a:uFillTx/>
+                <a:latin typeface="Consolas" panose="020B0609020204030204" pitchFamily="49" charset="0"/>
+                <a:ea typeface="+mn-ea"/>
+                <a:cs typeface="+mn-cs"/>
+              </a:rPr>
+              <a:t>OBX</a:t>
+            </a:r>
+            <a:r>
+              <a:rPr kumimoji="0" lang="en-US" sz="500" b="0" i="0" u="none" strike="noStrike" kern="1200" cap="none" spc="0" normalizeH="0" baseline="0" noProof="0" dirty="0">
+                <a:ln>
+                  <a:noFill/>
+                </a:ln>
+                <a:solidFill>
+                  <a:prstClr val="black">
+                    <a:lumMod val="50000"/>
+                    <a:lumOff val="50000"/>
+                  </a:prstClr>
+                </a:solidFill>
+                <a:effectLst/>
+                <a:uLnTx/>
+                <a:uFillTx/>
+                <a:latin typeface="Consolas" panose="020B0609020204030204" pitchFamily="49" charset="0"/>
+                <a:ea typeface="+mn-ea"/>
+                <a:cs typeface="+mn-cs"/>
+              </a:rPr>
+              <a:t>|3|NM|2160-0^Creatinine^LN||0.92|mg/dL|0.70-1.30|N|||F</a:t>
+            </a:r>
+          </a:p>
+          <a:p>
+            <a:pPr marL="57150" marR="0" lvl="0" indent="-57150" algn="l" defTabSz="914400" rtl="0" eaLnBrk="1" fontAlgn="t" latinLnBrk="0" hangingPunct="1">
+              <a:lnSpc>
+                <a:spcPct val="100000"/>
+              </a:lnSpc>
+              <a:spcBef>
+                <a:spcPts val="0"/>
+              </a:spcBef>
+              <a:spcAft>
+                <a:spcPts val="0"/>
+              </a:spcAft>
+              <a:buClrTx/>
+              <a:buSzTx/>
+              <a:buFontTx/>
+              <a:buNone/>
+              <a:tabLst/>
+              <a:defRPr/>
+            </a:pPr>
+            <a:r>
+              <a:rPr kumimoji="0" lang="en-US" sz="500" b="1" i="0" u="none" strike="noStrike" kern="1200" cap="none" spc="0" normalizeH="0" baseline="0" noProof="0" dirty="0">
+                <a:ln>
+                  <a:noFill/>
+                </a:ln>
+                <a:solidFill>
+                  <a:prstClr val="black">
+                    <a:lumMod val="50000"/>
+                    <a:lumOff val="50000"/>
+                  </a:prstClr>
+                </a:solidFill>
+                <a:effectLst/>
+                <a:uLnTx/>
+                <a:uFillTx/>
+                <a:latin typeface="Consolas" panose="020B0609020204030204" pitchFamily="49" charset="0"/>
+                <a:ea typeface="+mn-ea"/>
+                <a:cs typeface="+mn-cs"/>
+              </a:rPr>
+              <a:t>OBX</a:t>
+            </a:r>
+            <a:r>
+              <a:rPr kumimoji="0" lang="en-US" sz="500" b="0" i="0" u="none" strike="noStrike" kern="1200" cap="none" spc="0" normalizeH="0" baseline="0" noProof="0" dirty="0">
+                <a:ln>
+                  <a:noFill/>
+                </a:ln>
+                <a:solidFill>
+                  <a:prstClr val="black">
+                    <a:lumMod val="50000"/>
+                    <a:lumOff val="50000"/>
+                  </a:prstClr>
+                </a:solidFill>
+                <a:effectLst/>
+                <a:uLnTx/>
+                <a:uFillTx/>
+                <a:latin typeface="Consolas" panose="020B0609020204030204" pitchFamily="49" charset="0"/>
+                <a:ea typeface="+mn-ea"/>
+                <a:cs typeface="+mn-cs"/>
+              </a:rPr>
+              <a:t>|4|NM|2951-2^Sodium^LN||140|mmol/L|135-145|N|||F</a:t>
+            </a:r>
+          </a:p>
+          <a:p>
+            <a:pPr marL="57150" marR="0" lvl="0" indent="-57150" algn="l" defTabSz="914400" rtl="0" eaLnBrk="1" fontAlgn="t" latinLnBrk="0" hangingPunct="1">
+              <a:lnSpc>
+                <a:spcPct val="100000"/>
+              </a:lnSpc>
+              <a:spcBef>
+                <a:spcPts val="0"/>
+              </a:spcBef>
+              <a:spcAft>
+                <a:spcPts val="0"/>
+              </a:spcAft>
+              <a:buClrTx/>
+              <a:buSzTx/>
+              <a:buFontTx/>
+              <a:buNone/>
+              <a:tabLst/>
+              <a:defRPr/>
+            </a:pPr>
+            <a:r>
+              <a:rPr kumimoji="0" lang="en-US" sz="500" b="1" i="0" u="none" strike="noStrike" kern="1200" cap="none" spc="0" normalizeH="0" baseline="0" noProof="0" dirty="0">
+                <a:ln>
+                  <a:noFill/>
+                </a:ln>
+                <a:solidFill>
+                  <a:prstClr val="black">
+                    <a:lumMod val="50000"/>
+                    <a:lumOff val="50000"/>
+                  </a:prstClr>
+                </a:solidFill>
+                <a:effectLst/>
+                <a:uLnTx/>
+                <a:uFillTx/>
+                <a:latin typeface="Consolas" panose="020B0609020204030204" pitchFamily="49" charset="0"/>
+                <a:ea typeface="+mn-ea"/>
+                <a:cs typeface="+mn-cs"/>
+              </a:rPr>
+              <a:t>OBX</a:t>
+            </a:r>
+            <a:r>
+              <a:rPr kumimoji="0" lang="en-US" sz="500" b="0" i="0" u="none" strike="noStrike" kern="1200" cap="none" spc="0" normalizeH="0" baseline="0" noProof="0" dirty="0">
+                <a:ln>
+                  <a:noFill/>
+                </a:ln>
+                <a:solidFill>
+                  <a:prstClr val="black">
+                    <a:lumMod val="50000"/>
+                    <a:lumOff val="50000"/>
+                  </a:prstClr>
+                </a:solidFill>
+                <a:effectLst/>
+                <a:uLnTx/>
+                <a:uFillTx/>
+                <a:latin typeface="Consolas" panose="020B0609020204030204" pitchFamily="49" charset="0"/>
+                <a:ea typeface="+mn-ea"/>
+                <a:cs typeface="+mn-cs"/>
+              </a:rPr>
+              <a:t>|5|NM|2823-3^Potassium^LN||4.2|mmol/L|3.5-5.1|N|||F</a:t>
+            </a:r>
+          </a:p>
+          <a:p>
+            <a:pPr marL="57150" marR="0" lvl="0" indent="-57150" algn="l" defTabSz="914400" rtl="0" eaLnBrk="1" fontAlgn="t" latinLnBrk="0" hangingPunct="1">
+              <a:lnSpc>
+                <a:spcPct val="100000"/>
+              </a:lnSpc>
+              <a:spcBef>
+                <a:spcPts val="0"/>
+              </a:spcBef>
+              <a:spcAft>
+                <a:spcPts val="0"/>
+              </a:spcAft>
+              <a:buClrTx/>
+              <a:buSzTx/>
+              <a:buFontTx/>
+              <a:buNone/>
+              <a:tabLst/>
+              <a:defRPr/>
+            </a:pPr>
+            <a:r>
+              <a:rPr kumimoji="0" lang="en-US" sz="500" b="1" i="0" u="none" strike="noStrike" kern="1200" cap="none" spc="0" normalizeH="0" baseline="0" noProof="0" dirty="0">
+                <a:ln>
+                  <a:noFill/>
+                </a:ln>
+                <a:solidFill>
+                  <a:prstClr val="black">
+                    <a:lumMod val="50000"/>
+                    <a:lumOff val="50000"/>
+                  </a:prstClr>
+                </a:solidFill>
+                <a:effectLst/>
+                <a:uLnTx/>
+                <a:uFillTx/>
+                <a:latin typeface="Consolas" panose="020B0609020204030204" pitchFamily="49" charset="0"/>
+                <a:ea typeface="+mn-ea"/>
+                <a:cs typeface="+mn-cs"/>
+              </a:rPr>
+              <a:t>OBX</a:t>
+            </a:r>
+            <a:r>
+              <a:rPr kumimoji="0" lang="en-US" sz="500" b="0" i="0" u="none" strike="noStrike" kern="1200" cap="none" spc="0" normalizeH="0" baseline="0" noProof="0" dirty="0">
+                <a:ln>
+                  <a:noFill/>
+                </a:ln>
+                <a:solidFill>
+                  <a:prstClr val="black">
+                    <a:lumMod val="50000"/>
+                    <a:lumOff val="50000"/>
+                  </a:prstClr>
+                </a:solidFill>
+                <a:effectLst/>
+                <a:uLnTx/>
+                <a:uFillTx/>
+                <a:latin typeface="Consolas" panose="020B0609020204030204" pitchFamily="49" charset="0"/>
+                <a:ea typeface="+mn-ea"/>
+                <a:cs typeface="+mn-cs"/>
+              </a:rPr>
+              <a:t>|6|NM|2075-0^Chloride^LN||103|mmol/L|98-107|N|||F</a:t>
+            </a:r>
+          </a:p>
+          <a:p>
+            <a:pPr marL="57150" marR="0" lvl="0" indent="-57150" algn="l" defTabSz="914400" rtl="0" eaLnBrk="1" fontAlgn="t" latinLnBrk="0" hangingPunct="1">
+              <a:lnSpc>
+                <a:spcPct val="100000"/>
+              </a:lnSpc>
+              <a:spcBef>
+                <a:spcPts val="0"/>
+              </a:spcBef>
+              <a:spcAft>
+                <a:spcPts val="0"/>
+              </a:spcAft>
+              <a:buClrTx/>
+              <a:buSzTx/>
+              <a:buFontTx/>
+              <a:buNone/>
+              <a:tabLst/>
+              <a:defRPr/>
+            </a:pPr>
+            <a:r>
+              <a:rPr kumimoji="0" lang="en-US" sz="500" b="1" i="0" u="none" strike="noStrike" kern="1200" cap="none" spc="0" normalizeH="0" baseline="0" noProof="0" dirty="0">
+                <a:ln>
+                  <a:noFill/>
+                </a:ln>
+                <a:solidFill>
+                  <a:prstClr val="black">
+                    <a:lumMod val="50000"/>
+                    <a:lumOff val="50000"/>
+                  </a:prstClr>
+                </a:solidFill>
+                <a:effectLst/>
+                <a:uLnTx/>
+                <a:uFillTx/>
+                <a:latin typeface="Consolas" panose="020B0609020204030204" pitchFamily="49" charset="0"/>
+                <a:ea typeface="+mn-ea"/>
+                <a:cs typeface="+mn-cs"/>
+              </a:rPr>
+              <a:t>OBX</a:t>
+            </a:r>
+            <a:r>
+              <a:rPr kumimoji="0" lang="en-US" sz="500" b="0" i="0" u="none" strike="noStrike" kern="1200" cap="none" spc="0" normalizeH="0" baseline="0" noProof="0" dirty="0">
+                <a:ln>
+                  <a:noFill/>
+                </a:ln>
+                <a:solidFill>
+                  <a:prstClr val="black">
+                    <a:lumMod val="50000"/>
+                    <a:lumOff val="50000"/>
+                  </a:prstClr>
+                </a:solidFill>
+                <a:effectLst/>
+                <a:uLnTx/>
+                <a:uFillTx/>
+                <a:latin typeface="Consolas" panose="020B0609020204030204" pitchFamily="49" charset="0"/>
+                <a:ea typeface="+mn-ea"/>
+                <a:cs typeface="+mn-cs"/>
+              </a:rPr>
+              <a:t>|7|NM|2028-9^Carbon </a:t>
+            </a:r>
+            <a:r>
+              <a:rPr kumimoji="0" lang="en-US" sz="500" b="0" i="0" u="none" strike="noStrike" kern="1200" cap="none" spc="0" normalizeH="0" baseline="0" noProof="0" dirty="0" err="1">
+                <a:ln>
+                  <a:noFill/>
+                </a:ln>
+                <a:solidFill>
+                  <a:prstClr val="black">
+                    <a:lumMod val="50000"/>
+                    <a:lumOff val="50000"/>
+                  </a:prstClr>
+                </a:solidFill>
+                <a:effectLst/>
+                <a:uLnTx/>
+                <a:uFillTx/>
+                <a:latin typeface="Consolas" panose="020B0609020204030204" pitchFamily="49" charset="0"/>
+                <a:ea typeface="+mn-ea"/>
+                <a:cs typeface="+mn-cs"/>
+              </a:rPr>
+              <a:t>Dioxide^LN</a:t>
+            </a:r>
+            <a:r>
+              <a:rPr kumimoji="0" lang="en-US" sz="500" b="0" i="0" u="none" strike="noStrike" kern="1200" cap="none" spc="0" normalizeH="0" baseline="0" noProof="0" dirty="0">
+                <a:ln>
+                  <a:noFill/>
+                </a:ln>
+                <a:solidFill>
+                  <a:prstClr val="black">
+                    <a:lumMod val="50000"/>
+                    <a:lumOff val="50000"/>
+                  </a:prstClr>
+                </a:solidFill>
+                <a:effectLst/>
+                <a:uLnTx/>
+                <a:uFillTx/>
+                <a:latin typeface="Consolas" panose="020B0609020204030204" pitchFamily="49" charset="0"/>
+                <a:ea typeface="+mn-ea"/>
+                <a:cs typeface="+mn-cs"/>
+              </a:rPr>
+              <a:t>||25|mmol/L|22-29|N|||F</a:t>
+            </a:r>
+          </a:p>
+          <a:p>
+            <a:pPr marL="57150" marR="0" lvl="0" indent="-57150" algn="l" defTabSz="914400" rtl="0" eaLnBrk="1" fontAlgn="t" latinLnBrk="0" hangingPunct="1">
+              <a:lnSpc>
+                <a:spcPct val="100000"/>
+              </a:lnSpc>
+              <a:spcBef>
+                <a:spcPts val="0"/>
+              </a:spcBef>
+              <a:spcAft>
+                <a:spcPts val="0"/>
+              </a:spcAft>
+              <a:buClrTx/>
+              <a:buSzTx/>
+              <a:buFontTx/>
+              <a:buNone/>
+              <a:tabLst/>
+              <a:defRPr/>
+            </a:pPr>
+            <a:r>
+              <a:rPr kumimoji="0" lang="en-US" sz="500" b="1" i="0" u="none" strike="noStrike" kern="1200" cap="none" spc="0" normalizeH="0" baseline="0" noProof="0" dirty="0">
+                <a:ln>
+                  <a:noFill/>
+                </a:ln>
+                <a:solidFill>
+                  <a:prstClr val="black">
+                    <a:lumMod val="50000"/>
+                    <a:lumOff val="50000"/>
+                  </a:prstClr>
+                </a:solidFill>
+                <a:effectLst/>
+                <a:uLnTx/>
+                <a:uFillTx/>
+                <a:latin typeface="Consolas" panose="020B0609020204030204" pitchFamily="49" charset="0"/>
+                <a:ea typeface="+mn-ea"/>
+                <a:cs typeface="+mn-cs"/>
+              </a:rPr>
+              <a:t>OBX</a:t>
+            </a:r>
+            <a:r>
+              <a:rPr kumimoji="0" lang="en-US" sz="500" b="0" i="0" u="none" strike="noStrike" kern="1200" cap="none" spc="0" normalizeH="0" baseline="0" noProof="0" dirty="0">
+                <a:ln>
+                  <a:noFill/>
+                </a:ln>
+                <a:solidFill>
+                  <a:prstClr val="black">
+                    <a:lumMod val="50000"/>
+                    <a:lumOff val="50000"/>
+                  </a:prstClr>
+                </a:solidFill>
+                <a:effectLst/>
+                <a:uLnTx/>
+                <a:uFillTx/>
+                <a:latin typeface="Consolas" panose="020B0609020204030204" pitchFamily="49" charset="0"/>
+                <a:ea typeface="+mn-ea"/>
+                <a:cs typeface="+mn-cs"/>
+              </a:rPr>
+              <a:t>|8|NM|17861-6^Calcium^LN||9.3|mg/dL|8.6-10.2|N|||F</a:t>
+            </a:r>
+          </a:p>
+          <a:p>
+            <a:pPr marL="57150" marR="0" lvl="0" indent="-57150" algn="l" defTabSz="914400" rtl="0" eaLnBrk="1" fontAlgn="t" latinLnBrk="0" hangingPunct="1">
+              <a:lnSpc>
+                <a:spcPct val="100000"/>
+              </a:lnSpc>
+              <a:spcBef>
+                <a:spcPts val="0"/>
+              </a:spcBef>
+              <a:spcAft>
+                <a:spcPts val="0"/>
+              </a:spcAft>
+              <a:buClrTx/>
+              <a:buSzTx/>
+              <a:buFontTx/>
+              <a:buNone/>
+              <a:tabLst/>
+              <a:defRPr/>
+            </a:pPr>
+            <a:r>
+              <a:rPr kumimoji="0" lang="en-US" sz="500" b="1" i="0" u="none" strike="noStrike" kern="1200" cap="none" spc="0" normalizeH="0" baseline="0" noProof="0" dirty="0">
+                <a:ln>
+                  <a:noFill/>
+                </a:ln>
+                <a:solidFill>
+                  <a:prstClr val="black">
+                    <a:lumMod val="50000"/>
+                    <a:lumOff val="50000"/>
+                  </a:prstClr>
+                </a:solidFill>
+                <a:effectLst/>
+                <a:uLnTx/>
+                <a:uFillTx/>
+                <a:latin typeface="Consolas" panose="020B0609020204030204" pitchFamily="49" charset="0"/>
+                <a:ea typeface="+mn-ea"/>
+                <a:cs typeface="+mn-cs"/>
+              </a:rPr>
+              <a:t>OBX</a:t>
+            </a:r>
+            <a:r>
+              <a:rPr kumimoji="0" lang="en-US" sz="500" b="0" i="0" u="none" strike="noStrike" kern="1200" cap="none" spc="0" normalizeH="0" baseline="0" noProof="0" dirty="0">
+                <a:ln>
+                  <a:noFill/>
+                </a:ln>
+                <a:solidFill>
+                  <a:prstClr val="black">
+                    <a:lumMod val="50000"/>
+                    <a:lumOff val="50000"/>
+                  </a:prstClr>
+                </a:solidFill>
+                <a:effectLst/>
+                <a:uLnTx/>
+                <a:uFillTx/>
+                <a:latin typeface="Consolas" panose="020B0609020204030204" pitchFamily="49" charset="0"/>
+                <a:ea typeface="+mn-ea"/>
+                <a:cs typeface="+mn-cs"/>
+              </a:rPr>
+              <a:t>|9|NM|2885-2^Protein </a:t>
+            </a:r>
+            <a:r>
+              <a:rPr kumimoji="0" lang="en-US" sz="500" b="0" i="0" u="none" strike="noStrike" kern="1200" cap="none" spc="0" normalizeH="0" baseline="0" noProof="0" dirty="0" err="1">
+                <a:ln>
+                  <a:noFill/>
+                </a:ln>
+                <a:solidFill>
+                  <a:prstClr val="black">
+                    <a:lumMod val="50000"/>
+                    <a:lumOff val="50000"/>
+                  </a:prstClr>
+                </a:solidFill>
+                <a:effectLst/>
+                <a:uLnTx/>
+                <a:uFillTx/>
+                <a:latin typeface="Consolas" panose="020B0609020204030204" pitchFamily="49" charset="0"/>
+                <a:ea typeface="+mn-ea"/>
+                <a:cs typeface="+mn-cs"/>
+              </a:rPr>
+              <a:t>Total^LN</a:t>
+            </a:r>
+            <a:r>
+              <a:rPr kumimoji="0" lang="en-US" sz="500" b="0" i="0" u="none" strike="noStrike" kern="1200" cap="none" spc="0" normalizeH="0" baseline="0" noProof="0" dirty="0">
+                <a:ln>
+                  <a:noFill/>
+                </a:ln>
+                <a:solidFill>
+                  <a:prstClr val="black">
+                    <a:lumMod val="50000"/>
+                    <a:lumOff val="50000"/>
+                  </a:prstClr>
+                </a:solidFill>
+                <a:effectLst/>
+                <a:uLnTx/>
+                <a:uFillTx/>
+                <a:latin typeface="Consolas" panose="020B0609020204030204" pitchFamily="49" charset="0"/>
+                <a:ea typeface="+mn-ea"/>
+                <a:cs typeface="+mn-cs"/>
+              </a:rPr>
+              <a:t>||7.1|g/dL|6.4-8.3|N|||F</a:t>
+            </a:r>
+          </a:p>
+          <a:p>
+            <a:pPr marL="57150" marR="0" lvl="0" indent="-57150" algn="l" defTabSz="914400" rtl="0" eaLnBrk="1" fontAlgn="t" latinLnBrk="0" hangingPunct="1">
+              <a:lnSpc>
+                <a:spcPct val="100000"/>
+              </a:lnSpc>
+              <a:spcBef>
+                <a:spcPts val="0"/>
+              </a:spcBef>
+              <a:spcAft>
+                <a:spcPts val="0"/>
+              </a:spcAft>
+              <a:buClrTx/>
+              <a:buSzTx/>
+              <a:buFontTx/>
+              <a:buNone/>
+              <a:tabLst/>
+              <a:defRPr/>
+            </a:pPr>
+            <a:r>
+              <a:rPr kumimoji="0" lang="en-US" sz="500" b="1" i="0" u="none" strike="noStrike" kern="1200" cap="none" spc="0" normalizeH="0" baseline="0" noProof="0" dirty="0">
+                <a:ln>
+                  <a:noFill/>
+                </a:ln>
+                <a:solidFill>
+                  <a:prstClr val="black">
+                    <a:lumMod val="50000"/>
+                    <a:lumOff val="50000"/>
+                  </a:prstClr>
+                </a:solidFill>
+                <a:effectLst/>
+                <a:uLnTx/>
+                <a:uFillTx/>
+                <a:latin typeface="Consolas" panose="020B0609020204030204" pitchFamily="49" charset="0"/>
+                <a:ea typeface="+mn-ea"/>
+                <a:cs typeface="+mn-cs"/>
+              </a:rPr>
+              <a:t>OBX</a:t>
+            </a:r>
+            <a:r>
+              <a:rPr kumimoji="0" lang="en-US" sz="500" b="0" i="0" u="none" strike="noStrike" kern="1200" cap="none" spc="0" normalizeH="0" baseline="0" noProof="0" dirty="0">
+                <a:ln>
+                  <a:noFill/>
+                </a:ln>
+                <a:solidFill>
+                  <a:prstClr val="black">
+                    <a:lumMod val="50000"/>
+                    <a:lumOff val="50000"/>
+                  </a:prstClr>
+                </a:solidFill>
+                <a:effectLst/>
+                <a:uLnTx/>
+                <a:uFillTx/>
+                <a:latin typeface="Consolas" panose="020B0609020204030204" pitchFamily="49" charset="0"/>
+                <a:ea typeface="+mn-ea"/>
+                <a:cs typeface="+mn-cs"/>
+              </a:rPr>
+              <a:t>|10|NM|1751-7^Albumin^LN||4.2|g/dL|3.5-5.2|N|||F</a:t>
+            </a:r>
+          </a:p>
+          <a:p>
+            <a:pPr marL="57150" marR="0" lvl="0" indent="-57150" algn="l" defTabSz="914400" rtl="0" eaLnBrk="1" fontAlgn="t" latinLnBrk="0" hangingPunct="1">
+              <a:lnSpc>
+                <a:spcPct val="100000"/>
+              </a:lnSpc>
+              <a:spcBef>
+                <a:spcPts val="0"/>
+              </a:spcBef>
+              <a:spcAft>
+                <a:spcPts val="0"/>
+              </a:spcAft>
+              <a:buClrTx/>
+              <a:buSzTx/>
+              <a:buFontTx/>
+              <a:buNone/>
+              <a:tabLst/>
+              <a:defRPr/>
+            </a:pPr>
+            <a:r>
+              <a:rPr kumimoji="0" lang="en-US" sz="500" b="1" i="0" u="none" strike="noStrike" kern="1200" cap="none" spc="0" normalizeH="0" baseline="0" noProof="0" dirty="0">
+                <a:ln>
+                  <a:noFill/>
+                </a:ln>
+                <a:solidFill>
+                  <a:prstClr val="black">
+                    <a:lumMod val="50000"/>
+                    <a:lumOff val="50000"/>
+                  </a:prstClr>
+                </a:solidFill>
+                <a:effectLst/>
+                <a:uLnTx/>
+                <a:uFillTx/>
+                <a:latin typeface="Consolas" panose="020B0609020204030204" pitchFamily="49" charset="0"/>
+                <a:ea typeface="+mn-ea"/>
+                <a:cs typeface="+mn-cs"/>
+              </a:rPr>
+              <a:t>OBX</a:t>
+            </a:r>
+            <a:r>
+              <a:rPr kumimoji="0" lang="en-US" sz="500" b="0" i="0" u="none" strike="noStrike" kern="1200" cap="none" spc="0" normalizeH="0" baseline="0" noProof="0" dirty="0">
+                <a:ln>
+                  <a:noFill/>
+                </a:ln>
+                <a:solidFill>
+                  <a:prstClr val="black">
+                    <a:lumMod val="50000"/>
+                    <a:lumOff val="50000"/>
+                  </a:prstClr>
+                </a:solidFill>
+                <a:effectLst/>
+                <a:uLnTx/>
+                <a:uFillTx/>
+                <a:latin typeface="Consolas" panose="020B0609020204030204" pitchFamily="49" charset="0"/>
+                <a:ea typeface="+mn-ea"/>
+                <a:cs typeface="+mn-cs"/>
+              </a:rPr>
+              <a:t>|11|NM|1975-2^Bilirubin </a:t>
+            </a:r>
+            <a:r>
+              <a:rPr kumimoji="0" lang="en-US" sz="500" b="0" i="0" u="none" strike="noStrike" kern="1200" cap="none" spc="0" normalizeH="0" baseline="0" noProof="0" dirty="0" err="1">
+                <a:ln>
+                  <a:noFill/>
+                </a:ln>
+                <a:solidFill>
+                  <a:prstClr val="black">
+                    <a:lumMod val="50000"/>
+                    <a:lumOff val="50000"/>
+                  </a:prstClr>
+                </a:solidFill>
+                <a:effectLst/>
+                <a:uLnTx/>
+                <a:uFillTx/>
+                <a:latin typeface="Consolas" panose="020B0609020204030204" pitchFamily="49" charset="0"/>
+                <a:ea typeface="+mn-ea"/>
+                <a:cs typeface="+mn-cs"/>
+              </a:rPr>
+              <a:t>Total^LN</a:t>
+            </a:r>
+            <a:r>
+              <a:rPr kumimoji="0" lang="en-US" sz="500" b="0" i="0" u="none" strike="noStrike" kern="1200" cap="none" spc="0" normalizeH="0" baseline="0" noProof="0" dirty="0">
+                <a:ln>
+                  <a:noFill/>
+                </a:ln>
+                <a:solidFill>
+                  <a:prstClr val="black">
+                    <a:lumMod val="50000"/>
+                    <a:lumOff val="50000"/>
+                  </a:prstClr>
+                </a:solidFill>
+                <a:effectLst/>
+                <a:uLnTx/>
+                <a:uFillTx/>
+                <a:latin typeface="Consolas" panose="020B0609020204030204" pitchFamily="49" charset="0"/>
+                <a:ea typeface="+mn-ea"/>
+                <a:cs typeface="+mn-cs"/>
+              </a:rPr>
+              <a:t>||0.8|mg/dL|0.2-1.2|N|||F</a:t>
+            </a:r>
+          </a:p>
+          <a:p>
+            <a:pPr marL="57150" marR="0" lvl="0" indent="-57150" algn="l" defTabSz="914400" rtl="0" eaLnBrk="1" fontAlgn="t" latinLnBrk="0" hangingPunct="1">
+              <a:lnSpc>
+                <a:spcPct val="100000"/>
+              </a:lnSpc>
+              <a:spcBef>
+                <a:spcPts val="0"/>
+              </a:spcBef>
+              <a:spcAft>
+                <a:spcPts val="0"/>
+              </a:spcAft>
+              <a:buClrTx/>
+              <a:buSzTx/>
+              <a:buFontTx/>
+              <a:buNone/>
+              <a:tabLst/>
+              <a:defRPr/>
+            </a:pPr>
+            <a:r>
+              <a:rPr kumimoji="0" lang="en-US" sz="500" b="1" i="0" u="none" strike="noStrike" kern="1200" cap="none" spc="0" normalizeH="0" baseline="0" noProof="0" dirty="0">
+                <a:ln>
+                  <a:noFill/>
+                </a:ln>
+                <a:solidFill>
+                  <a:prstClr val="black">
+                    <a:lumMod val="50000"/>
+                    <a:lumOff val="50000"/>
+                  </a:prstClr>
+                </a:solidFill>
+                <a:effectLst/>
+                <a:uLnTx/>
+                <a:uFillTx/>
+                <a:latin typeface="Consolas" panose="020B0609020204030204" pitchFamily="49" charset="0"/>
+                <a:ea typeface="+mn-ea"/>
+                <a:cs typeface="+mn-cs"/>
+              </a:rPr>
+              <a:t>OBX</a:t>
+            </a:r>
+            <a:r>
+              <a:rPr kumimoji="0" lang="en-US" sz="500" b="0" i="0" u="none" strike="noStrike" kern="1200" cap="none" spc="0" normalizeH="0" baseline="0" noProof="0" dirty="0">
+                <a:ln>
+                  <a:noFill/>
+                </a:ln>
+                <a:solidFill>
+                  <a:prstClr val="black">
+                    <a:lumMod val="50000"/>
+                    <a:lumOff val="50000"/>
+                  </a:prstClr>
+                </a:solidFill>
+                <a:effectLst/>
+                <a:uLnTx/>
+                <a:uFillTx/>
+                <a:latin typeface="Consolas" panose="020B0609020204030204" pitchFamily="49" charset="0"/>
+                <a:ea typeface="+mn-ea"/>
+                <a:cs typeface="+mn-cs"/>
+              </a:rPr>
+              <a:t>|12|NM|1742-6^ALT^LN||32|U/L|7-55|N|||F</a:t>
+            </a:r>
+          </a:p>
+          <a:p>
+            <a:pPr marL="57150" marR="0" lvl="0" indent="-57150" algn="l" defTabSz="914400" rtl="0" eaLnBrk="1" fontAlgn="t" latinLnBrk="0" hangingPunct="1">
+              <a:lnSpc>
+                <a:spcPct val="100000"/>
+              </a:lnSpc>
+              <a:spcBef>
+                <a:spcPts val="0"/>
+              </a:spcBef>
+              <a:spcAft>
+                <a:spcPts val="0"/>
+              </a:spcAft>
+              <a:buClrTx/>
+              <a:buSzTx/>
+              <a:buFontTx/>
+              <a:buNone/>
+              <a:tabLst/>
+              <a:defRPr/>
+            </a:pPr>
+            <a:r>
+              <a:rPr kumimoji="0" lang="en-US" sz="500" b="1" i="0" u="none" strike="noStrike" kern="1200" cap="none" spc="0" normalizeH="0" baseline="0" noProof="0" dirty="0">
+                <a:ln>
+                  <a:noFill/>
+                </a:ln>
+                <a:solidFill>
+                  <a:prstClr val="black">
+                    <a:lumMod val="50000"/>
+                    <a:lumOff val="50000"/>
+                  </a:prstClr>
+                </a:solidFill>
+                <a:effectLst/>
+                <a:uLnTx/>
+                <a:uFillTx/>
+                <a:latin typeface="Consolas" panose="020B0609020204030204" pitchFamily="49" charset="0"/>
+                <a:ea typeface="+mn-ea"/>
+                <a:cs typeface="+mn-cs"/>
+              </a:rPr>
+              <a:t>OBX</a:t>
+            </a:r>
+            <a:r>
+              <a:rPr kumimoji="0" lang="en-US" sz="500" b="0" i="0" u="none" strike="noStrike" kern="1200" cap="none" spc="0" normalizeH="0" baseline="0" noProof="0" dirty="0">
+                <a:ln>
+                  <a:noFill/>
+                </a:ln>
+                <a:solidFill>
+                  <a:prstClr val="black">
+                    <a:lumMod val="50000"/>
+                    <a:lumOff val="50000"/>
+                  </a:prstClr>
+                </a:solidFill>
+                <a:effectLst/>
+                <a:uLnTx/>
+                <a:uFillTx/>
+                <a:latin typeface="Consolas" panose="020B0609020204030204" pitchFamily="49" charset="0"/>
+                <a:ea typeface="+mn-ea"/>
+                <a:cs typeface="+mn-cs"/>
+              </a:rPr>
+              <a:t>|13|NM|1920-8^AST^LN||28|U/L|10-40|N|||F</a:t>
+            </a:r>
+          </a:p>
+          <a:p>
+            <a:pPr marL="57150" marR="0" lvl="0" indent="-57150" algn="l" defTabSz="914400" rtl="0" eaLnBrk="1" fontAlgn="t" latinLnBrk="0" hangingPunct="1">
+              <a:lnSpc>
+                <a:spcPct val="100000"/>
+              </a:lnSpc>
+              <a:spcBef>
+                <a:spcPts val="0"/>
+              </a:spcBef>
+              <a:spcAft>
+                <a:spcPts val="0"/>
+              </a:spcAft>
+              <a:buClrTx/>
+              <a:buSzTx/>
+              <a:buFontTx/>
+              <a:buNone/>
+              <a:tabLst/>
+              <a:defRPr/>
+            </a:pPr>
+            <a:r>
+              <a:rPr kumimoji="0" lang="en-US" sz="500" b="1" i="0" u="none" strike="noStrike" kern="1200" cap="none" spc="0" normalizeH="0" baseline="0" noProof="0" dirty="0">
+                <a:ln>
+                  <a:noFill/>
+                </a:ln>
+                <a:solidFill>
+                  <a:prstClr val="black">
+                    <a:lumMod val="50000"/>
+                    <a:lumOff val="50000"/>
+                  </a:prstClr>
+                </a:solidFill>
+                <a:effectLst/>
+                <a:uLnTx/>
+                <a:uFillTx/>
+                <a:latin typeface="Consolas" panose="020B0609020204030204" pitchFamily="49" charset="0"/>
+                <a:ea typeface="+mn-ea"/>
+                <a:cs typeface="+mn-cs"/>
+              </a:rPr>
+              <a:t>OBX</a:t>
+            </a:r>
+            <a:r>
+              <a:rPr kumimoji="0" lang="en-US" sz="500" b="0" i="0" u="none" strike="noStrike" kern="1200" cap="none" spc="0" normalizeH="0" baseline="0" noProof="0" dirty="0">
+                <a:ln>
+                  <a:noFill/>
+                </a:ln>
+                <a:solidFill>
+                  <a:prstClr val="black">
+                    <a:lumMod val="50000"/>
+                    <a:lumOff val="50000"/>
+                  </a:prstClr>
+                </a:solidFill>
+                <a:effectLst/>
+                <a:uLnTx/>
+                <a:uFillTx/>
+                <a:latin typeface="Consolas" panose="020B0609020204030204" pitchFamily="49" charset="0"/>
+                <a:ea typeface="+mn-ea"/>
+                <a:cs typeface="+mn-cs"/>
+              </a:rPr>
+              <a:t>|14|NM|6768-6^Alkaline </a:t>
+            </a:r>
+            <a:r>
+              <a:rPr kumimoji="0" lang="en-US" sz="500" b="0" i="0" u="none" strike="noStrike" kern="1200" cap="none" spc="0" normalizeH="0" baseline="0" noProof="0" dirty="0" err="1">
+                <a:ln>
+                  <a:noFill/>
+                </a:ln>
+                <a:solidFill>
+                  <a:prstClr val="black">
+                    <a:lumMod val="50000"/>
+                    <a:lumOff val="50000"/>
+                  </a:prstClr>
+                </a:solidFill>
+                <a:effectLst/>
+                <a:uLnTx/>
+                <a:uFillTx/>
+                <a:latin typeface="Consolas" panose="020B0609020204030204" pitchFamily="49" charset="0"/>
+                <a:ea typeface="+mn-ea"/>
+                <a:cs typeface="+mn-cs"/>
+              </a:rPr>
+              <a:t>Phosphatase^LN</a:t>
+            </a:r>
+            <a:r>
+              <a:rPr kumimoji="0" lang="en-US" sz="500" b="0" i="0" u="none" strike="noStrike" kern="1200" cap="none" spc="0" normalizeH="0" baseline="0" noProof="0" dirty="0">
+                <a:ln>
+                  <a:noFill/>
+                </a:ln>
+                <a:solidFill>
+                  <a:prstClr val="black">
+                    <a:lumMod val="50000"/>
+                    <a:lumOff val="50000"/>
+                  </a:prstClr>
+                </a:solidFill>
+                <a:effectLst/>
+                <a:uLnTx/>
+                <a:uFillTx/>
+                <a:latin typeface="Consolas" panose="020B0609020204030204" pitchFamily="49" charset="0"/>
+                <a:ea typeface="+mn-ea"/>
+                <a:cs typeface="+mn-cs"/>
+              </a:rPr>
+              <a:t>||88|U/L|40-129|N|||F</a:t>
+            </a:r>
+          </a:p>
+        </p:txBody>
+      </p:sp>
+      <p:pic>
+        <p:nvPicPr>
+          <p:cNvPr id="16" name="Picture 15">
+            <a:extLst>
+              <a:ext uri="{FF2B5EF4-FFF2-40B4-BE49-F238E27FC236}">
+                <a16:creationId xmlns:a16="http://schemas.microsoft.com/office/drawing/2014/main" id="{53C02817-6D68-667C-4080-C1C48D0D1735}"/>
+              </a:ext>
+            </a:extLst>
+          </p:cNvPr>
+          <p:cNvPicPr>
+            <a:picLocks noChangeAspect="1"/>
+          </p:cNvPicPr>
+          <p:nvPr/>
+        </p:nvPicPr>
+        <p:blipFill>
+          <a:blip r:embed="rId2"/>
+          <a:stretch>
+            <a:fillRect/>
+          </a:stretch>
+        </p:blipFill>
+        <p:spPr>
+          <a:xfrm>
+            <a:off x="448195" y="3307080"/>
+            <a:ext cx="2373558" cy="2833272"/>
+          </a:xfrm>
+          <a:prstGeom prst="rect">
+            <a:avLst/>
+          </a:prstGeom>
+        </p:spPr>
+      </p:pic>
+      <p:sp>
+        <p:nvSpPr>
+          <p:cNvPr id="19" name="TextBox 18">
+            <a:extLst>
+              <a:ext uri="{FF2B5EF4-FFF2-40B4-BE49-F238E27FC236}">
+                <a16:creationId xmlns:a16="http://schemas.microsoft.com/office/drawing/2014/main" id="{062AFB4B-9D0B-2D02-01DB-296E156C1168}"/>
+              </a:ext>
+            </a:extLst>
+          </p:cNvPr>
+          <p:cNvSpPr txBox="1"/>
+          <p:nvPr/>
+        </p:nvSpPr>
+        <p:spPr>
+          <a:xfrm>
+            <a:off x="6675121" y="884967"/>
+            <a:ext cx="2614444" cy="830997"/>
+          </a:xfrm>
+          <a:prstGeom prst="rect">
+            <a:avLst/>
+          </a:prstGeom>
+          <a:noFill/>
+        </p:spPr>
+        <p:txBody>
+          <a:bodyPr wrap="square" rtlCol="0">
+            <a:spAutoFit/>
+          </a:bodyPr>
+          <a:lstStyle/>
+          <a:p>
+            <a:pPr marL="0" marR="0" lvl="0" indent="0" algn="ctr" defTabSz="914400" rtl="0" eaLnBrk="1" fontAlgn="auto" latinLnBrk="0" hangingPunct="1">
+              <a:lnSpc>
+                <a:spcPct val="100000"/>
+              </a:lnSpc>
+              <a:spcBef>
+                <a:spcPts val="0"/>
+              </a:spcBef>
+              <a:spcAft>
+                <a:spcPts val="0"/>
+              </a:spcAft>
+              <a:buClrTx/>
+              <a:buSzTx/>
+              <a:buFontTx/>
+              <a:buNone/>
+              <a:tabLst/>
+              <a:defRPr/>
+            </a:pPr>
+            <a:r>
+              <a:rPr kumimoji="0" lang="en-US" sz="2400" b="1" i="0" u="none" strike="noStrike" kern="1200" cap="none" spc="0" normalizeH="0" baseline="0" noProof="0" dirty="0">
+                <a:ln>
+                  <a:noFill/>
+                </a:ln>
+                <a:solidFill>
+                  <a:prstClr val="black"/>
+                </a:solidFill>
+                <a:effectLst/>
+                <a:uLnTx/>
+                <a:uFillTx/>
+                <a:latin typeface="Calibri" panose="020F0502020204030204" pitchFamily="34" charset="0"/>
+                <a:ea typeface="Calibri" panose="020F0502020204030204" pitchFamily="34" charset="0"/>
+                <a:cs typeface="Calibri" panose="020F0502020204030204" pitchFamily="34" charset="0"/>
+              </a:rPr>
+              <a:t>“Flattened”</a:t>
+            </a:r>
+            <a:br>
+              <a:rPr kumimoji="0" lang="en-US" sz="2400" b="1" i="0" u="none" strike="noStrike" kern="1200" cap="none" spc="0" normalizeH="0" baseline="0" noProof="0" dirty="0">
+                <a:ln>
+                  <a:noFill/>
+                </a:ln>
+                <a:solidFill>
+                  <a:prstClr val="black"/>
+                </a:solidFill>
+                <a:effectLst/>
+                <a:uLnTx/>
+                <a:uFillTx/>
+                <a:latin typeface="Calibri" panose="020F0502020204030204" pitchFamily="34" charset="0"/>
+                <a:ea typeface="Calibri" panose="020F0502020204030204" pitchFamily="34" charset="0"/>
+                <a:cs typeface="Calibri" panose="020F0502020204030204" pitchFamily="34" charset="0"/>
+              </a:rPr>
+            </a:br>
+            <a:r>
+              <a:rPr kumimoji="0" lang="en-US" sz="2400" b="1" i="0" u="none" strike="noStrike" kern="1200" cap="none" spc="0" normalizeH="0" baseline="0" noProof="0" dirty="0">
+                <a:ln>
+                  <a:noFill/>
+                </a:ln>
+                <a:solidFill>
+                  <a:prstClr val="black"/>
+                </a:solidFill>
+                <a:effectLst/>
+                <a:uLnTx/>
+                <a:uFillTx/>
+                <a:latin typeface="Calibri" panose="020F0502020204030204" pitchFamily="34" charset="0"/>
+                <a:ea typeface="Calibri" panose="020F0502020204030204" pitchFamily="34" charset="0"/>
+                <a:cs typeface="Calibri" panose="020F0502020204030204" pitchFamily="34" charset="0"/>
+              </a:rPr>
+              <a:t>PIQI Data Model</a:t>
+            </a:r>
+          </a:p>
+        </p:txBody>
+      </p:sp>
+      <p:cxnSp>
+        <p:nvCxnSpPr>
+          <p:cNvPr id="22" name="Straight Arrow Connector 21">
+            <a:extLst>
+              <a:ext uri="{FF2B5EF4-FFF2-40B4-BE49-F238E27FC236}">
+                <a16:creationId xmlns:a16="http://schemas.microsoft.com/office/drawing/2014/main" id="{6E42330E-F94D-32AD-4EC0-D9C9D51B4D98}"/>
+              </a:ext>
+            </a:extLst>
+          </p:cNvPr>
+          <p:cNvCxnSpPr>
+            <a:cxnSpLocks/>
+          </p:cNvCxnSpPr>
+          <p:nvPr/>
+        </p:nvCxnSpPr>
+        <p:spPr>
+          <a:xfrm>
+            <a:off x="5883088" y="2890648"/>
+            <a:ext cx="1278055" cy="916626"/>
+          </a:xfrm>
+          <a:prstGeom prst="straightConnector1">
+            <a:avLst/>
+          </a:prstGeom>
+          <a:ln w="76200">
+            <a:solidFill>
+              <a:schemeClr val="tx2">
+                <a:lumMod val="50000"/>
+                <a:lumOff val="50000"/>
+              </a:schemeClr>
+            </a:solidFill>
+            <a:tailEnd type="triangle"/>
+          </a:ln>
+        </p:spPr>
+        <p:style>
+          <a:lnRef idx="2">
+            <a:schemeClr val="accent1"/>
+          </a:lnRef>
+          <a:fillRef idx="0">
+            <a:schemeClr val="accent1"/>
+          </a:fillRef>
+          <a:effectRef idx="1">
+            <a:schemeClr val="accent1"/>
+          </a:effectRef>
+          <a:fontRef idx="minor">
+            <a:schemeClr val="tx1"/>
+          </a:fontRef>
+        </p:style>
+      </p:cxnSp>
+      <p:sp>
+        <p:nvSpPr>
+          <p:cNvPr id="11" name="TextBox 10">
+            <a:extLst>
+              <a:ext uri="{FF2B5EF4-FFF2-40B4-BE49-F238E27FC236}">
+                <a16:creationId xmlns:a16="http://schemas.microsoft.com/office/drawing/2014/main" id="{4CE91796-EA8E-5D3F-17E3-328515BC5616}"/>
+              </a:ext>
+            </a:extLst>
+          </p:cNvPr>
+          <p:cNvSpPr txBox="1"/>
+          <p:nvPr/>
+        </p:nvSpPr>
+        <p:spPr>
+          <a:xfrm>
+            <a:off x="3024504" y="3176543"/>
+            <a:ext cx="2812565" cy="338554"/>
+          </a:xfrm>
+          <a:prstGeom prst="rect">
+            <a:avLst/>
+          </a:prstGeom>
+          <a:noFill/>
+        </p:spPr>
+        <p:txBody>
+          <a:bodyPr wrap="none" rtlCol="0">
+            <a:spAutoFit/>
+          </a:bodyPr>
+          <a:lstStyle/>
+          <a:p>
+            <a:pPr marL="0" marR="0" lvl="0" indent="0" algn="l" defTabSz="914400" rtl="0" eaLnBrk="1" fontAlgn="auto" latinLnBrk="0" hangingPunct="1">
+              <a:lnSpc>
+                <a:spcPct val="100000"/>
+              </a:lnSpc>
+              <a:spcBef>
+                <a:spcPts val="0"/>
+              </a:spcBef>
+              <a:spcAft>
+                <a:spcPts val="0"/>
+              </a:spcAft>
+              <a:buClrTx/>
+              <a:buSzTx/>
+              <a:buFontTx/>
+              <a:buNone/>
+              <a:tabLst/>
+              <a:defRPr/>
+            </a:pPr>
+            <a:r>
+              <a:rPr kumimoji="0" lang="en-US" sz="1600" b="0" i="0" u="none" strike="noStrike" kern="1200" cap="none" spc="0" normalizeH="0" baseline="0" noProof="0" dirty="0">
+                <a:ln>
+                  <a:noFill/>
+                </a:ln>
+                <a:solidFill>
+                  <a:prstClr val="black"/>
+                </a:solidFill>
+                <a:effectLst/>
+                <a:uLnTx/>
+                <a:uFillTx/>
+                <a:latin typeface="Calibri" panose="020F0502020204030204" pitchFamily="34" charset="0"/>
+                <a:ea typeface="Calibri" panose="020F0502020204030204" pitchFamily="34" charset="0"/>
+                <a:cs typeface="Calibri" panose="020F0502020204030204" pitchFamily="34" charset="0"/>
+              </a:rPr>
+              <a:t>HL7 FHIR Observation Resource</a:t>
+            </a:r>
+          </a:p>
+        </p:txBody>
+      </p:sp>
+      <p:sp>
+        <p:nvSpPr>
+          <p:cNvPr id="7" name="Rectangle 6">
+            <a:extLst>
+              <a:ext uri="{FF2B5EF4-FFF2-40B4-BE49-F238E27FC236}">
+                <a16:creationId xmlns:a16="http://schemas.microsoft.com/office/drawing/2014/main" id="{70EC1916-9115-0462-B3C2-D3E46DB408C5}"/>
+              </a:ext>
+            </a:extLst>
+          </p:cNvPr>
+          <p:cNvSpPr/>
+          <p:nvPr/>
+        </p:nvSpPr>
+        <p:spPr>
+          <a:xfrm>
+            <a:off x="3156695" y="3477845"/>
+            <a:ext cx="2726393" cy="2964641"/>
+          </a:xfrm>
+          <a:prstGeom prst="rect">
+            <a:avLst/>
+          </a:prstGeom>
+          <a:solidFill>
+            <a:schemeClr val="accent5">
+              <a:lumMod val="40000"/>
+              <a:lumOff val="60000"/>
+            </a:schemeClr>
+          </a:solidFill>
+          <a:ln>
+            <a:solidFill>
+              <a:schemeClr val="accent5">
+                <a:lumMod val="40000"/>
+                <a:lumOff val="60000"/>
+              </a:schemeClr>
+            </a:solidFill>
+          </a:ln>
+        </p:spPr>
+        <p:style>
+          <a:lnRef idx="2">
+            <a:schemeClr val="accent1">
+              <a:shade val="15000"/>
+            </a:schemeClr>
+          </a:lnRef>
+          <a:fillRef idx="1">
+            <a:schemeClr val="accent1"/>
+          </a:fillRef>
+          <a:effectRef idx="0">
+            <a:schemeClr val="accent1"/>
+          </a:effectRef>
+          <a:fontRef idx="minor">
+            <a:schemeClr val="lt1"/>
+          </a:fontRef>
+        </p:style>
+        <p:txBody>
+          <a:bodyPr rtlCol="0" anchor="ctr"/>
+          <a:lstStyle/>
+          <a:p>
+            <a:pPr marL="0" marR="0" lvl="0" indent="0" algn="ctr" defTabSz="914400" rtl="0" eaLnBrk="1" fontAlgn="auto" latinLnBrk="0" hangingPunct="1">
+              <a:lnSpc>
+                <a:spcPct val="100000"/>
+              </a:lnSpc>
+              <a:spcBef>
+                <a:spcPts val="0"/>
+              </a:spcBef>
+              <a:spcAft>
+                <a:spcPts val="0"/>
+              </a:spcAft>
+              <a:buClrTx/>
+              <a:buSzTx/>
+              <a:buFontTx/>
+              <a:buNone/>
+              <a:tabLst/>
+              <a:defRPr/>
+            </a:pPr>
+            <a:endParaRPr kumimoji="0" lang="en-US" sz="1800" b="0" i="0" u="none" strike="noStrike" kern="1200" cap="none" spc="0" normalizeH="0" baseline="0" noProof="0">
+              <a:ln>
+                <a:noFill/>
+              </a:ln>
+              <a:solidFill>
+                <a:prstClr val="white"/>
+              </a:solidFill>
+              <a:effectLst/>
+              <a:uLnTx/>
+              <a:uFillTx/>
+              <a:latin typeface="Aptos" panose="02110004020202020204"/>
+              <a:ea typeface="+mn-ea"/>
+              <a:cs typeface="+mn-cs"/>
+            </a:endParaRPr>
+          </a:p>
+        </p:txBody>
+      </p:sp>
+      <p:pic>
+        <p:nvPicPr>
+          <p:cNvPr id="18" name="Picture 17">
+            <a:extLst>
+              <a:ext uri="{FF2B5EF4-FFF2-40B4-BE49-F238E27FC236}">
+                <a16:creationId xmlns:a16="http://schemas.microsoft.com/office/drawing/2014/main" id="{80DEFF8B-CA6D-88F7-796E-66E0ABF6C9FF}"/>
+              </a:ext>
+            </a:extLst>
+          </p:cNvPr>
+          <p:cNvPicPr>
+            <a:picLocks noChangeAspect="1"/>
+          </p:cNvPicPr>
+          <p:nvPr/>
+        </p:nvPicPr>
+        <p:blipFill>
+          <a:blip r:embed="rId3"/>
+          <a:stretch>
+            <a:fillRect/>
+          </a:stretch>
+        </p:blipFill>
+        <p:spPr>
+          <a:xfrm>
+            <a:off x="3329929" y="3561384"/>
+            <a:ext cx="2379581" cy="2801316"/>
+          </a:xfrm>
+          <a:prstGeom prst="rect">
+            <a:avLst/>
+          </a:prstGeom>
+        </p:spPr>
+      </p:pic>
+      <p:cxnSp>
+        <p:nvCxnSpPr>
+          <p:cNvPr id="28" name="Straight Arrow Connector 27">
+            <a:extLst>
+              <a:ext uri="{FF2B5EF4-FFF2-40B4-BE49-F238E27FC236}">
+                <a16:creationId xmlns:a16="http://schemas.microsoft.com/office/drawing/2014/main" id="{4AC0EA29-2837-1CAC-F13C-C22A213C070E}"/>
+              </a:ext>
+            </a:extLst>
+          </p:cNvPr>
+          <p:cNvCxnSpPr>
+            <a:cxnSpLocks/>
+          </p:cNvCxnSpPr>
+          <p:nvPr/>
+        </p:nvCxnSpPr>
+        <p:spPr>
+          <a:xfrm flipV="1">
+            <a:off x="5789119" y="3912665"/>
+            <a:ext cx="1372024" cy="1021328"/>
+          </a:xfrm>
+          <a:prstGeom prst="straightConnector1">
+            <a:avLst/>
+          </a:prstGeom>
+          <a:ln w="76200">
+            <a:solidFill>
+              <a:schemeClr val="accent5">
+                <a:lumMod val="40000"/>
+                <a:lumOff val="60000"/>
+              </a:schemeClr>
+            </a:solidFill>
+            <a:tailEnd type="triangle"/>
+          </a:ln>
+        </p:spPr>
+        <p:style>
+          <a:lnRef idx="2">
+            <a:schemeClr val="accent1"/>
+          </a:lnRef>
+          <a:fillRef idx="0">
+            <a:schemeClr val="accent1"/>
+          </a:fillRef>
+          <a:effectRef idx="1">
+            <a:schemeClr val="accent1"/>
+          </a:effectRef>
+          <a:fontRef idx="minor">
+            <a:schemeClr val="tx1"/>
+          </a:fontRef>
+        </p:style>
+      </p:cxnSp>
+      <p:sp>
+        <p:nvSpPr>
+          <p:cNvPr id="51" name="TextBox 50">
+            <a:extLst>
+              <a:ext uri="{FF2B5EF4-FFF2-40B4-BE49-F238E27FC236}">
+                <a16:creationId xmlns:a16="http://schemas.microsoft.com/office/drawing/2014/main" id="{BB2CB48E-D6F5-3160-3993-3860610752D1}"/>
+              </a:ext>
+            </a:extLst>
+          </p:cNvPr>
+          <p:cNvSpPr txBox="1"/>
+          <p:nvPr/>
+        </p:nvSpPr>
+        <p:spPr>
+          <a:xfrm>
+            <a:off x="6675120" y="1764530"/>
+            <a:ext cx="2614445" cy="338554"/>
+          </a:xfrm>
+          <a:prstGeom prst="rect">
+            <a:avLst/>
+          </a:prstGeom>
+          <a:noFill/>
+        </p:spPr>
+        <p:txBody>
+          <a:bodyPr wrap="square" rtlCol="0">
+            <a:spAutoFit/>
+          </a:bodyPr>
+          <a:lstStyle/>
+          <a:p>
+            <a:pPr marL="0" marR="0" lvl="0" indent="0" algn="ctr" defTabSz="914400" rtl="0" eaLnBrk="1" fontAlgn="auto" latinLnBrk="0" hangingPunct="1">
+              <a:lnSpc>
+                <a:spcPct val="100000"/>
+              </a:lnSpc>
+              <a:spcBef>
+                <a:spcPts val="0"/>
+              </a:spcBef>
+              <a:spcAft>
+                <a:spcPts val="0"/>
+              </a:spcAft>
+              <a:buClrTx/>
+              <a:buSzTx/>
+              <a:buFontTx/>
+              <a:buNone/>
+              <a:tabLst/>
+              <a:defRPr/>
+            </a:pPr>
+            <a:r>
+              <a:rPr kumimoji="0" lang="en-US" sz="1600" b="0" i="0" u="none" strike="noStrike" kern="1200" cap="none" spc="0" normalizeH="0" baseline="0" noProof="0" dirty="0">
+                <a:ln>
+                  <a:noFill/>
+                </a:ln>
+                <a:solidFill>
+                  <a:prstClr val="black"/>
+                </a:solidFill>
+                <a:effectLst/>
+                <a:uLnTx/>
+                <a:uFillTx/>
+                <a:latin typeface="Calibri" panose="020F0502020204030204" pitchFamily="34" charset="0"/>
+                <a:ea typeface="Calibri" panose="020F0502020204030204" pitchFamily="34" charset="0"/>
+                <a:cs typeface="Calibri" panose="020F0502020204030204" pitchFamily="34" charset="0"/>
+              </a:rPr>
+              <a:t>Data Class: </a:t>
+            </a:r>
+            <a:r>
+              <a:rPr kumimoji="0" lang="en-US" sz="1600" b="1" i="0" u="none" strike="noStrike" kern="1200" cap="none" spc="0" normalizeH="0" baseline="0" noProof="0" dirty="0">
+                <a:ln>
+                  <a:noFill/>
+                </a:ln>
+                <a:solidFill>
+                  <a:prstClr val="black"/>
+                </a:solidFill>
+                <a:effectLst/>
+                <a:uLnTx/>
+                <a:uFillTx/>
+                <a:latin typeface="Calibri" panose="020F0502020204030204" pitchFamily="34" charset="0"/>
+                <a:ea typeface="Calibri" panose="020F0502020204030204" pitchFamily="34" charset="0"/>
+                <a:cs typeface="Calibri" panose="020F0502020204030204" pitchFamily="34" charset="0"/>
+              </a:rPr>
+              <a:t>Demographics</a:t>
+            </a:r>
+          </a:p>
+        </p:txBody>
+      </p:sp>
+      <p:sp>
+        <p:nvSpPr>
+          <p:cNvPr id="52" name="TextBox 51">
+            <a:extLst>
+              <a:ext uri="{FF2B5EF4-FFF2-40B4-BE49-F238E27FC236}">
+                <a16:creationId xmlns:a16="http://schemas.microsoft.com/office/drawing/2014/main" id="{95733310-C998-7328-600A-5851AB00AD98}"/>
+              </a:ext>
+            </a:extLst>
+          </p:cNvPr>
+          <p:cNvSpPr txBox="1"/>
+          <p:nvPr/>
+        </p:nvSpPr>
+        <p:spPr>
+          <a:xfrm>
+            <a:off x="6675120" y="3131745"/>
+            <a:ext cx="2614445" cy="338554"/>
+          </a:xfrm>
+          <a:prstGeom prst="rect">
+            <a:avLst/>
+          </a:prstGeom>
+          <a:noFill/>
+        </p:spPr>
+        <p:txBody>
+          <a:bodyPr wrap="square" rtlCol="0">
+            <a:spAutoFit/>
+          </a:bodyPr>
+          <a:lstStyle/>
+          <a:p>
+            <a:pPr marL="0" marR="0" lvl="0" indent="0" algn="ctr" defTabSz="914400" rtl="0" eaLnBrk="1" fontAlgn="auto" latinLnBrk="0" hangingPunct="1">
+              <a:lnSpc>
+                <a:spcPct val="100000"/>
+              </a:lnSpc>
+              <a:spcBef>
+                <a:spcPts val="0"/>
+              </a:spcBef>
+              <a:spcAft>
+                <a:spcPts val="0"/>
+              </a:spcAft>
+              <a:buClrTx/>
+              <a:buSzTx/>
+              <a:buFontTx/>
+              <a:buNone/>
+              <a:tabLst/>
+              <a:defRPr/>
+            </a:pPr>
+            <a:r>
+              <a:rPr kumimoji="0" lang="en-US" sz="1600" b="0" i="0" u="none" strike="noStrike" kern="1200" cap="none" spc="0" normalizeH="0" baseline="0" noProof="0" dirty="0">
+                <a:ln>
+                  <a:noFill/>
+                </a:ln>
+                <a:solidFill>
+                  <a:prstClr val="black"/>
+                </a:solidFill>
+                <a:effectLst/>
+                <a:uLnTx/>
+                <a:uFillTx/>
+                <a:latin typeface="Calibri" panose="020F0502020204030204" pitchFamily="34" charset="0"/>
+                <a:ea typeface="Calibri" panose="020F0502020204030204" pitchFamily="34" charset="0"/>
+                <a:cs typeface="Calibri" panose="020F0502020204030204" pitchFamily="34" charset="0"/>
+              </a:rPr>
+              <a:t>Data Class: </a:t>
+            </a:r>
+            <a:r>
+              <a:rPr kumimoji="0" lang="en-US" sz="1600" b="1" i="0" u="none" strike="noStrike" kern="1200" cap="none" spc="0" normalizeH="0" baseline="0" noProof="0" dirty="0" err="1">
+                <a:ln>
+                  <a:noFill/>
+                </a:ln>
+                <a:solidFill>
+                  <a:prstClr val="black"/>
+                </a:solidFill>
+                <a:effectLst/>
+                <a:uLnTx/>
+                <a:uFillTx/>
+                <a:latin typeface="Calibri" panose="020F0502020204030204" pitchFamily="34" charset="0"/>
+                <a:ea typeface="Calibri" panose="020F0502020204030204" pitchFamily="34" charset="0"/>
+                <a:cs typeface="Calibri" panose="020F0502020204030204" pitchFamily="34" charset="0"/>
+              </a:rPr>
+              <a:t>LabResult</a:t>
+            </a:r>
+            <a:endParaRPr kumimoji="0" lang="en-US" sz="1600" b="1" i="0" u="none" strike="noStrike" kern="1200" cap="none" spc="0" normalizeH="0" baseline="0" noProof="0" dirty="0">
+              <a:ln>
+                <a:noFill/>
+              </a:ln>
+              <a:solidFill>
+                <a:prstClr val="black"/>
+              </a:solidFill>
+              <a:effectLst/>
+              <a:uLnTx/>
+              <a:uFillTx/>
+              <a:latin typeface="Calibri" panose="020F0502020204030204" pitchFamily="34" charset="0"/>
+              <a:ea typeface="Calibri" panose="020F0502020204030204" pitchFamily="34" charset="0"/>
+              <a:cs typeface="Calibri" panose="020F0502020204030204" pitchFamily="34" charset="0"/>
+            </a:endParaRPr>
+          </a:p>
+        </p:txBody>
+      </p:sp>
+      <p:sp>
+        <p:nvSpPr>
+          <p:cNvPr id="55" name="TextBox 54">
+            <a:extLst>
+              <a:ext uri="{FF2B5EF4-FFF2-40B4-BE49-F238E27FC236}">
+                <a16:creationId xmlns:a16="http://schemas.microsoft.com/office/drawing/2014/main" id="{0EF0BE26-4F13-313B-046A-CE9099BAED31}"/>
+              </a:ext>
+            </a:extLst>
+          </p:cNvPr>
+          <p:cNvSpPr txBox="1"/>
+          <p:nvPr/>
+        </p:nvSpPr>
+        <p:spPr>
+          <a:xfrm>
+            <a:off x="7239873" y="2177220"/>
+            <a:ext cx="1763493" cy="984885"/>
+          </a:xfrm>
+          <a:prstGeom prst="rect">
+            <a:avLst/>
+          </a:prstGeom>
+          <a:noFill/>
+        </p:spPr>
+        <p:txBody>
+          <a:bodyPr wrap="square" rtlCol="0">
+            <a:spAutoFit/>
+          </a:bodyPr>
+          <a:lstStyle/>
+          <a:p>
+            <a:pPr marL="114300" marR="0" lvl="0" indent="-114300" algn="l" defTabSz="914400" rtl="0" eaLnBrk="1" fontAlgn="auto" latinLnBrk="0" hangingPunct="1">
+              <a:lnSpc>
+                <a:spcPct val="100000"/>
+              </a:lnSpc>
+              <a:spcBef>
+                <a:spcPts val="0"/>
+              </a:spcBef>
+              <a:spcAft>
+                <a:spcPts val="0"/>
+              </a:spcAft>
+              <a:buClrTx/>
+              <a:buSzTx/>
+              <a:buFontTx/>
+              <a:buNone/>
+              <a:tabLst/>
+              <a:defRPr/>
+            </a:pPr>
+            <a:r>
+              <a:rPr kumimoji="0" lang="en-US" sz="1600" b="0" i="0" u="none" strike="noStrike" kern="1200" cap="none" spc="0" normalizeH="0" baseline="0" noProof="0" dirty="0">
+                <a:ln>
+                  <a:noFill/>
+                </a:ln>
+                <a:solidFill>
+                  <a:prstClr val="black"/>
+                </a:solidFill>
+                <a:effectLst/>
+                <a:uLnTx/>
+                <a:uFillTx/>
+                <a:latin typeface="Calibri" panose="020F0502020204030204" pitchFamily="34" charset="0"/>
+                <a:ea typeface="Calibri" panose="020F0502020204030204" pitchFamily="34" charset="0"/>
+                <a:cs typeface="Calibri" panose="020F0502020204030204" pitchFamily="34" charset="0"/>
+              </a:rPr>
+              <a:t>Attribute: </a:t>
+            </a:r>
+            <a:r>
+              <a:rPr kumimoji="0" lang="en-US" sz="1600" b="1" i="0" u="none" strike="noStrike" kern="1200" cap="none" spc="0" normalizeH="0" baseline="0" noProof="0" dirty="0" err="1">
+                <a:ln>
+                  <a:noFill/>
+                </a:ln>
+                <a:solidFill>
+                  <a:prstClr val="black"/>
+                </a:solidFill>
+                <a:effectLst/>
+                <a:uLnTx/>
+                <a:uFillTx/>
+                <a:latin typeface="Calibri" panose="020F0502020204030204" pitchFamily="34" charset="0"/>
+                <a:ea typeface="Calibri" panose="020F0502020204030204" pitchFamily="34" charset="0"/>
+                <a:cs typeface="Calibri" panose="020F0502020204030204" pitchFamily="34" charset="0"/>
+              </a:rPr>
+              <a:t>birthDate</a:t>
+            </a:r>
+            <a:br>
+              <a:rPr kumimoji="0" lang="en-US" sz="1600" b="1" i="0" u="none" strike="noStrike" kern="1200" cap="none" spc="0" normalizeH="0" baseline="0" noProof="0" dirty="0">
+                <a:ln>
+                  <a:noFill/>
+                </a:ln>
+                <a:solidFill>
+                  <a:prstClr val="black"/>
+                </a:solidFill>
+                <a:effectLst/>
+                <a:uLnTx/>
+                <a:uFillTx/>
+                <a:latin typeface="Calibri" panose="020F0502020204030204" pitchFamily="34" charset="0"/>
+                <a:ea typeface="Calibri" panose="020F0502020204030204" pitchFamily="34" charset="0"/>
+                <a:cs typeface="Calibri" panose="020F0502020204030204" pitchFamily="34" charset="0"/>
+              </a:rPr>
+            </a:br>
+            <a:r>
+              <a:rPr kumimoji="0" lang="en-US" sz="1400" b="1" i="0" u="none" strike="noStrike" kern="1200" cap="none" spc="0" normalizeH="0" baseline="0" noProof="0" dirty="0">
+                <a:ln>
+                  <a:noFill/>
+                </a:ln>
+                <a:solidFill>
+                  <a:prstClr val="black">
+                    <a:lumMod val="50000"/>
+                    <a:lumOff val="50000"/>
+                  </a:prstClr>
+                </a:solidFill>
+                <a:effectLst/>
+                <a:uLnTx/>
+                <a:uFillTx/>
+                <a:latin typeface="Consolas" panose="020B0609020204030204" pitchFamily="49" charset="0"/>
+                <a:ea typeface="Calibri" panose="020F0502020204030204" pitchFamily="34" charset="0"/>
+                <a:cs typeface="Calibri" panose="020F0502020204030204" pitchFamily="34" charset="0"/>
+              </a:rPr>
+              <a:t>"1980-01-15"</a:t>
+            </a:r>
+            <a:br>
+              <a:rPr kumimoji="0" lang="en-US" sz="1200" b="1" i="0" u="none" strike="noStrike" kern="1200" cap="none" spc="0" normalizeH="0" baseline="0" noProof="0" dirty="0">
+                <a:ln>
+                  <a:noFill/>
+                </a:ln>
+                <a:solidFill>
+                  <a:prstClr val="black"/>
+                </a:solidFill>
+                <a:effectLst/>
+                <a:uLnTx/>
+                <a:uFillTx/>
+                <a:latin typeface="Consolas" panose="020B0609020204030204" pitchFamily="49" charset="0"/>
+                <a:ea typeface="Calibri" panose="020F0502020204030204" pitchFamily="34" charset="0"/>
+                <a:cs typeface="Calibri" panose="020F0502020204030204" pitchFamily="34" charset="0"/>
+              </a:rPr>
+            </a:br>
+            <a:r>
+              <a:rPr kumimoji="0" lang="en-US" sz="1200" b="1" i="0" u="none" strike="noStrike" kern="1200" cap="none" spc="0" normalizeH="0" baseline="0" noProof="0" dirty="0">
+                <a:ln>
+                  <a:noFill/>
+                </a:ln>
+                <a:solidFill>
+                  <a:prstClr val="black"/>
+                </a:solidFill>
+                <a:effectLst/>
+                <a:uLnTx/>
+                <a:uFillTx/>
+                <a:latin typeface="Consolas" panose="020B0609020204030204" pitchFamily="49" charset="0"/>
+                <a:ea typeface="Calibri" panose="020F0502020204030204" pitchFamily="34" charset="0"/>
+                <a:cs typeface="Calibri" panose="020F0502020204030204" pitchFamily="34" charset="0"/>
+              </a:rPr>
+              <a:t> </a:t>
+            </a:r>
+          </a:p>
+        </p:txBody>
+      </p:sp>
+      <p:sp>
+        <p:nvSpPr>
+          <p:cNvPr id="56" name="TextBox 55">
+            <a:extLst>
+              <a:ext uri="{FF2B5EF4-FFF2-40B4-BE49-F238E27FC236}">
+                <a16:creationId xmlns:a16="http://schemas.microsoft.com/office/drawing/2014/main" id="{1D013EF1-D105-DFD4-531E-341D3C883A8E}"/>
+              </a:ext>
+            </a:extLst>
+          </p:cNvPr>
+          <p:cNvSpPr txBox="1"/>
+          <p:nvPr/>
+        </p:nvSpPr>
+        <p:spPr>
+          <a:xfrm>
+            <a:off x="7239874" y="3477845"/>
+            <a:ext cx="1883849" cy="2000548"/>
+          </a:xfrm>
+          <a:prstGeom prst="rect">
+            <a:avLst/>
+          </a:prstGeom>
+          <a:noFill/>
+        </p:spPr>
+        <p:txBody>
+          <a:bodyPr wrap="none" rtlCol="0">
+            <a:spAutoFit/>
+          </a:bodyPr>
+          <a:lstStyle/>
+          <a:p>
+            <a:pPr marL="114300" marR="0" lvl="0" indent="-114300" algn="l" defTabSz="914400" rtl="0" eaLnBrk="1" fontAlgn="auto" latinLnBrk="0" hangingPunct="1">
+              <a:lnSpc>
+                <a:spcPct val="100000"/>
+              </a:lnSpc>
+              <a:spcBef>
+                <a:spcPts val="0"/>
+              </a:spcBef>
+              <a:spcAft>
+                <a:spcPts val="0"/>
+              </a:spcAft>
+              <a:buClrTx/>
+              <a:buSzTx/>
+              <a:buFontTx/>
+              <a:buNone/>
+              <a:tabLst/>
+              <a:defRPr/>
+            </a:pPr>
+            <a:r>
+              <a:rPr kumimoji="0" lang="en-US" sz="1600" b="0" i="0" u="none" strike="noStrike" kern="1200" cap="none" spc="0" normalizeH="0" baseline="0" noProof="0" dirty="0">
+                <a:ln>
+                  <a:noFill/>
+                </a:ln>
+                <a:solidFill>
+                  <a:prstClr val="black"/>
+                </a:solidFill>
+                <a:effectLst/>
+                <a:uLnTx/>
+                <a:uFillTx/>
+                <a:latin typeface="Calibri" panose="020F0502020204030204" pitchFamily="34" charset="0"/>
+                <a:ea typeface="Calibri" panose="020F0502020204030204" pitchFamily="34" charset="0"/>
+                <a:cs typeface="Calibri" panose="020F0502020204030204" pitchFamily="34" charset="0"/>
+              </a:rPr>
+              <a:t>Attribute: </a:t>
+            </a:r>
+            <a:br>
+              <a:rPr kumimoji="0" lang="en-US" sz="1600" b="0" i="0" u="none" strike="noStrike" kern="1200" cap="none" spc="0" normalizeH="0" baseline="0" noProof="0" dirty="0">
+                <a:ln>
+                  <a:noFill/>
+                </a:ln>
+                <a:solidFill>
+                  <a:prstClr val="black"/>
+                </a:solidFill>
+                <a:effectLst/>
+                <a:uLnTx/>
+                <a:uFillTx/>
+                <a:latin typeface="Calibri" panose="020F0502020204030204" pitchFamily="34" charset="0"/>
+                <a:ea typeface="Calibri" panose="020F0502020204030204" pitchFamily="34" charset="0"/>
+                <a:cs typeface="Calibri" panose="020F0502020204030204" pitchFamily="34" charset="0"/>
+              </a:rPr>
+            </a:br>
+            <a:r>
+              <a:rPr kumimoji="0" lang="en-US" sz="1600" b="1" i="0" u="none" strike="noStrike" kern="1200" cap="none" spc="0" normalizeH="0" baseline="0" noProof="0" dirty="0" err="1">
+                <a:ln>
+                  <a:noFill/>
+                </a:ln>
+                <a:solidFill>
+                  <a:prstClr val="black"/>
+                </a:solidFill>
+                <a:effectLst/>
+                <a:uLnTx/>
+                <a:uFillTx/>
+                <a:latin typeface="Calibri" panose="020F0502020204030204" pitchFamily="34" charset="0"/>
+                <a:ea typeface="Calibri" panose="020F0502020204030204" pitchFamily="34" charset="0"/>
+                <a:cs typeface="Calibri" panose="020F0502020204030204" pitchFamily="34" charset="0"/>
+              </a:rPr>
+              <a:t>referenceRange</a:t>
+            </a:r>
+            <a:br>
+              <a:rPr kumimoji="0" lang="en-US" sz="1600" b="1" i="0" u="none" strike="noStrike" kern="1200" cap="none" spc="0" normalizeH="0" baseline="0" noProof="0" dirty="0">
+                <a:ln>
+                  <a:noFill/>
+                </a:ln>
+                <a:solidFill>
+                  <a:prstClr val="black"/>
+                </a:solidFill>
+                <a:effectLst/>
+                <a:uLnTx/>
+                <a:uFillTx/>
+                <a:latin typeface="Calibri" panose="020F0502020204030204" pitchFamily="34" charset="0"/>
+                <a:ea typeface="Calibri" panose="020F0502020204030204" pitchFamily="34" charset="0"/>
+                <a:cs typeface="Calibri" panose="020F0502020204030204" pitchFamily="34" charset="0"/>
+              </a:rPr>
+            </a:br>
+            <a:r>
+              <a:rPr kumimoji="0" lang="en-US" sz="1200" b="1" i="0" u="none" strike="noStrike" kern="1200" cap="none" spc="0" normalizeH="0" baseline="0" noProof="0" dirty="0">
+                <a:ln>
+                  <a:noFill/>
+                </a:ln>
+                <a:solidFill>
+                  <a:prstClr val="black">
+                    <a:lumMod val="50000"/>
+                    <a:lumOff val="50000"/>
+                  </a:prstClr>
+                </a:solidFill>
+                <a:effectLst/>
+                <a:uLnTx/>
+                <a:uFillTx/>
+                <a:latin typeface="Consolas" panose="020B0609020204030204" pitchFamily="49" charset="0"/>
+                <a:ea typeface="Calibri" panose="020F0502020204030204" pitchFamily="34" charset="0"/>
+                <a:cs typeface="Calibri" panose="020F0502020204030204" pitchFamily="34" charset="0"/>
+              </a:rPr>
+              <a:t>{</a:t>
+            </a:r>
+            <a:br>
+              <a:rPr lang="en-US" sz="1200" b="1" dirty="0">
+                <a:solidFill>
+                  <a:prstClr val="black">
+                    <a:lumMod val="50000"/>
+                    <a:lumOff val="50000"/>
+                  </a:prstClr>
+                </a:solidFill>
+                <a:latin typeface="Consolas" panose="020B0609020204030204" pitchFamily="49" charset="0"/>
+                <a:ea typeface="Calibri" panose="020F0502020204030204" pitchFamily="34" charset="0"/>
+                <a:cs typeface="Calibri" panose="020F0502020204030204" pitchFamily="34" charset="0"/>
+              </a:rPr>
+            </a:br>
+            <a:r>
+              <a:rPr lang="en-US" sz="1200" b="1" dirty="0">
+                <a:solidFill>
+                  <a:prstClr val="black">
+                    <a:lumMod val="50000"/>
+                    <a:lumOff val="50000"/>
+                  </a:prstClr>
+                </a:solidFill>
+                <a:latin typeface="Consolas" panose="020B0609020204030204" pitchFamily="49" charset="0"/>
+                <a:ea typeface="Calibri" panose="020F0502020204030204" pitchFamily="34" charset="0"/>
+                <a:cs typeface="Calibri" panose="020F0502020204030204" pitchFamily="34" charset="0"/>
+              </a:rPr>
+              <a:t>  </a:t>
+            </a:r>
+            <a:r>
+              <a:rPr kumimoji="0" lang="en-US" sz="1200" b="1" i="0" u="none" strike="noStrike" kern="1200" cap="none" spc="0" normalizeH="0" baseline="0" noProof="0" dirty="0">
+                <a:ln>
+                  <a:noFill/>
+                </a:ln>
+                <a:solidFill>
+                  <a:prstClr val="black">
+                    <a:lumMod val="50000"/>
+                    <a:lumOff val="50000"/>
+                  </a:prstClr>
+                </a:solidFill>
+                <a:effectLst/>
+                <a:uLnTx/>
+                <a:uFillTx/>
+                <a:latin typeface="Consolas" panose="020B0609020204030204" pitchFamily="49" charset="0"/>
+                <a:ea typeface="Calibri" panose="020F0502020204030204" pitchFamily="34" charset="0"/>
+                <a:cs typeface="Calibri" panose="020F0502020204030204" pitchFamily="34" charset="0"/>
+              </a:rPr>
+              <a:t>"text": "70-90",</a:t>
+            </a:r>
+          </a:p>
+          <a:p>
+            <a:pPr marL="114300" marR="0" lvl="0" indent="-114300" algn="l" defTabSz="914400" rtl="0" eaLnBrk="1" fontAlgn="auto" latinLnBrk="0" hangingPunct="1">
+              <a:lnSpc>
+                <a:spcPct val="100000"/>
+              </a:lnSpc>
+              <a:spcBef>
+                <a:spcPts val="0"/>
+              </a:spcBef>
+              <a:spcAft>
+                <a:spcPts val="0"/>
+              </a:spcAft>
+              <a:buClrTx/>
+              <a:buSzTx/>
+              <a:buFontTx/>
+              <a:buNone/>
+              <a:tabLst/>
+              <a:defRPr/>
+            </a:pPr>
+            <a:r>
+              <a:rPr kumimoji="0" lang="en-US" sz="1200" b="1" i="0" u="none" strike="noStrike" kern="1200" cap="none" spc="0" normalizeH="0" baseline="0" noProof="0" dirty="0">
+                <a:ln>
+                  <a:noFill/>
+                </a:ln>
+                <a:solidFill>
+                  <a:prstClr val="black">
+                    <a:lumMod val="50000"/>
+                    <a:lumOff val="50000"/>
+                  </a:prstClr>
+                </a:solidFill>
+                <a:effectLst/>
+                <a:uLnTx/>
+                <a:uFillTx/>
+                <a:latin typeface="Consolas" panose="020B0609020204030204" pitchFamily="49" charset="0"/>
+                <a:ea typeface="Calibri" panose="020F0502020204030204" pitchFamily="34" charset="0"/>
+                <a:cs typeface="Calibri" panose="020F0502020204030204" pitchFamily="34" charset="0"/>
+              </a:rPr>
+              <a:t>   "</a:t>
+            </a:r>
+            <a:r>
+              <a:rPr kumimoji="0" lang="en-US" sz="1200" b="1" i="0" u="none" strike="noStrike" kern="1200" cap="none" spc="0" normalizeH="0" baseline="0" noProof="0" dirty="0" err="1">
+                <a:ln>
+                  <a:noFill/>
+                </a:ln>
+                <a:solidFill>
+                  <a:prstClr val="black">
+                    <a:lumMod val="50000"/>
+                    <a:lumOff val="50000"/>
+                  </a:prstClr>
+                </a:solidFill>
+                <a:effectLst/>
+                <a:uLnTx/>
+                <a:uFillTx/>
+                <a:latin typeface="Consolas" panose="020B0609020204030204" pitchFamily="49" charset="0"/>
+                <a:ea typeface="Calibri" panose="020F0502020204030204" pitchFamily="34" charset="0"/>
+                <a:cs typeface="Calibri" panose="020F0502020204030204" pitchFamily="34" charset="0"/>
+              </a:rPr>
+              <a:t>lowValue</a:t>
+            </a:r>
+            <a:r>
+              <a:rPr kumimoji="0" lang="en-US" sz="1200" b="1" i="0" u="none" strike="noStrike" kern="1200" cap="none" spc="0" normalizeH="0" baseline="0" noProof="0" dirty="0">
+                <a:ln>
+                  <a:noFill/>
+                </a:ln>
+                <a:solidFill>
+                  <a:prstClr val="black">
+                    <a:lumMod val="50000"/>
+                    <a:lumOff val="50000"/>
+                  </a:prstClr>
+                </a:solidFill>
+                <a:effectLst/>
+                <a:uLnTx/>
+                <a:uFillTx/>
+                <a:latin typeface="Consolas" panose="020B0609020204030204" pitchFamily="49" charset="0"/>
+                <a:ea typeface="Calibri" panose="020F0502020204030204" pitchFamily="34" charset="0"/>
+                <a:cs typeface="Calibri" panose="020F0502020204030204" pitchFamily="34" charset="0"/>
+              </a:rPr>
+              <a:t>": "70",</a:t>
+            </a:r>
+          </a:p>
+          <a:p>
+            <a:pPr marL="114300" marR="0" lvl="0" indent="-114300" algn="l" defTabSz="914400" rtl="0" eaLnBrk="1" fontAlgn="auto" latinLnBrk="0" hangingPunct="1">
+              <a:lnSpc>
+                <a:spcPct val="100000"/>
+              </a:lnSpc>
+              <a:spcBef>
+                <a:spcPts val="0"/>
+              </a:spcBef>
+              <a:spcAft>
+                <a:spcPts val="0"/>
+              </a:spcAft>
+              <a:buClrTx/>
+              <a:buSzTx/>
+              <a:buFontTx/>
+              <a:buNone/>
+              <a:tabLst/>
+              <a:defRPr/>
+            </a:pPr>
+            <a:r>
+              <a:rPr kumimoji="0" lang="en-US" sz="1200" b="1" i="0" u="none" strike="noStrike" kern="1200" cap="none" spc="0" normalizeH="0" baseline="0" noProof="0" dirty="0">
+                <a:ln>
+                  <a:noFill/>
+                </a:ln>
+                <a:solidFill>
+                  <a:prstClr val="black">
+                    <a:lumMod val="50000"/>
+                    <a:lumOff val="50000"/>
+                  </a:prstClr>
+                </a:solidFill>
+                <a:effectLst/>
+                <a:uLnTx/>
+                <a:uFillTx/>
+                <a:latin typeface="Consolas" panose="020B0609020204030204" pitchFamily="49" charset="0"/>
+                <a:ea typeface="Calibri" panose="020F0502020204030204" pitchFamily="34" charset="0"/>
+                <a:cs typeface="Calibri" panose="020F0502020204030204" pitchFamily="34" charset="0"/>
+              </a:rPr>
+              <a:t>   "</a:t>
+            </a:r>
+            <a:r>
+              <a:rPr kumimoji="0" lang="en-US" sz="1200" b="1" i="0" u="none" strike="noStrike" kern="1200" cap="none" spc="0" normalizeH="0" baseline="0" noProof="0" dirty="0" err="1">
+                <a:ln>
+                  <a:noFill/>
+                </a:ln>
+                <a:solidFill>
+                  <a:prstClr val="black">
+                    <a:lumMod val="50000"/>
+                    <a:lumOff val="50000"/>
+                  </a:prstClr>
+                </a:solidFill>
+                <a:effectLst/>
+                <a:uLnTx/>
+                <a:uFillTx/>
+                <a:latin typeface="Consolas" panose="020B0609020204030204" pitchFamily="49" charset="0"/>
+                <a:ea typeface="Calibri" panose="020F0502020204030204" pitchFamily="34" charset="0"/>
+                <a:cs typeface="Calibri" panose="020F0502020204030204" pitchFamily="34" charset="0"/>
+              </a:rPr>
+              <a:t>highValue</a:t>
+            </a:r>
+            <a:r>
+              <a:rPr kumimoji="0" lang="en-US" sz="1200" b="1" i="0" u="none" strike="noStrike" kern="1200" cap="none" spc="0" normalizeH="0" baseline="0" noProof="0" dirty="0">
+                <a:ln>
+                  <a:noFill/>
+                </a:ln>
+                <a:solidFill>
+                  <a:prstClr val="black">
+                    <a:lumMod val="50000"/>
+                    <a:lumOff val="50000"/>
+                  </a:prstClr>
+                </a:solidFill>
+                <a:effectLst/>
+                <a:uLnTx/>
+                <a:uFillTx/>
+                <a:latin typeface="Consolas" panose="020B0609020204030204" pitchFamily="49" charset="0"/>
+                <a:ea typeface="Calibri" panose="020F0502020204030204" pitchFamily="34" charset="0"/>
+                <a:cs typeface="Calibri" panose="020F0502020204030204" pitchFamily="34" charset="0"/>
+              </a:rPr>
+              <a:t>": "90"</a:t>
+            </a:r>
+            <a:br>
+              <a:rPr kumimoji="0" lang="en-US" sz="1200" b="1" i="0" u="none" strike="noStrike" kern="1200" cap="none" spc="0" normalizeH="0" baseline="0" noProof="0" dirty="0">
+                <a:ln>
+                  <a:noFill/>
+                </a:ln>
+                <a:solidFill>
+                  <a:prstClr val="black">
+                    <a:lumMod val="50000"/>
+                    <a:lumOff val="50000"/>
+                  </a:prstClr>
+                </a:solidFill>
+                <a:effectLst/>
+                <a:uLnTx/>
+                <a:uFillTx/>
+                <a:latin typeface="Consolas" panose="020B0609020204030204" pitchFamily="49" charset="0"/>
+                <a:ea typeface="Calibri" panose="020F0502020204030204" pitchFamily="34" charset="0"/>
+                <a:cs typeface="Calibri" panose="020F0502020204030204" pitchFamily="34" charset="0"/>
+              </a:rPr>
+            </a:br>
+            <a:r>
+              <a:rPr kumimoji="0" lang="en-US" sz="1200" b="1" i="0" u="none" strike="noStrike" kern="1200" cap="none" spc="0" normalizeH="0" baseline="0" noProof="0" dirty="0">
+                <a:ln>
+                  <a:noFill/>
+                </a:ln>
+                <a:solidFill>
+                  <a:prstClr val="black">
+                    <a:lumMod val="50000"/>
+                    <a:lumOff val="50000"/>
+                  </a:prstClr>
+                </a:solidFill>
+                <a:effectLst/>
+                <a:uLnTx/>
+                <a:uFillTx/>
+                <a:latin typeface="Consolas" panose="020B0609020204030204" pitchFamily="49" charset="0"/>
+                <a:ea typeface="Calibri" panose="020F0502020204030204" pitchFamily="34" charset="0"/>
+                <a:cs typeface="Calibri" panose="020F0502020204030204" pitchFamily="34" charset="0"/>
+              </a:rPr>
+              <a:t>}</a:t>
+            </a:r>
+            <a:br>
+              <a:rPr kumimoji="0" lang="en-US" sz="1600" b="1" i="0" u="none" strike="noStrike" kern="1200" cap="none" spc="0" normalizeH="0" baseline="0" noProof="0" dirty="0">
+                <a:ln>
+                  <a:noFill/>
+                </a:ln>
+                <a:solidFill>
+                  <a:prstClr val="black">
+                    <a:lumMod val="50000"/>
+                    <a:lumOff val="50000"/>
+                  </a:prstClr>
+                </a:solidFill>
+                <a:effectLst/>
+                <a:uLnTx/>
+                <a:uFillTx/>
+                <a:latin typeface="Calibri" panose="020F0502020204030204" pitchFamily="34" charset="0"/>
+                <a:ea typeface="Calibri" panose="020F0502020204030204" pitchFamily="34" charset="0"/>
+                <a:cs typeface="Calibri" panose="020F0502020204030204" pitchFamily="34" charset="0"/>
+              </a:rPr>
+            </a:br>
+            <a:r>
+              <a:rPr kumimoji="0" lang="en-US" sz="1600" b="1" i="0" u="none" strike="noStrike" kern="1200" cap="none" spc="0" normalizeH="0" baseline="0" noProof="0" dirty="0">
+                <a:ln>
+                  <a:noFill/>
+                </a:ln>
+                <a:solidFill>
+                  <a:prstClr val="black">
+                    <a:lumMod val="50000"/>
+                    <a:lumOff val="50000"/>
+                  </a:prstClr>
+                </a:solidFill>
+                <a:effectLst/>
+                <a:uLnTx/>
+                <a:uFillTx/>
+                <a:latin typeface="Calibri" panose="020F0502020204030204" pitchFamily="34" charset="0"/>
+                <a:ea typeface="Calibri" panose="020F0502020204030204" pitchFamily="34" charset="0"/>
+                <a:cs typeface="Calibri" panose="020F0502020204030204" pitchFamily="34" charset="0"/>
+              </a:rPr>
+              <a:t>  </a:t>
+            </a:r>
+            <a:br>
+              <a:rPr kumimoji="0" lang="en-US" sz="1600" b="1" i="0" u="none" strike="noStrike" kern="1200" cap="none" spc="0" normalizeH="0" baseline="0" noProof="0" dirty="0">
+                <a:ln>
+                  <a:noFill/>
+                </a:ln>
+                <a:solidFill>
+                  <a:prstClr val="black"/>
+                </a:solidFill>
+                <a:effectLst/>
+                <a:uLnTx/>
+                <a:uFillTx/>
+                <a:latin typeface="Calibri" panose="020F0502020204030204" pitchFamily="34" charset="0"/>
+                <a:ea typeface="Calibri" panose="020F0502020204030204" pitchFamily="34" charset="0"/>
+                <a:cs typeface="Calibri" panose="020F0502020204030204" pitchFamily="34" charset="0"/>
+              </a:rPr>
+            </a:br>
+            <a:r>
+              <a:rPr kumimoji="0" lang="en-US" sz="1600" b="1" i="0" u="none" strike="noStrike" kern="1200" cap="none" spc="0" normalizeH="0" baseline="0" noProof="0" dirty="0">
+                <a:ln>
+                  <a:noFill/>
+                </a:ln>
+                <a:solidFill>
+                  <a:prstClr val="black"/>
+                </a:solidFill>
+                <a:effectLst/>
+                <a:uLnTx/>
+                <a:uFillTx/>
+                <a:latin typeface="Calibri" panose="020F0502020204030204" pitchFamily="34" charset="0"/>
+                <a:ea typeface="Calibri" panose="020F0502020204030204" pitchFamily="34" charset="0"/>
+                <a:cs typeface="Calibri" panose="020F0502020204030204" pitchFamily="34" charset="0"/>
+              </a:rPr>
+              <a:t> </a:t>
+            </a:r>
+          </a:p>
+        </p:txBody>
+      </p:sp>
+      <p:sp>
+        <p:nvSpPr>
+          <p:cNvPr id="64" name="Rectangle 63">
+            <a:extLst>
+              <a:ext uri="{FF2B5EF4-FFF2-40B4-BE49-F238E27FC236}">
+                <a16:creationId xmlns:a16="http://schemas.microsoft.com/office/drawing/2014/main" id="{3C91E94C-8CBD-F5EB-19DF-B22A92FC9687}"/>
+              </a:ext>
+            </a:extLst>
+          </p:cNvPr>
+          <p:cNvSpPr/>
+          <p:nvPr/>
+        </p:nvSpPr>
+        <p:spPr>
+          <a:xfrm>
+            <a:off x="9905530" y="2350160"/>
+            <a:ext cx="954525" cy="954525"/>
+          </a:xfrm>
+          <a:prstGeom prst="rect">
+            <a:avLst/>
+          </a:prstGeom>
+          <a:solidFill>
+            <a:srgbClr val="F9A21E"/>
+          </a:solidFill>
+          <a:ln>
+            <a:noFill/>
+          </a:ln>
+        </p:spPr>
+        <p:style>
+          <a:lnRef idx="2">
+            <a:schemeClr val="accent1">
+              <a:shade val="15000"/>
+            </a:schemeClr>
+          </a:lnRef>
+          <a:fillRef idx="1">
+            <a:schemeClr val="accent1"/>
+          </a:fillRef>
+          <a:effectRef idx="0">
+            <a:schemeClr val="accent1"/>
+          </a:effectRef>
+          <a:fontRef idx="minor">
+            <a:schemeClr val="lt1"/>
+          </a:fontRef>
+        </p:style>
+        <p:txBody>
+          <a:bodyPr lIns="0" rIns="0" rtlCol="0" anchor="ctr"/>
+          <a:lstStyle/>
+          <a:p>
+            <a:pPr marL="0" marR="0" lvl="0" indent="0" algn="ctr" defTabSz="914400" rtl="0" eaLnBrk="1" fontAlgn="auto" latinLnBrk="0" hangingPunct="1">
+              <a:lnSpc>
+                <a:spcPct val="100000"/>
+              </a:lnSpc>
+              <a:spcBef>
+                <a:spcPts val="0"/>
+              </a:spcBef>
+              <a:spcAft>
+                <a:spcPts val="0"/>
+              </a:spcAft>
+              <a:buClrTx/>
+              <a:buSzTx/>
+              <a:buFontTx/>
+              <a:buNone/>
+              <a:tabLst/>
+              <a:defRPr/>
+            </a:pPr>
+            <a:r>
+              <a:rPr kumimoji="0" lang="en-US" sz="1400" b="0" i="0" u="none" strike="noStrike" kern="1200" cap="none" spc="0" normalizeH="0" baseline="0" noProof="0" dirty="0">
+                <a:ln>
+                  <a:noFill/>
+                </a:ln>
+                <a:solidFill>
+                  <a:prstClr val="white"/>
+                </a:solidFill>
+                <a:effectLst/>
+                <a:uLnTx/>
+                <a:uFillTx/>
+                <a:latin typeface="Calibri" panose="020F0502020204030204" pitchFamily="34" charset="0"/>
+                <a:ea typeface="Calibri" panose="020F0502020204030204" pitchFamily="34" charset="0"/>
+                <a:cs typeface="Calibri" panose="020F0502020204030204" pitchFamily="34" charset="0"/>
+              </a:rPr>
+              <a:t>Availability</a:t>
+            </a:r>
+          </a:p>
+        </p:txBody>
+      </p:sp>
+      <p:sp>
+        <p:nvSpPr>
+          <p:cNvPr id="65" name="Rectangle 64">
+            <a:extLst>
+              <a:ext uri="{FF2B5EF4-FFF2-40B4-BE49-F238E27FC236}">
+                <a16:creationId xmlns:a16="http://schemas.microsoft.com/office/drawing/2014/main" id="{AA9FA8D2-AA1C-0B09-9D14-D0F1C0FD1392}"/>
+              </a:ext>
+            </a:extLst>
+          </p:cNvPr>
+          <p:cNvSpPr/>
+          <p:nvPr/>
+        </p:nvSpPr>
+        <p:spPr>
+          <a:xfrm>
+            <a:off x="10941850" y="2350160"/>
+            <a:ext cx="954525" cy="954525"/>
+          </a:xfrm>
+          <a:prstGeom prst="rect">
+            <a:avLst/>
+          </a:prstGeom>
+          <a:solidFill>
+            <a:srgbClr val="7FB541"/>
+          </a:solidFill>
+          <a:ln>
+            <a:noFill/>
+          </a:ln>
+        </p:spPr>
+        <p:style>
+          <a:lnRef idx="2">
+            <a:schemeClr val="accent1">
+              <a:shade val="15000"/>
+            </a:schemeClr>
+          </a:lnRef>
+          <a:fillRef idx="1">
+            <a:schemeClr val="accent1"/>
+          </a:fillRef>
+          <a:effectRef idx="0">
+            <a:schemeClr val="accent1"/>
+          </a:effectRef>
+          <a:fontRef idx="minor">
+            <a:schemeClr val="lt1"/>
+          </a:fontRef>
+        </p:style>
+        <p:txBody>
+          <a:bodyPr lIns="0" rIns="0" rtlCol="0" anchor="ctr"/>
+          <a:lstStyle/>
+          <a:p>
+            <a:pPr marL="0" marR="0" lvl="0" indent="0" algn="ctr" defTabSz="914400" rtl="0" eaLnBrk="1" fontAlgn="auto" latinLnBrk="0" hangingPunct="1">
+              <a:lnSpc>
+                <a:spcPct val="100000"/>
+              </a:lnSpc>
+              <a:spcBef>
+                <a:spcPts val="0"/>
+              </a:spcBef>
+              <a:spcAft>
+                <a:spcPts val="0"/>
+              </a:spcAft>
+              <a:buClrTx/>
+              <a:buSzTx/>
+              <a:buFontTx/>
+              <a:buNone/>
+              <a:tabLst/>
+              <a:defRPr/>
+            </a:pPr>
+            <a:r>
+              <a:rPr kumimoji="0" lang="en-US" sz="1400" b="0" i="0" u="none" strike="noStrike" kern="1200" cap="none" spc="0" normalizeH="0" baseline="0" noProof="0" dirty="0">
+                <a:ln>
+                  <a:noFill/>
+                </a:ln>
+                <a:solidFill>
+                  <a:prstClr val="white"/>
+                </a:solidFill>
+                <a:effectLst/>
+                <a:uLnTx/>
+                <a:uFillTx/>
+                <a:latin typeface="Calibri" panose="020F0502020204030204" pitchFamily="34" charset="0"/>
+                <a:ea typeface="Calibri" panose="020F0502020204030204" pitchFamily="34" charset="0"/>
+                <a:cs typeface="Calibri" panose="020F0502020204030204" pitchFamily="34" charset="0"/>
+              </a:rPr>
+              <a:t>Accuracy</a:t>
+            </a:r>
+            <a:endParaRPr kumimoji="0" lang="en-US" sz="1800" b="0" i="0" u="none" strike="noStrike" kern="1200" cap="none" spc="0" normalizeH="0" baseline="0" noProof="0" dirty="0">
+              <a:ln>
+                <a:noFill/>
+              </a:ln>
+              <a:solidFill>
+                <a:prstClr val="white"/>
+              </a:solidFill>
+              <a:effectLst/>
+              <a:uLnTx/>
+              <a:uFillTx/>
+              <a:latin typeface="Calibri" panose="020F0502020204030204" pitchFamily="34" charset="0"/>
+              <a:ea typeface="Calibri" panose="020F0502020204030204" pitchFamily="34" charset="0"/>
+              <a:cs typeface="Calibri" panose="020F0502020204030204" pitchFamily="34" charset="0"/>
+            </a:endParaRPr>
+          </a:p>
+        </p:txBody>
+      </p:sp>
+      <p:sp>
+        <p:nvSpPr>
+          <p:cNvPr id="66" name="Rectangle 65">
+            <a:extLst>
+              <a:ext uri="{FF2B5EF4-FFF2-40B4-BE49-F238E27FC236}">
+                <a16:creationId xmlns:a16="http://schemas.microsoft.com/office/drawing/2014/main" id="{C1C72140-9731-0DAD-EA61-DC59819DF142}"/>
+              </a:ext>
+            </a:extLst>
+          </p:cNvPr>
+          <p:cNvSpPr/>
+          <p:nvPr/>
+        </p:nvSpPr>
+        <p:spPr>
+          <a:xfrm>
+            <a:off x="10941850" y="3408418"/>
+            <a:ext cx="954525" cy="954525"/>
+          </a:xfrm>
+          <a:prstGeom prst="rect">
+            <a:avLst/>
+          </a:prstGeom>
+          <a:solidFill>
+            <a:srgbClr val="CC3C46"/>
+          </a:solidFill>
+          <a:ln>
+            <a:noFill/>
+          </a:ln>
+        </p:spPr>
+        <p:style>
+          <a:lnRef idx="2">
+            <a:schemeClr val="accent1">
+              <a:shade val="15000"/>
+            </a:schemeClr>
+          </a:lnRef>
+          <a:fillRef idx="1">
+            <a:schemeClr val="accent1"/>
+          </a:fillRef>
+          <a:effectRef idx="0">
+            <a:schemeClr val="accent1"/>
+          </a:effectRef>
+          <a:fontRef idx="minor">
+            <a:schemeClr val="lt1"/>
+          </a:fontRef>
+        </p:style>
+        <p:txBody>
+          <a:bodyPr lIns="0" rIns="0" rtlCol="0" anchor="ctr"/>
+          <a:lstStyle/>
+          <a:p>
+            <a:pPr marL="0" marR="0" lvl="0" indent="0" algn="ctr" defTabSz="914400" rtl="0" eaLnBrk="1" fontAlgn="auto" latinLnBrk="0" hangingPunct="1">
+              <a:lnSpc>
+                <a:spcPct val="100000"/>
+              </a:lnSpc>
+              <a:spcBef>
+                <a:spcPts val="0"/>
+              </a:spcBef>
+              <a:spcAft>
+                <a:spcPts val="0"/>
+              </a:spcAft>
+              <a:buClrTx/>
+              <a:buSzTx/>
+              <a:buFontTx/>
+              <a:buNone/>
+              <a:tabLst/>
+              <a:defRPr/>
+            </a:pPr>
+            <a:r>
+              <a:rPr kumimoji="0" lang="en-US" sz="1400" b="0" i="0" u="none" strike="noStrike" kern="1200" cap="none" spc="0" normalizeH="0" baseline="0" noProof="0" dirty="0">
+                <a:ln>
+                  <a:noFill/>
+                </a:ln>
+                <a:solidFill>
+                  <a:prstClr val="white"/>
+                </a:solidFill>
+                <a:effectLst/>
+                <a:uLnTx/>
+                <a:uFillTx/>
+                <a:latin typeface="Calibri" panose="020F0502020204030204" pitchFamily="34" charset="0"/>
+                <a:ea typeface="Calibri" panose="020F0502020204030204" pitchFamily="34" charset="0"/>
+                <a:cs typeface="Calibri" panose="020F0502020204030204" pitchFamily="34" charset="0"/>
+              </a:rPr>
+              <a:t>Plausibility</a:t>
+            </a:r>
+          </a:p>
+        </p:txBody>
+      </p:sp>
+      <p:sp>
+        <p:nvSpPr>
+          <p:cNvPr id="67" name="Rectangle 66">
+            <a:extLst>
+              <a:ext uri="{FF2B5EF4-FFF2-40B4-BE49-F238E27FC236}">
+                <a16:creationId xmlns:a16="http://schemas.microsoft.com/office/drawing/2014/main" id="{770A64F3-0C65-ED42-F475-6BFB128FA4D1}"/>
+              </a:ext>
+            </a:extLst>
+          </p:cNvPr>
+          <p:cNvSpPr/>
+          <p:nvPr/>
+        </p:nvSpPr>
+        <p:spPr>
+          <a:xfrm>
+            <a:off x="9905529" y="3408418"/>
+            <a:ext cx="954525" cy="954525"/>
+          </a:xfrm>
+          <a:prstGeom prst="rect">
+            <a:avLst/>
+          </a:prstGeom>
+          <a:solidFill>
+            <a:srgbClr val="1982C6"/>
+          </a:solidFill>
+          <a:ln>
+            <a:noFill/>
+          </a:ln>
+        </p:spPr>
+        <p:style>
+          <a:lnRef idx="2">
+            <a:schemeClr val="accent1">
+              <a:shade val="15000"/>
+            </a:schemeClr>
+          </a:lnRef>
+          <a:fillRef idx="1">
+            <a:schemeClr val="accent1"/>
+          </a:fillRef>
+          <a:effectRef idx="0">
+            <a:schemeClr val="accent1"/>
+          </a:effectRef>
+          <a:fontRef idx="minor">
+            <a:schemeClr val="lt1"/>
+          </a:fontRef>
+        </p:style>
+        <p:txBody>
+          <a:bodyPr lIns="0" rIns="0" rtlCol="0" anchor="ctr"/>
+          <a:lstStyle/>
+          <a:p>
+            <a:pPr marL="0" marR="0" lvl="0" indent="0" algn="ctr" defTabSz="914400" rtl="0" eaLnBrk="1" fontAlgn="auto" latinLnBrk="0" hangingPunct="1">
+              <a:lnSpc>
+                <a:spcPct val="100000"/>
+              </a:lnSpc>
+              <a:spcBef>
+                <a:spcPts val="0"/>
+              </a:spcBef>
+              <a:spcAft>
+                <a:spcPts val="0"/>
+              </a:spcAft>
+              <a:buClrTx/>
+              <a:buSzTx/>
+              <a:buFontTx/>
+              <a:buNone/>
+              <a:tabLst/>
+              <a:defRPr/>
+            </a:pPr>
+            <a:r>
+              <a:rPr kumimoji="0" lang="en-US" sz="1400" b="0" i="0" u="none" strike="noStrike" kern="1200" cap="none" spc="0" normalizeH="0" baseline="0" noProof="0" dirty="0">
+                <a:ln>
+                  <a:noFill/>
+                </a:ln>
+                <a:solidFill>
+                  <a:prstClr val="white"/>
+                </a:solidFill>
+                <a:effectLst/>
+                <a:uLnTx/>
+                <a:uFillTx/>
+                <a:latin typeface="Calibri" panose="020F0502020204030204" pitchFamily="34" charset="0"/>
+                <a:ea typeface="Calibri" panose="020F0502020204030204" pitchFamily="34" charset="0"/>
+                <a:cs typeface="Calibri" panose="020F0502020204030204" pitchFamily="34" charset="0"/>
+              </a:rPr>
+              <a:t>Conformity</a:t>
+            </a:r>
+          </a:p>
+        </p:txBody>
+      </p:sp>
+      <p:sp>
+        <p:nvSpPr>
+          <p:cNvPr id="68" name="TextBox 67">
+            <a:extLst>
+              <a:ext uri="{FF2B5EF4-FFF2-40B4-BE49-F238E27FC236}">
+                <a16:creationId xmlns:a16="http://schemas.microsoft.com/office/drawing/2014/main" id="{B96154AD-BE60-53F8-3D8E-FAF1E8CFD51D}"/>
+              </a:ext>
+            </a:extLst>
+          </p:cNvPr>
+          <p:cNvSpPr txBox="1"/>
+          <p:nvPr/>
+        </p:nvSpPr>
+        <p:spPr>
+          <a:xfrm>
+            <a:off x="6675121" y="5181600"/>
+            <a:ext cx="2614444" cy="1200329"/>
+          </a:xfrm>
+          <a:prstGeom prst="rect">
+            <a:avLst/>
+          </a:prstGeom>
+          <a:noFill/>
+        </p:spPr>
+        <p:txBody>
+          <a:bodyPr wrap="square" rtlCol="0">
+            <a:spAutoFit/>
+          </a:bodyPr>
+          <a:lstStyle/>
+          <a:p>
+            <a:pPr marL="0" marR="0" lvl="0" indent="0" algn="ctr" defTabSz="914400" rtl="0" eaLnBrk="1" fontAlgn="auto" latinLnBrk="0" hangingPunct="1">
+              <a:lnSpc>
+                <a:spcPct val="100000"/>
+              </a:lnSpc>
+              <a:spcBef>
+                <a:spcPts val="0"/>
+              </a:spcBef>
+              <a:spcAft>
+                <a:spcPts val="0"/>
+              </a:spcAft>
+              <a:buClrTx/>
+              <a:buSzTx/>
+              <a:buFontTx/>
+              <a:buNone/>
+              <a:tabLst/>
+              <a:defRPr/>
+            </a:pPr>
+            <a:r>
+              <a:rPr kumimoji="0" lang="en-US" sz="1800" b="0" i="0" u="none" strike="noStrike" kern="1200" cap="none" spc="0" normalizeH="0" baseline="0" noProof="0" dirty="0">
+                <a:ln>
+                  <a:noFill/>
+                </a:ln>
+                <a:solidFill>
+                  <a:prstClr val="black"/>
+                </a:solidFill>
+                <a:effectLst/>
+                <a:uLnTx/>
+                <a:uFillTx/>
+                <a:latin typeface="Calibri" panose="020F0502020204030204" pitchFamily="34" charset="0"/>
+                <a:ea typeface="Calibri" panose="020F0502020204030204" pitchFamily="34" charset="0"/>
+                <a:cs typeface="Calibri" panose="020F0502020204030204" pitchFamily="34" charset="0"/>
+              </a:rPr>
+              <a:t>“Flattened” model will vary by use case and can source data from various standards formats</a:t>
+            </a:r>
+          </a:p>
+        </p:txBody>
+      </p:sp>
+      <p:sp>
+        <p:nvSpPr>
+          <p:cNvPr id="69" name="TextBox 68">
+            <a:extLst>
+              <a:ext uri="{FF2B5EF4-FFF2-40B4-BE49-F238E27FC236}">
+                <a16:creationId xmlns:a16="http://schemas.microsoft.com/office/drawing/2014/main" id="{674057E0-B284-29A8-70C3-F0E0331F12CB}"/>
+              </a:ext>
+            </a:extLst>
+          </p:cNvPr>
+          <p:cNvSpPr txBox="1"/>
+          <p:nvPr/>
+        </p:nvSpPr>
+        <p:spPr>
+          <a:xfrm>
+            <a:off x="9827022" y="1507656"/>
+            <a:ext cx="2185283" cy="830997"/>
+          </a:xfrm>
+          <a:prstGeom prst="rect">
+            <a:avLst/>
+          </a:prstGeom>
+          <a:noFill/>
+        </p:spPr>
+        <p:txBody>
+          <a:bodyPr wrap="square" rtlCol="0">
+            <a:spAutoFit/>
+          </a:bodyPr>
+          <a:lstStyle/>
+          <a:p>
+            <a:pPr marL="0" marR="0" lvl="0" indent="0" algn="ctr" defTabSz="914400" rtl="0" eaLnBrk="1" fontAlgn="auto" latinLnBrk="0" hangingPunct="1">
+              <a:lnSpc>
+                <a:spcPct val="100000"/>
+              </a:lnSpc>
+              <a:spcBef>
+                <a:spcPts val="0"/>
+              </a:spcBef>
+              <a:spcAft>
+                <a:spcPts val="0"/>
+              </a:spcAft>
+              <a:buClrTx/>
+              <a:buSzTx/>
+              <a:buFontTx/>
+              <a:buNone/>
+              <a:tabLst/>
+              <a:defRPr/>
+            </a:pPr>
+            <a:r>
+              <a:rPr kumimoji="0" lang="en-US" sz="2400" b="1" i="0" u="none" strike="noStrike" kern="1200" cap="none" spc="0" normalizeH="0" baseline="0" noProof="0" dirty="0">
+                <a:ln>
+                  <a:noFill/>
+                </a:ln>
+                <a:solidFill>
+                  <a:prstClr val="black"/>
+                </a:solidFill>
+                <a:effectLst/>
+                <a:uLnTx/>
+                <a:uFillTx/>
+                <a:latin typeface="Calibri" panose="020F0502020204030204" pitchFamily="34" charset="0"/>
+                <a:ea typeface="Calibri" panose="020F0502020204030204" pitchFamily="34" charset="0"/>
+                <a:cs typeface="Calibri" panose="020F0502020204030204" pitchFamily="34" charset="0"/>
+              </a:rPr>
+              <a:t>PIQI Evaluation Rubric</a:t>
+            </a:r>
+          </a:p>
+        </p:txBody>
+      </p:sp>
+      <p:sp>
+        <p:nvSpPr>
+          <p:cNvPr id="70" name="Arrow: Right 69">
+            <a:extLst>
+              <a:ext uri="{FF2B5EF4-FFF2-40B4-BE49-F238E27FC236}">
+                <a16:creationId xmlns:a16="http://schemas.microsoft.com/office/drawing/2014/main" id="{4FD18F81-9406-4930-7BD1-6AC9CBB43835}"/>
+              </a:ext>
+            </a:extLst>
+          </p:cNvPr>
+          <p:cNvSpPr/>
+          <p:nvPr/>
+        </p:nvSpPr>
+        <p:spPr>
+          <a:xfrm>
+            <a:off x="9289565" y="3116019"/>
+            <a:ext cx="534168" cy="505764"/>
+          </a:xfrm>
+          <a:prstGeom prst="rightArrow">
+            <a:avLst/>
+          </a:prstGeom>
+          <a:solidFill>
+            <a:schemeClr val="bg1">
+              <a:lumMod val="75000"/>
+            </a:schemeClr>
+          </a:solidFill>
+          <a:ln>
+            <a:noFill/>
+          </a:ln>
+        </p:spPr>
+        <p:style>
+          <a:lnRef idx="2">
+            <a:schemeClr val="accent1">
+              <a:shade val="15000"/>
+            </a:schemeClr>
+          </a:lnRef>
+          <a:fillRef idx="1">
+            <a:schemeClr val="accent1"/>
+          </a:fillRef>
+          <a:effectRef idx="0">
+            <a:schemeClr val="accent1"/>
+          </a:effectRef>
+          <a:fontRef idx="minor">
+            <a:schemeClr val="lt1"/>
+          </a:fontRef>
+        </p:style>
+        <p:txBody>
+          <a:bodyPr rtlCol="0" anchor="ctr"/>
+          <a:lstStyle/>
+          <a:p>
+            <a:pPr marL="0" marR="0" lvl="0" indent="0" algn="ctr" defTabSz="914400" rtl="0" eaLnBrk="1" fontAlgn="auto" latinLnBrk="0" hangingPunct="1">
+              <a:lnSpc>
+                <a:spcPct val="100000"/>
+              </a:lnSpc>
+              <a:spcBef>
+                <a:spcPts val="0"/>
+              </a:spcBef>
+              <a:spcAft>
+                <a:spcPts val="0"/>
+              </a:spcAft>
+              <a:buClrTx/>
+              <a:buSzTx/>
+              <a:buFontTx/>
+              <a:buNone/>
+              <a:tabLst/>
+              <a:defRPr/>
+            </a:pPr>
+            <a:endParaRPr kumimoji="0" lang="en-US" sz="1800" b="0" i="0" u="none" strike="noStrike" kern="1200" cap="none" spc="0" normalizeH="0" baseline="0" noProof="0">
+              <a:ln>
+                <a:noFill/>
+              </a:ln>
+              <a:solidFill>
+                <a:prstClr val="white"/>
+              </a:solidFill>
+              <a:effectLst/>
+              <a:uLnTx/>
+              <a:uFillTx/>
+              <a:latin typeface="Aptos" panose="02110004020202020204"/>
+              <a:ea typeface="+mn-ea"/>
+              <a:cs typeface="+mn-cs"/>
+            </a:endParaRPr>
+          </a:p>
+        </p:txBody>
+      </p:sp>
+    </p:spTree>
+    <p:extLst>
+      <p:ext uri="{BB962C8B-B14F-4D97-AF65-F5344CB8AC3E}">
+        <p14:creationId xmlns:p14="http://schemas.microsoft.com/office/powerpoint/2010/main" val="1939231616"/>
       </p:ext>
     </p:extLst>
   </p:cSld>
@@ -6876,4 +14260,319 @@
     </a:ext>
   </a:extLst>
 </a:theme>
+</file>
+
+<file path=ppt/theme/theme2.xml><?xml version="1.0" encoding="utf-8"?>
+<a:theme xmlns:a="http://schemas.openxmlformats.org/drawingml/2006/main" name="1_Office Theme">
+  <a:themeElements>
+    <a:clrScheme name="Office">
+      <a:dk1>
+        <a:sysClr val="windowText" lastClr="000000"/>
+      </a:dk1>
+      <a:lt1>
+        <a:sysClr val="window" lastClr="FFFFFF"/>
+      </a:lt1>
+      <a:dk2>
+        <a:srgbClr val="0E2841"/>
+      </a:dk2>
+      <a:lt2>
+        <a:srgbClr val="E8E8E8"/>
+      </a:lt2>
+      <a:accent1>
+        <a:srgbClr val="156082"/>
+      </a:accent1>
+      <a:accent2>
+        <a:srgbClr val="E97132"/>
+      </a:accent2>
+      <a:accent3>
+        <a:srgbClr val="196B24"/>
+      </a:accent3>
+      <a:accent4>
+        <a:srgbClr val="0F9ED5"/>
+      </a:accent4>
+      <a:accent5>
+        <a:srgbClr val="A02B93"/>
+      </a:accent5>
+      <a:accent6>
+        <a:srgbClr val="4EA72E"/>
+      </a:accent6>
+      <a:hlink>
+        <a:srgbClr val="467886"/>
+      </a:hlink>
+      <a:folHlink>
+        <a:srgbClr val="96607D"/>
+      </a:folHlink>
+    </a:clrScheme>
+    <a:fontScheme name="Office">
+      <a:majorFont>
+        <a:latin typeface="Aptos Display" panose="02110004020202020204"/>
+        <a:ea typeface=""/>
+        <a:cs typeface=""/>
+        <a:font script="Jpan" typeface="游ゴシック Light"/>
+        <a:font script="Hang" typeface="맑은 고딕"/>
+        <a:font script="Hans" typeface="等线 Light"/>
+        <a:font script="Hant" typeface="新細明體"/>
+        <a:font script="Arab" typeface="Times New Roman"/>
+        <a:font script="Hebr" typeface="Times New Roman"/>
+        <a:font script="Thai" typeface="Angsana New"/>
+        <a:font script="Ethi" typeface="Nyala"/>
+        <a:font script="Beng" typeface="Vrinda"/>
+        <a:font script="Gujr" typeface="Shruti"/>
+        <a:font script="Khmr" typeface="MoolBoran"/>
+        <a:font script="Knda" typeface="Tunga"/>
+        <a:font script="Guru" typeface="Raavi"/>
+        <a:font script="Cans" typeface="Euphemia"/>
+        <a:font script="Cher" typeface="Plantagenet Cherokee"/>
+        <a:font script="Yiii" typeface="Microsoft Yi Baiti"/>
+        <a:font script="Tibt" typeface="Microsoft Himalaya"/>
+        <a:font script="Thaa" typeface="MV Boli"/>
+        <a:font script="Deva" typeface="Mangal"/>
+        <a:font script="Telu" typeface="Gautami"/>
+        <a:font script="Taml" typeface="Latha"/>
+        <a:font script="Syrc" typeface="Estrangelo Edessa"/>
+        <a:font script="Orya" typeface="Kalinga"/>
+        <a:font script="Mlym" typeface="Kartika"/>
+        <a:font script="Laoo" typeface="DokChampa"/>
+        <a:font script="Sinh" typeface="Iskoola Pota"/>
+        <a:font script="Mong" typeface="Mongolian Baiti"/>
+        <a:font script="Viet" typeface="Times New Roman"/>
+        <a:font script="Uigh" typeface="Microsoft Uighur"/>
+        <a:font script="Geor" typeface="Sylfaen"/>
+        <a:font script="Armn" typeface="Arial"/>
+        <a:font script="Bugi" typeface="Leelawadee UI"/>
+        <a:font script="Bopo" typeface="Microsoft JhengHei"/>
+        <a:font script="Java" typeface="Javanese Text"/>
+        <a:font script="Lisu" typeface="Segoe UI"/>
+        <a:font script="Mymr" typeface="Myanmar Text"/>
+        <a:font script="Nkoo" typeface="Ebrima"/>
+        <a:font script="Olck" typeface="Nirmala UI"/>
+        <a:font script="Osma" typeface="Ebrima"/>
+        <a:font script="Phag" typeface="Phagspa"/>
+        <a:font script="Syrn" typeface="Estrangelo Edessa"/>
+        <a:font script="Syrj" typeface="Estrangelo Edessa"/>
+        <a:font script="Syre" typeface="Estrangelo Edessa"/>
+        <a:font script="Sora" typeface="Nirmala UI"/>
+        <a:font script="Tale" typeface="Microsoft Tai Le"/>
+        <a:font script="Talu" typeface="Microsoft New Tai Lue"/>
+        <a:font script="Tfng" typeface="Ebrima"/>
+      </a:majorFont>
+      <a:minorFont>
+        <a:latin typeface="Aptos" panose="02110004020202020204"/>
+        <a:ea typeface=""/>
+        <a:cs typeface=""/>
+        <a:font script="Jpan" typeface="游ゴシック"/>
+        <a:font script="Hang" typeface="맑은 고딕"/>
+        <a:font script="Hans" typeface="等线"/>
+        <a:font script="Hant" typeface="新細明體"/>
+        <a:font script="Arab" typeface="Arial"/>
+        <a:font script="Hebr" typeface="Arial"/>
+        <a:font script="Thai" typeface="Cordia New"/>
+        <a:font script="Ethi" typeface="Nyala"/>
+        <a:font script="Beng" typeface="Vrinda"/>
+        <a:font script="Gujr" typeface="Shruti"/>
+        <a:font script="Khmr" typeface="DaunPenh"/>
+        <a:font script="Knda" typeface="Tunga"/>
+        <a:font script="Guru" typeface="Raavi"/>
+        <a:font script="Cans" typeface="Euphemia"/>
+        <a:font script="Cher" typeface="Plantagenet Cherokee"/>
+        <a:font script="Yiii" typeface="Microsoft Yi Baiti"/>
+        <a:font script="Tibt" typeface="Microsoft Himalaya"/>
+        <a:font script="Thaa" typeface="MV Boli"/>
+        <a:font script="Deva" typeface="Mangal"/>
+        <a:font script="Telu" typeface="Gautami"/>
+        <a:font script="Taml" typeface="Latha"/>
+        <a:font script="Syrc" typeface="Estrangelo Edessa"/>
+        <a:font script="Orya" typeface="Kalinga"/>
+        <a:font script="Mlym" typeface="Kartika"/>
+        <a:font script="Laoo" typeface="DokChampa"/>
+        <a:font script="Sinh" typeface="Iskoola Pota"/>
+        <a:font script="Mong" typeface="Mongolian Baiti"/>
+        <a:font script="Viet" typeface="Arial"/>
+        <a:font script="Uigh" typeface="Microsoft Uighur"/>
+        <a:font script="Geor" typeface="Sylfaen"/>
+        <a:font script="Armn" typeface="Arial"/>
+        <a:font script="Bugi" typeface="Leelawadee UI"/>
+        <a:font script="Bopo" typeface="Microsoft JhengHei"/>
+        <a:font script="Java" typeface="Javanese Text"/>
+        <a:font script="Lisu" typeface="Segoe UI"/>
+        <a:font script="Mymr" typeface="Myanmar Text"/>
+        <a:font script="Nkoo" typeface="Ebrima"/>
+        <a:font script="Olck" typeface="Nirmala UI"/>
+        <a:font script="Osma" typeface="Ebrima"/>
+        <a:font script="Phag" typeface="Phagspa"/>
+        <a:font script="Syrn" typeface="Estrangelo Edessa"/>
+        <a:font script="Syrj" typeface="Estrangelo Edessa"/>
+        <a:font script="Syre" typeface="Estrangelo Edessa"/>
+        <a:font script="Sora" typeface="Nirmala UI"/>
+        <a:font script="Tale" typeface="Microsoft Tai Le"/>
+        <a:font script="Talu" typeface="Microsoft New Tai Lue"/>
+        <a:font script="Tfng" typeface="Ebrima"/>
+      </a:minorFont>
+    </a:fontScheme>
+    <a:fmtScheme name="Office">
+      <a:fillStyleLst>
+        <a:solidFill>
+          <a:schemeClr val="phClr"/>
+        </a:solidFill>
+        <a:gradFill rotWithShape="1">
+          <a:gsLst>
+            <a:gs pos="0">
+              <a:schemeClr val="phClr">
+                <a:lumMod val="110000"/>
+                <a:satMod val="105000"/>
+                <a:tint val="67000"/>
+              </a:schemeClr>
+            </a:gs>
+            <a:gs pos="50000">
+              <a:schemeClr val="phClr">
+                <a:lumMod val="105000"/>
+                <a:satMod val="103000"/>
+                <a:tint val="73000"/>
+              </a:schemeClr>
+            </a:gs>
+            <a:gs pos="100000">
+              <a:schemeClr val="phClr">
+                <a:lumMod val="105000"/>
+                <a:satMod val="109000"/>
+                <a:tint val="81000"/>
+              </a:schemeClr>
+            </a:gs>
+          </a:gsLst>
+          <a:lin ang="5400000" scaled="0"/>
+        </a:gradFill>
+        <a:gradFill rotWithShape="1">
+          <a:gsLst>
+            <a:gs pos="0">
+              <a:schemeClr val="phClr">
+                <a:satMod val="103000"/>
+                <a:lumMod val="102000"/>
+                <a:tint val="94000"/>
+              </a:schemeClr>
+            </a:gs>
+            <a:gs pos="50000">
+              <a:schemeClr val="phClr">
+                <a:satMod val="110000"/>
+                <a:lumMod val="100000"/>
+                <a:shade val="100000"/>
+              </a:schemeClr>
+            </a:gs>
+            <a:gs pos="100000">
+              <a:schemeClr val="phClr">
+                <a:lumMod val="99000"/>
+                <a:satMod val="120000"/>
+                <a:shade val="78000"/>
+              </a:schemeClr>
+            </a:gs>
+          </a:gsLst>
+          <a:lin ang="5400000" scaled="0"/>
+        </a:gradFill>
+      </a:fillStyleLst>
+      <a:lnStyleLst>
+        <a:ln w="12700" cap="flat" cmpd="sng" algn="ctr">
+          <a:solidFill>
+            <a:schemeClr val="phClr"/>
+          </a:solidFill>
+          <a:prstDash val="solid"/>
+          <a:miter lim="800000"/>
+        </a:ln>
+        <a:ln w="19050" cap="flat" cmpd="sng" algn="ctr">
+          <a:solidFill>
+            <a:schemeClr val="phClr"/>
+          </a:solidFill>
+          <a:prstDash val="solid"/>
+          <a:miter lim="800000"/>
+        </a:ln>
+        <a:ln w="25400" cap="flat" cmpd="sng" algn="ctr">
+          <a:solidFill>
+            <a:schemeClr val="phClr"/>
+          </a:solidFill>
+          <a:prstDash val="solid"/>
+          <a:miter lim="800000"/>
+        </a:ln>
+      </a:lnStyleLst>
+      <a:effectStyleLst>
+        <a:effectStyle>
+          <a:effectLst/>
+        </a:effectStyle>
+        <a:effectStyle>
+          <a:effectLst/>
+        </a:effectStyle>
+        <a:effectStyle>
+          <a:effectLst>
+            <a:outerShdw blurRad="57150" dist="19050" dir="5400000" algn="ctr" rotWithShape="0">
+              <a:srgbClr val="000000">
+                <a:alpha val="63000"/>
+              </a:srgbClr>
+            </a:outerShdw>
+          </a:effectLst>
+        </a:effectStyle>
+      </a:effectStyleLst>
+      <a:bgFillStyleLst>
+        <a:solidFill>
+          <a:schemeClr val="phClr"/>
+        </a:solidFill>
+        <a:solidFill>
+          <a:schemeClr val="phClr">
+            <a:tint val="95000"/>
+            <a:satMod val="170000"/>
+          </a:schemeClr>
+        </a:solidFill>
+        <a:gradFill rotWithShape="1">
+          <a:gsLst>
+            <a:gs pos="0">
+              <a:schemeClr val="phClr">
+                <a:tint val="93000"/>
+                <a:satMod val="150000"/>
+                <a:shade val="98000"/>
+                <a:lumMod val="102000"/>
+              </a:schemeClr>
+            </a:gs>
+            <a:gs pos="50000">
+              <a:schemeClr val="phClr">
+                <a:tint val="98000"/>
+                <a:satMod val="130000"/>
+                <a:shade val="90000"/>
+                <a:lumMod val="103000"/>
+              </a:schemeClr>
+            </a:gs>
+            <a:gs pos="100000">
+              <a:schemeClr val="phClr">
+                <a:shade val="63000"/>
+                <a:satMod val="120000"/>
+              </a:schemeClr>
+            </a:gs>
+          </a:gsLst>
+          <a:lin ang="5400000" scaled="0"/>
+        </a:gradFill>
+      </a:bgFillStyleLst>
+    </a:fmtScheme>
+  </a:themeElements>
+  <a:objectDefaults>
+    <a:lnDef>
+      <a:spPr/>
+      <a:bodyPr/>
+      <a:lstStyle/>
+      <a:style>
+        <a:lnRef idx="2">
+          <a:schemeClr val="accent1"/>
+        </a:lnRef>
+        <a:fillRef idx="0">
+          <a:schemeClr val="accent1"/>
+        </a:fillRef>
+        <a:effectRef idx="1">
+          <a:schemeClr val="accent1"/>
+        </a:effectRef>
+        <a:fontRef idx="minor">
+          <a:schemeClr val="tx1"/>
+        </a:fontRef>
+      </a:style>
+    </a:lnDef>
+  </a:objectDefaults>
+  <a:extraClrSchemeLst/>
+  <a:extLst>
+    <a:ext uri="{05A4C25C-085E-4340-85A3-A5531E510DB2}">
+      <thm15:themeFamily xmlns:thm15="http://schemas.microsoft.com/office/thememl/2012/main" name="Office Theme" id="{2E142A2C-CD16-42D6-873A-C26D2A0506FA}" vid="{1BDDFF52-6CD6-40A5-AB3C-68EB2F1E4D0A}"/>
+    </a:ext>
+  </a:extLst>
+</a:theme>
 </file>